--- a/Mapped Curriculum Lessons/Grade 7/Lesson 26 - Building Lists with Loops/Building Lists with Loops - Slides.pptx
+++ b/Mapped Curriculum Lessons/Grade 7/Lesson 26 - Building Lists with Loops/Building Lists with Loops - Slides.pptx
@@ -2,28 +2,28 @@
 <file path=ppt/presentation.xml><?xml version="1.0" encoding="utf-8"?>
 <p:presentation xmlns:p="http://schemas.openxmlformats.org/presentationml/2006/main" embedTrueTypeFonts="1" saveSubsetFonts="0">
   <p:sldMasterIdLst>
-    <p:sldMasterId xmlns:r="http://schemas.openxmlformats.org/officeDocument/2006/relationships" id="2147483648" r:id="Re0be6b6a9fae455a"/>
+    <p:sldMasterId xmlns:r="http://schemas.openxmlformats.org/officeDocument/2006/relationships" id="2147483648" r:id="R2db5dcf51078400c"/>
   </p:sldMasterIdLst>
   <p:notesMasterIdLst>
-    <p:notesMasterId xmlns:r="http://schemas.openxmlformats.org/officeDocument/2006/relationships" r:id="R1875edc6235c4f7f"/>
+    <p:notesMasterId xmlns:r="http://schemas.openxmlformats.org/officeDocument/2006/relationships" r:id="Rc54d7803dfc441d2"/>
   </p:notesMasterIdLst>
   <p:sldIdLst>
-    <p:sldId xmlns:r="http://schemas.openxmlformats.org/officeDocument/2006/relationships" id="256" r:id="R712d1540e6af468d"/>
-    <p:sldId xmlns:r="http://schemas.openxmlformats.org/officeDocument/2006/relationships" id="257" r:id="R43f410cdc91649d3"/>
-    <p:sldId xmlns:r="http://schemas.openxmlformats.org/officeDocument/2006/relationships" id="258" r:id="Reb97685b50284be0"/>
-    <p:sldId xmlns:r="http://schemas.openxmlformats.org/officeDocument/2006/relationships" id="259" r:id="R2417ba8a743b4c44"/>
-    <p:sldId xmlns:r="http://schemas.openxmlformats.org/officeDocument/2006/relationships" id="260" r:id="R2dc0571298cf4711"/>
-    <p:sldId xmlns:r="http://schemas.openxmlformats.org/officeDocument/2006/relationships" id="261" r:id="R21b8e63fd1424516"/>
-    <p:sldId xmlns:r="http://schemas.openxmlformats.org/officeDocument/2006/relationships" id="262" r:id="R3d661266c2984f24"/>
-    <p:sldId xmlns:r="http://schemas.openxmlformats.org/officeDocument/2006/relationships" id="263" r:id="Rd669fc52f7064d04"/>
-    <p:sldId xmlns:r="http://schemas.openxmlformats.org/officeDocument/2006/relationships" id="264" r:id="R4f6e9e02c5aa4544"/>
+    <p:sldId xmlns:r="http://schemas.openxmlformats.org/officeDocument/2006/relationships" id="256" r:id="R27b5b16e8f5d47a9"/>
+    <p:sldId xmlns:r="http://schemas.openxmlformats.org/officeDocument/2006/relationships" id="257" r:id="Rb8db052683204624"/>
+    <p:sldId xmlns:r="http://schemas.openxmlformats.org/officeDocument/2006/relationships" id="258" r:id="R71e928b85ba94b94"/>
+    <p:sldId xmlns:r="http://schemas.openxmlformats.org/officeDocument/2006/relationships" id="259" r:id="R5551f946e6b44d7a"/>
+    <p:sldId xmlns:r="http://schemas.openxmlformats.org/officeDocument/2006/relationships" id="260" r:id="R89ebd1314478479a"/>
+    <p:sldId xmlns:r="http://schemas.openxmlformats.org/officeDocument/2006/relationships" id="261" r:id="R4e80d16dc7924ca3"/>
+    <p:sldId xmlns:r="http://schemas.openxmlformats.org/officeDocument/2006/relationships" id="262" r:id="R2eb2f20c3b324c5b"/>
+    <p:sldId xmlns:r="http://schemas.openxmlformats.org/officeDocument/2006/relationships" id="263" r:id="R3b6adf21e5c04a38"/>
+    <p:sldId xmlns:r="http://schemas.openxmlformats.org/officeDocument/2006/relationships" id="264" r:id="Rfa01940c48b64193"/>
   </p:sldIdLst>
   <p:sldSz cx="12192000" cy="6858000"/>
   <p:notesSz cx="6858000" cy="9144000"/>
   <p:embeddedFontLst>
     <p:embeddedFont>
       <p:font typeface="JetBrains Mono"/>
-      <p:regular xmlns:r="http://schemas.openxmlformats.org/officeDocument/2006/relationships" r:id="Rba5b2959e6724ff6"/>
+      <p:regular xmlns:r="http://schemas.openxmlformats.org/officeDocument/2006/relationships" r:id="Rc17e48fe2601435d"/>
     </p:embeddedFont>
   </p:embeddedFontLst>
 </p:presentation>
@@ -1071,7 +1071,7 @@
           <p:nvPr/>
         </p:nvPicPr>
         <p:blipFill rotWithShape="1">
-          <a:blip xmlns:r="http://schemas.openxmlformats.org/officeDocument/2006/relationships" xmlns:a="http://schemas.openxmlformats.org/drawingml/2006/main" r:embed="R1af9f43f87a547c4"/>
+          <a:blip xmlns:r="http://schemas.openxmlformats.org/officeDocument/2006/relationships" xmlns:a="http://schemas.openxmlformats.org/drawingml/2006/main" r:embed="R5c74ae8863634a9b"/>
           <a:stretch xmlns:a="http://schemas.openxmlformats.org/drawingml/2006/main"/>
         </p:blipFill>
         <p:spPr>
@@ -1451,7 +1451,7 @@
           <p:nvPr/>
         </p:nvPicPr>
         <p:blipFill rotWithShape="1">
-          <a:blip xmlns:r="http://schemas.openxmlformats.org/officeDocument/2006/relationships" xmlns:a="http://schemas.openxmlformats.org/drawingml/2006/main" r:embed="Rceb27f2219234fef">
+          <a:blip xmlns:r="http://schemas.openxmlformats.org/officeDocument/2006/relationships" xmlns:a="http://schemas.openxmlformats.org/drawingml/2006/main" r:embed="Rdd58421cd9ff4c99">
             <a:alphaModFix amt="28000"/>
           </a:blip>
           <a:stretch xmlns:a="http://schemas.openxmlformats.org/drawingml/2006/main"/>
@@ -1664,7 +1664,7 @@
           <p:nvPr/>
         </p:nvPicPr>
         <p:blipFill rotWithShape="1">
-          <a:blip xmlns:r="http://schemas.openxmlformats.org/officeDocument/2006/relationships" xmlns:a="http://schemas.openxmlformats.org/drawingml/2006/main" r:embed="R66ca6353256c466f">
+          <a:blip xmlns:r="http://schemas.openxmlformats.org/officeDocument/2006/relationships" xmlns:a="http://schemas.openxmlformats.org/drawingml/2006/main" r:embed="R0d755e3c6c7843c2">
             <a:alphaModFix amt="28000"/>
           </a:blip>
           <a:stretch xmlns:a="http://schemas.openxmlformats.org/drawingml/2006/main"/>
@@ -1899,7 +1899,7 @@
           <p:nvPr/>
         </p:nvPicPr>
         <p:blipFill rotWithShape="1">
-          <a:blip xmlns:r="http://schemas.openxmlformats.org/officeDocument/2006/relationships" xmlns:a="http://schemas.openxmlformats.org/drawingml/2006/main" r:embed="R9a04a90164c44b4f">
+          <a:blip xmlns:r="http://schemas.openxmlformats.org/officeDocument/2006/relationships" xmlns:a="http://schemas.openxmlformats.org/drawingml/2006/main" r:embed="R39ae3a7e5cce434a">
             <a:alphaModFix amt="28000"/>
           </a:blip>
           <a:stretch xmlns:a="http://schemas.openxmlformats.org/drawingml/2006/main"/>
@@ -2176,7 +2176,7 @@
           <p:nvPr/>
         </p:nvPicPr>
         <p:blipFill rotWithShape="1">
-          <a:blip xmlns:r="http://schemas.openxmlformats.org/officeDocument/2006/relationships" xmlns:a="http://schemas.openxmlformats.org/drawingml/2006/main" r:embed="R59fa0e76312f436a">
+          <a:blip xmlns:r="http://schemas.openxmlformats.org/officeDocument/2006/relationships" xmlns:a="http://schemas.openxmlformats.org/drawingml/2006/main" r:embed="R7da1d46744ea4caa">
             <a:alphaModFix amt="28000"/>
           </a:blip>
           <a:stretch xmlns:a="http://schemas.openxmlformats.org/drawingml/2006/main"/>
@@ -2451,7 +2451,7 @@
           <p:nvPr/>
         </p:nvPicPr>
         <p:blipFill rotWithShape="1">
-          <a:blip xmlns:r="http://schemas.openxmlformats.org/officeDocument/2006/relationships" xmlns:a="http://schemas.openxmlformats.org/drawingml/2006/main" r:embed="Re8486b02daef4d7f">
+          <a:blip xmlns:r="http://schemas.openxmlformats.org/officeDocument/2006/relationships" xmlns:a="http://schemas.openxmlformats.org/drawingml/2006/main" r:embed="R08c3727374884e10">
             <a:alphaModFix amt="28000"/>
           </a:blip>
           <a:stretch xmlns:a="http://schemas.openxmlformats.org/drawingml/2006/main"/>
@@ -2875,7 +2875,7 @@
           <p:nvPr/>
         </p:nvPicPr>
         <p:blipFill rotWithShape="1">
-          <a:blip xmlns:r="http://schemas.openxmlformats.org/officeDocument/2006/relationships" xmlns:a="http://schemas.openxmlformats.org/drawingml/2006/main" r:embed="Rc7b991152387415d">
+          <a:blip xmlns:r="http://schemas.openxmlformats.org/officeDocument/2006/relationships" xmlns:a="http://schemas.openxmlformats.org/drawingml/2006/main" r:embed="R79274af47ce54dc5">
             <a:alphaModFix amt="28000"/>
           </a:blip>
           <a:stretch xmlns:a="http://schemas.openxmlformats.org/drawingml/2006/main"/>
@@ -3016,7 +3016,7 @@
           <p:nvPr/>
         </p:nvPicPr>
         <p:blipFill rotWithShape="1">
-          <a:blip xmlns:r="http://schemas.openxmlformats.org/officeDocument/2006/relationships" xmlns:a="http://schemas.openxmlformats.org/drawingml/2006/main" r:embed="Re5e8a2c7cd3340a1">
+          <a:blip xmlns:r="http://schemas.openxmlformats.org/officeDocument/2006/relationships" xmlns:a="http://schemas.openxmlformats.org/drawingml/2006/main" r:embed="R02c23d2be9084f80">
             <a:alphaModFix amt="28000"/>
           </a:blip>
           <a:stretch xmlns:a="http://schemas.openxmlformats.org/drawingml/2006/main"/>
@@ -3130,7 +3130,7 @@
           <p:nvPr/>
         </p:nvPicPr>
         <p:blipFill rotWithShape="1">
-          <a:blip xmlns:r="http://schemas.openxmlformats.org/officeDocument/2006/relationships" xmlns:a="http://schemas.openxmlformats.org/drawingml/2006/main" r:embed="Rc28fc4d7e9e14446">
+          <a:blip xmlns:r="http://schemas.openxmlformats.org/officeDocument/2006/relationships" xmlns:a="http://schemas.openxmlformats.org/drawingml/2006/main" r:embed="Rf7768769eadf441f">
             <a:alphaModFix amt="28000"/>
           </a:blip>
           <a:stretch xmlns:a="http://schemas.openxmlformats.org/drawingml/2006/main"/>
@@ -3457,7 +3457,7 @@
           <p:nvPr/>
         </p:nvPicPr>
         <p:blipFill rotWithShape="1">
-          <a:blip xmlns:r="http://schemas.openxmlformats.org/officeDocument/2006/relationships" xmlns:a="http://schemas.openxmlformats.org/drawingml/2006/main" r:embed="R83d8a204f8d54da3">
+          <a:blip xmlns:r="http://schemas.openxmlformats.org/officeDocument/2006/relationships" xmlns:a="http://schemas.openxmlformats.org/drawingml/2006/main" r:embed="R08941f724f484e9b">
             <a:alphaModFix amt="28000"/>
           </a:blip>
           <a:stretch xmlns:a="http://schemas.openxmlformats.org/drawingml/2006/main"/>
@@ -3745,7 +3745,7 @@
           <p:nvPr/>
         </p:nvPicPr>
         <p:blipFill rotWithShape="1">
-          <a:blip xmlns:r="http://schemas.openxmlformats.org/officeDocument/2006/relationships" xmlns:a="http://schemas.openxmlformats.org/drawingml/2006/main" r:embed="R0082e77b1f0443e9">
+          <a:blip xmlns:r="http://schemas.openxmlformats.org/officeDocument/2006/relationships" xmlns:a="http://schemas.openxmlformats.org/drawingml/2006/main" r:embed="R863f9c253983432a">
             <a:alphaModFix amt="28000"/>
           </a:blip>
           <a:stretch xmlns:a="http://schemas.openxmlformats.org/drawingml/2006/main"/>
@@ -3982,17 +3982,17 @@
   </p:cSld>
   <p:clrMap bg1="lt1" tx1="dk1" bg2="lt2" tx2="dk2" accent1="accent1" accent2="accent2" accent3="accent3" accent4="accent4" accent5="accent5" accent6="accent6" hlink="hlink" folHlink="folHlink"/>
   <p:sldLayoutIdLst>
-    <p:sldLayoutId xmlns:r="http://schemas.openxmlformats.org/officeDocument/2006/relationships" id="2147483649" r:id="Re0f5c34cf3044b18"/>
-    <p:sldLayoutId xmlns:r="http://schemas.openxmlformats.org/officeDocument/2006/relationships" id="2147483650" r:id="Rfe46c7b66b7b4dbe"/>
-    <p:sldLayoutId xmlns:r="http://schemas.openxmlformats.org/officeDocument/2006/relationships" id="2147483651" r:id="Re22cd49d4d4f4a4a"/>
-    <p:sldLayoutId xmlns:r="http://schemas.openxmlformats.org/officeDocument/2006/relationships" id="2147483652" r:id="Ra2d3d496440440e0"/>
-    <p:sldLayoutId xmlns:r="http://schemas.openxmlformats.org/officeDocument/2006/relationships" id="2147483653" r:id="R58e367f2bc364440"/>
-    <p:sldLayoutId xmlns:r="http://schemas.openxmlformats.org/officeDocument/2006/relationships" id="2147483654" r:id="R73f3f43bee6544b9"/>
-    <p:sldLayoutId xmlns:r="http://schemas.openxmlformats.org/officeDocument/2006/relationships" id="2147483655" r:id="R5ca8e673d81b4f9f"/>
-    <p:sldLayoutId xmlns:r="http://schemas.openxmlformats.org/officeDocument/2006/relationships" id="2147483656" r:id="R2af72e78ddd84ac7"/>
-    <p:sldLayoutId xmlns:r="http://schemas.openxmlformats.org/officeDocument/2006/relationships" id="2147483657" r:id="R1b5185475b21419a"/>
-    <p:sldLayoutId xmlns:r="http://schemas.openxmlformats.org/officeDocument/2006/relationships" id="2147483658" r:id="Rf63bb941c38d40e2"/>
-    <p:sldLayoutId xmlns:r="http://schemas.openxmlformats.org/officeDocument/2006/relationships" id="2147483659" r:id="R1277792298714102"/>
+    <p:sldLayoutId xmlns:r="http://schemas.openxmlformats.org/officeDocument/2006/relationships" id="2147483649" r:id="R521c5e2e1054401b"/>
+    <p:sldLayoutId xmlns:r="http://schemas.openxmlformats.org/officeDocument/2006/relationships" id="2147483650" r:id="Rd52f151ec9d6457f"/>
+    <p:sldLayoutId xmlns:r="http://schemas.openxmlformats.org/officeDocument/2006/relationships" id="2147483651" r:id="Rbed888a206ea4940"/>
+    <p:sldLayoutId xmlns:r="http://schemas.openxmlformats.org/officeDocument/2006/relationships" id="2147483652" r:id="Rd3baff7c036c4891"/>
+    <p:sldLayoutId xmlns:r="http://schemas.openxmlformats.org/officeDocument/2006/relationships" id="2147483653" r:id="Rd9b0dbc0ce004f72"/>
+    <p:sldLayoutId xmlns:r="http://schemas.openxmlformats.org/officeDocument/2006/relationships" id="2147483654" r:id="Rce101d22200949cc"/>
+    <p:sldLayoutId xmlns:r="http://schemas.openxmlformats.org/officeDocument/2006/relationships" id="2147483655" r:id="R65e78f476e3b40a2"/>
+    <p:sldLayoutId xmlns:r="http://schemas.openxmlformats.org/officeDocument/2006/relationships" id="2147483656" r:id="R20bca12fc9ef4a84"/>
+    <p:sldLayoutId xmlns:r="http://schemas.openxmlformats.org/officeDocument/2006/relationships" id="2147483657" r:id="R1d96cc364e5f48b1"/>
+    <p:sldLayoutId xmlns:r="http://schemas.openxmlformats.org/officeDocument/2006/relationships" id="2147483658" r:id="R994b5466107f48ea"/>
+    <p:sldLayoutId xmlns:r="http://schemas.openxmlformats.org/officeDocument/2006/relationships" id="2147483659" r:id="Rddf9fd033bf54efe"/>
   </p:sldLayoutIdLst>
   <p:hf hdr="0" ftr="0" dt="0"/>
   <p:txStyles>
@@ -8172,51 +8172,7 @@
                 <a:ea typeface="Calibri"/>
                 <a:cs typeface="Calibri"/>
               </a:rPr>
-              <a:t>Replace the fixed input loop with a condition-controlled loop. Keep asking for a note until </a:t>
-            </a:r>
-            <a:r>
-              <a:rPr sz="2400" b="0">
-                <a:solidFill>
-                  <a:srgbClr val="067D17"/>
-                </a:solidFill>
-                <a:latin typeface="JetBrains Mono"/>
-                <a:ea typeface="JetBrains Mono"/>
-                <a:cs typeface="JetBrains Mono"/>
-              </a:rPr>
-              <a:t>"stop"</a:t>
-            </a:r>
-            <a:r>
-              <a:rPr sz="2400" b="0">
-                <a:solidFill>
-                  <a:srgbClr val="080808"/>
-                </a:solidFill>
-                <a:latin typeface="Calibri"/>
-                <a:ea typeface="Calibri"/>
-                <a:cs typeface="Calibri"/>
-              </a:rPr>
-              <a:t> is entered; do not append or display the sentinel </a:t>
-            </a:r>
-            <a:r>
-              <a:rPr sz="2400" b="0">
-                <a:solidFill>
-                  <a:srgbClr val="067D17"/>
-                </a:solidFill>
-                <a:latin typeface="JetBrains Mono"/>
-                <a:ea typeface="JetBrains Mono"/>
-                <a:cs typeface="JetBrains Mono"/>
-              </a:rPr>
-              <a:t>"stop"</a:t>
-            </a:r>
-            <a:r>
-              <a:rPr sz="2400" b="0">
-                <a:solidFill>
-                  <a:srgbClr val="080808"/>
-                </a:solidFill>
-                <a:latin typeface="Calibri"/>
-                <a:ea typeface="Calibri"/>
-                <a:cs typeface="Calibri"/>
-              </a:rPr>
-              <a:t>.</a:t>
+              <a:t>Replace the fixed input loop with a condition-controlled loop. Keep asking for a note until stop is entered; do not append or display the sentinel stop.</a:t>
             </a:r>
           </a:p>
         </p:txBody>

--- a/Mapped Curriculum Lessons/Grade 7/Lesson 26 - Building Lists with Loops/Building Lists with Loops - Slides.pptx
+++ b/Mapped Curriculum Lessons/Grade 7/Lesson 26 - Building Lists with Loops/Building Lists with Loops - Slides.pptx
@@ -2,28 +2,28 @@
 <file path=ppt/presentation.xml><?xml version="1.0" encoding="utf-8"?>
 <p:presentation xmlns:p="http://schemas.openxmlformats.org/presentationml/2006/main" embedTrueTypeFonts="1" saveSubsetFonts="0">
   <p:sldMasterIdLst>
-    <p:sldMasterId xmlns:r="http://schemas.openxmlformats.org/officeDocument/2006/relationships" id="2147483648" r:id="R2db5dcf51078400c"/>
+    <p:sldMasterId xmlns:r="http://schemas.openxmlformats.org/officeDocument/2006/relationships" id="2147483648" r:id="Rad8c0d9f5b514404"/>
   </p:sldMasterIdLst>
   <p:notesMasterIdLst>
-    <p:notesMasterId xmlns:r="http://schemas.openxmlformats.org/officeDocument/2006/relationships" r:id="Rc54d7803dfc441d2"/>
+    <p:notesMasterId xmlns:r="http://schemas.openxmlformats.org/officeDocument/2006/relationships" r:id="Ra77317ed15644059"/>
   </p:notesMasterIdLst>
   <p:sldIdLst>
-    <p:sldId xmlns:r="http://schemas.openxmlformats.org/officeDocument/2006/relationships" id="256" r:id="R27b5b16e8f5d47a9"/>
-    <p:sldId xmlns:r="http://schemas.openxmlformats.org/officeDocument/2006/relationships" id="257" r:id="Rb8db052683204624"/>
-    <p:sldId xmlns:r="http://schemas.openxmlformats.org/officeDocument/2006/relationships" id="258" r:id="R71e928b85ba94b94"/>
-    <p:sldId xmlns:r="http://schemas.openxmlformats.org/officeDocument/2006/relationships" id="259" r:id="R5551f946e6b44d7a"/>
-    <p:sldId xmlns:r="http://schemas.openxmlformats.org/officeDocument/2006/relationships" id="260" r:id="R89ebd1314478479a"/>
-    <p:sldId xmlns:r="http://schemas.openxmlformats.org/officeDocument/2006/relationships" id="261" r:id="R4e80d16dc7924ca3"/>
-    <p:sldId xmlns:r="http://schemas.openxmlformats.org/officeDocument/2006/relationships" id="262" r:id="R2eb2f20c3b324c5b"/>
-    <p:sldId xmlns:r="http://schemas.openxmlformats.org/officeDocument/2006/relationships" id="263" r:id="R3b6adf21e5c04a38"/>
-    <p:sldId xmlns:r="http://schemas.openxmlformats.org/officeDocument/2006/relationships" id="264" r:id="Rfa01940c48b64193"/>
+    <p:sldId xmlns:r="http://schemas.openxmlformats.org/officeDocument/2006/relationships" id="256" r:id="R6eb32ea12b144509"/>
+    <p:sldId xmlns:r="http://schemas.openxmlformats.org/officeDocument/2006/relationships" id="257" r:id="R7aec81969c7e4de4"/>
+    <p:sldId xmlns:r="http://schemas.openxmlformats.org/officeDocument/2006/relationships" id="258" r:id="Re8d9482feff8493d"/>
+    <p:sldId xmlns:r="http://schemas.openxmlformats.org/officeDocument/2006/relationships" id="259" r:id="Rd68ef37d56104917"/>
+    <p:sldId xmlns:r="http://schemas.openxmlformats.org/officeDocument/2006/relationships" id="260" r:id="R5271bc56ab2a42fc"/>
+    <p:sldId xmlns:r="http://schemas.openxmlformats.org/officeDocument/2006/relationships" id="261" r:id="R669e79fe77f94f87"/>
+    <p:sldId xmlns:r="http://schemas.openxmlformats.org/officeDocument/2006/relationships" id="262" r:id="R6d4fe9a5c7e54754"/>
+    <p:sldId xmlns:r="http://schemas.openxmlformats.org/officeDocument/2006/relationships" id="263" r:id="R21f9fabb50224807"/>
+    <p:sldId xmlns:r="http://schemas.openxmlformats.org/officeDocument/2006/relationships" id="264" r:id="Radf78fb1bd0e4d4c"/>
   </p:sldIdLst>
   <p:sldSz cx="12192000" cy="6858000"/>
   <p:notesSz cx="6858000" cy="9144000"/>
   <p:embeddedFontLst>
     <p:embeddedFont>
       <p:font typeface="JetBrains Mono"/>
-      <p:regular xmlns:r="http://schemas.openxmlformats.org/officeDocument/2006/relationships" r:id="Rc17e48fe2601435d"/>
+      <p:regular xmlns:r="http://schemas.openxmlformats.org/officeDocument/2006/relationships" r:id="R19e1cb71890545b5"/>
     </p:embeddedFont>
   </p:embeddedFontLst>
 </p:presentation>
@@ -1071,7 +1071,7 @@
           <p:nvPr/>
         </p:nvPicPr>
         <p:blipFill rotWithShape="1">
-          <a:blip xmlns:r="http://schemas.openxmlformats.org/officeDocument/2006/relationships" xmlns:a="http://schemas.openxmlformats.org/drawingml/2006/main" r:embed="R5c74ae8863634a9b"/>
+          <a:blip xmlns:r="http://schemas.openxmlformats.org/officeDocument/2006/relationships" xmlns:a="http://schemas.openxmlformats.org/drawingml/2006/main" r:embed="R3e40943621bc4feb"/>
           <a:stretch xmlns:a="http://schemas.openxmlformats.org/drawingml/2006/main"/>
         </p:blipFill>
         <p:spPr>
@@ -1451,7 +1451,7 @@
           <p:nvPr/>
         </p:nvPicPr>
         <p:blipFill rotWithShape="1">
-          <a:blip xmlns:r="http://schemas.openxmlformats.org/officeDocument/2006/relationships" xmlns:a="http://schemas.openxmlformats.org/drawingml/2006/main" r:embed="Rdd58421cd9ff4c99">
+          <a:blip xmlns:r="http://schemas.openxmlformats.org/officeDocument/2006/relationships" xmlns:a="http://schemas.openxmlformats.org/drawingml/2006/main" r:embed="R868f31dabcd14f03">
             <a:alphaModFix amt="28000"/>
           </a:blip>
           <a:stretch xmlns:a="http://schemas.openxmlformats.org/drawingml/2006/main"/>
@@ -1664,7 +1664,7 @@
           <p:nvPr/>
         </p:nvPicPr>
         <p:blipFill rotWithShape="1">
-          <a:blip xmlns:r="http://schemas.openxmlformats.org/officeDocument/2006/relationships" xmlns:a="http://schemas.openxmlformats.org/drawingml/2006/main" r:embed="R0d755e3c6c7843c2">
+          <a:blip xmlns:r="http://schemas.openxmlformats.org/officeDocument/2006/relationships" xmlns:a="http://schemas.openxmlformats.org/drawingml/2006/main" r:embed="R5ec8312fb5ae42eb">
             <a:alphaModFix amt="28000"/>
           </a:blip>
           <a:stretch xmlns:a="http://schemas.openxmlformats.org/drawingml/2006/main"/>
@@ -1899,7 +1899,7 @@
           <p:nvPr/>
         </p:nvPicPr>
         <p:blipFill rotWithShape="1">
-          <a:blip xmlns:r="http://schemas.openxmlformats.org/officeDocument/2006/relationships" xmlns:a="http://schemas.openxmlformats.org/drawingml/2006/main" r:embed="R39ae3a7e5cce434a">
+          <a:blip xmlns:r="http://schemas.openxmlformats.org/officeDocument/2006/relationships" xmlns:a="http://schemas.openxmlformats.org/drawingml/2006/main" r:embed="R4cdab3ad9f0248e1">
             <a:alphaModFix amt="28000"/>
           </a:blip>
           <a:stretch xmlns:a="http://schemas.openxmlformats.org/drawingml/2006/main"/>
@@ -2176,7 +2176,7 @@
           <p:nvPr/>
         </p:nvPicPr>
         <p:blipFill rotWithShape="1">
-          <a:blip xmlns:r="http://schemas.openxmlformats.org/officeDocument/2006/relationships" xmlns:a="http://schemas.openxmlformats.org/drawingml/2006/main" r:embed="R7da1d46744ea4caa">
+          <a:blip xmlns:r="http://schemas.openxmlformats.org/officeDocument/2006/relationships" xmlns:a="http://schemas.openxmlformats.org/drawingml/2006/main" r:embed="R9dc658308f8d44fd">
             <a:alphaModFix amt="28000"/>
           </a:blip>
           <a:stretch xmlns:a="http://schemas.openxmlformats.org/drawingml/2006/main"/>
@@ -2451,7 +2451,7 @@
           <p:nvPr/>
         </p:nvPicPr>
         <p:blipFill rotWithShape="1">
-          <a:blip xmlns:r="http://schemas.openxmlformats.org/officeDocument/2006/relationships" xmlns:a="http://schemas.openxmlformats.org/drawingml/2006/main" r:embed="R08c3727374884e10">
+          <a:blip xmlns:r="http://schemas.openxmlformats.org/officeDocument/2006/relationships" xmlns:a="http://schemas.openxmlformats.org/drawingml/2006/main" r:embed="Rf678aa4135c94a56">
             <a:alphaModFix amt="28000"/>
           </a:blip>
           <a:stretch xmlns:a="http://schemas.openxmlformats.org/drawingml/2006/main"/>
@@ -2875,7 +2875,7 @@
           <p:nvPr/>
         </p:nvPicPr>
         <p:blipFill rotWithShape="1">
-          <a:blip xmlns:r="http://schemas.openxmlformats.org/officeDocument/2006/relationships" xmlns:a="http://schemas.openxmlformats.org/drawingml/2006/main" r:embed="R79274af47ce54dc5">
+          <a:blip xmlns:r="http://schemas.openxmlformats.org/officeDocument/2006/relationships" xmlns:a="http://schemas.openxmlformats.org/drawingml/2006/main" r:embed="R3e8fcd224af74a7d">
             <a:alphaModFix amt="28000"/>
           </a:blip>
           <a:stretch xmlns:a="http://schemas.openxmlformats.org/drawingml/2006/main"/>
@@ -3016,7 +3016,7 @@
           <p:nvPr/>
         </p:nvPicPr>
         <p:blipFill rotWithShape="1">
-          <a:blip xmlns:r="http://schemas.openxmlformats.org/officeDocument/2006/relationships" xmlns:a="http://schemas.openxmlformats.org/drawingml/2006/main" r:embed="R02c23d2be9084f80">
+          <a:blip xmlns:r="http://schemas.openxmlformats.org/officeDocument/2006/relationships" xmlns:a="http://schemas.openxmlformats.org/drawingml/2006/main" r:embed="Re21b70abc3694663">
             <a:alphaModFix amt="28000"/>
           </a:blip>
           <a:stretch xmlns:a="http://schemas.openxmlformats.org/drawingml/2006/main"/>
@@ -3130,7 +3130,7 @@
           <p:nvPr/>
         </p:nvPicPr>
         <p:blipFill rotWithShape="1">
-          <a:blip xmlns:r="http://schemas.openxmlformats.org/officeDocument/2006/relationships" xmlns:a="http://schemas.openxmlformats.org/drawingml/2006/main" r:embed="Rf7768769eadf441f">
+          <a:blip xmlns:r="http://schemas.openxmlformats.org/officeDocument/2006/relationships" xmlns:a="http://schemas.openxmlformats.org/drawingml/2006/main" r:embed="R03c6a61b31094d94">
             <a:alphaModFix amt="28000"/>
           </a:blip>
           <a:stretch xmlns:a="http://schemas.openxmlformats.org/drawingml/2006/main"/>
@@ -3457,7 +3457,7 @@
           <p:nvPr/>
         </p:nvPicPr>
         <p:blipFill rotWithShape="1">
-          <a:blip xmlns:r="http://schemas.openxmlformats.org/officeDocument/2006/relationships" xmlns:a="http://schemas.openxmlformats.org/drawingml/2006/main" r:embed="R08941f724f484e9b">
+          <a:blip xmlns:r="http://schemas.openxmlformats.org/officeDocument/2006/relationships" xmlns:a="http://schemas.openxmlformats.org/drawingml/2006/main" r:embed="R6e4966d228634bdb">
             <a:alphaModFix amt="28000"/>
           </a:blip>
           <a:stretch xmlns:a="http://schemas.openxmlformats.org/drawingml/2006/main"/>
@@ -3745,7 +3745,7 @@
           <p:nvPr/>
         </p:nvPicPr>
         <p:blipFill rotWithShape="1">
-          <a:blip xmlns:r="http://schemas.openxmlformats.org/officeDocument/2006/relationships" xmlns:a="http://schemas.openxmlformats.org/drawingml/2006/main" r:embed="R863f9c253983432a">
+          <a:blip xmlns:r="http://schemas.openxmlformats.org/officeDocument/2006/relationships" xmlns:a="http://schemas.openxmlformats.org/drawingml/2006/main" r:embed="R8c9120e99d914dd7">
             <a:alphaModFix amt="28000"/>
           </a:blip>
           <a:stretch xmlns:a="http://schemas.openxmlformats.org/drawingml/2006/main"/>
@@ -3982,17 +3982,17 @@
   </p:cSld>
   <p:clrMap bg1="lt1" tx1="dk1" bg2="lt2" tx2="dk2" accent1="accent1" accent2="accent2" accent3="accent3" accent4="accent4" accent5="accent5" accent6="accent6" hlink="hlink" folHlink="folHlink"/>
   <p:sldLayoutIdLst>
-    <p:sldLayoutId xmlns:r="http://schemas.openxmlformats.org/officeDocument/2006/relationships" id="2147483649" r:id="R521c5e2e1054401b"/>
-    <p:sldLayoutId xmlns:r="http://schemas.openxmlformats.org/officeDocument/2006/relationships" id="2147483650" r:id="Rd52f151ec9d6457f"/>
-    <p:sldLayoutId xmlns:r="http://schemas.openxmlformats.org/officeDocument/2006/relationships" id="2147483651" r:id="Rbed888a206ea4940"/>
-    <p:sldLayoutId xmlns:r="http://schemas.openxmlformats.org/officeDocument/2006/relationships" id="2147483652" r:id="Rd3baff7c036c4891"/>
-    <p:sldLayoutId xmlns:r="http://schemas.openxmlformats.org/officeDocument/2006/relationships" id="2147483653" r:id="Rd9b0dbc0ce004f72"/>
-    <p:sldLayoutId xmlns:r="http://schemas.openxmlformats.org/officeDocument/2006/relationships" id="2147483654" r:id="Rce101d22200949cc"/>
-    <p:sldLayoutId xmlns:r="http://schemas.openxmlformats.org/officeDocument/2006/relationships" id="2147483655" r:id="R65e78f476e3b40a2"/>
-    <p:sldLayoutId xmlns:r="http://schemas.openxmlformats.org/officeDocument/2006/relationships" id="2147483656" r:id="R20bca12fc9ef4a84"/>
-    <p:sldLayoutId xmlns:r="http://schemas.openxmlformats.org/officeDocument/2006/relationships" id="2147483657" r:id="R1d96cc364e5f48b1"/>
-    <p:sldLayoutId xmlns:r="http://schemas.openxmlformats.org/officeDocument/2006/relationships" id="2147483658" r:id="R994b5466107f48ea"/>
-    <p:sldLayoutId xmlns:r="http://schemas.openxmlformats.org/officeDocument/2006/relationships" id="2147483659" r:id="Rddf9fd033bf54efe"/>
+    <p:sldLayoutId xmlns:r="http://schemas.openxmlformats.org/officeDocument/2006/relationships" id="2147483649" r:id="R6e9bbc7580f84735"/>
+    <p:sldLayoutId xmlns:r="http://schemas.openxmlformats.org/officeDocument/2006/relationships" id="2147483650" r:id="Ra6a7eeaa0aff4586"/>
+    <p:sldLayoutId xmlns:r="http://schemas.openxmlformats.org/officeDocument/2006/relationships" id="2147483651" r:id="R3c958d15b6a2458e"/>
+    <p:sldLayoutId xmlns:r="http://schemas.openxmlformats.org/officeDocument/2006/relationships" id="2147483652" r:id="R8f38e41a0a3e4cd8"/>
+    <p:sldLayoutId xmlns:r="http://schemas.openxmlformats.org/officeDocument/2006/relationships" id="2147483653" r:id="R03a02dfbc2a84b58"/>
+    <p:sldLayoutId xmlns:r="http://schemas.openxmlformats.org/officeDocument/2006/relationships" id="2147483654" r:id="Rb1463443b5664739"/>
+    <p:sldLayoutId xmlns:r="http://schemas.openxmlformats.org/officeDocument/2006/relationships" id="2147483655" r:id="Ra89e202e08754d1c"/>
+    <p:sldLayoutId xmlns:r="http://schemas.openxmlformats.org/officeDocument/2006/relationships" id="2147483656" r:id="R96a490fe76874575"/>
+    <p:sldLayoutId xmlns:r="http://schemas.openxmlformats.org/officeDocument/2006/relationships" id="2147483657" r:id="R7e586544e1714b70"/>
+    <p:sldLayoutId xmlns:r="http://schemas.openxmlformats.org/officeDocument/2006/relationships" id="2147483658" r:id="R1bed54f956f64a9b"/>
+    <p:sldLayoutId xmlns:r="http://schemas.openxmlformats.org/officeDocument/2006/relationships" id="2147483659" r:id="R7faf09bf67e04ae6"/>
   </p:sldLayoutIdLst>
   <p:hf hdr="0" ftr="0" dt="0"/>
   <p:txStyles>
@@ -7451,7 +7451,183 @@
                 <a:ea typeface="Calibri"/>
                 <a:cs typeface="Calibri"/>
               </a:rPr>
-              <a:t>Collect exactly five notes instead of three. The program must display all five in their original input order.</a:t>
+              <a:t>Change </a:t>
+            </a:r>
+            <a:r>
+              <a:rPr sz="2400" b="0">
+                <a:solidFill>
+                  <a:srgbClr val="1750EB"/>
+                </a:solidFill>
+                <a:latin typeface="JetBrains Mono"/>
+                <a:ea typeface="JetBrains Mono"/>
+                <a:cs typeface="JetBrains Mono"/>
+              </a:rPr>
+              <a:t>range</a:t>
+            </a:r>
+            <a:r>
+              <a:rPr sz="2400" b="0">
+                <a:solidFill>
+                  <a:srgbClr val="080808"/>
+                </a:solidFill>
+                <a:latin typeface="Calibri"/>
+                <a:ea typeface="Calibri"/>
+                <a:cs typeface="Calibri"/>
+              </a:rPr>
+              <a:t>(3) to </a:t>
+            </a:r>
+            <a:r>
+              <a:rPr sz="2400" b="0">
+                <a:solidFill>
+                  <a:srgbClr val="1750EB"/>
+                </a:solidFill>
+                <a:latin typeface="JetBrains Mono"/>
+                <a:ea typeface="JetBrains Mono"/>
+                <a:cs typeface="JetBrains Mono"/>
+              </a:rPr>
+              <a:t>range</a:t>
+            </a:r>
+            <a:r>
+              <a:rPr sz="2400" b="0">
+                <a:solidFill>
+                  <a:srgbClr val="080808"/>
+                </a:solidFill>
+                <a:latin typeface="Calibri"/>
+                <a:ea typeface="Calibri"/>
+                <a:cs typeface="Calibri"/>
+              </a:rPr>
+              <a:t>(5) so the program asks for five notes. Append each answer to [notes]. Test </a:t>
+            </a:r>
+            <a:r>
+              <a:rPr sz="2400" b="0">
+                <a:solidFill>
+                  <a:srgbClr val="067D17"/>
+                </a:solidFill>
+                <a:latin typeface="JetBrains Mono"/>
+                <a:ea typeface="JetBrains Mono"/>
+                <a:cs typeface="JetBrains Mono"/>
+              </a:rPr>
+              <a:t>"one"</a:t>
+            </a:r>
+            <a:r>
+              <a:rPr sz="2400" b="0">
+                <a:solidFill>
+                  <a:srgbClr val="080808"/>
+                </a:solidFill>
+                <a:latin typeface="Calibri"/>
+                <a:ea typeface="Calibri"/>
+                <a:cs typeface="Calibri"/>
+              </a:rPr>
+              <a:t>, </a:t>
+            </a:r>
+            <a:r>
+              <a:rPr sz="2400" b="0">
+                <a:solidFill>
+                  <a:srgbClr val="067D17"/>
+                </a:solidFill>
+                <a:latin typeface="JetBrains Mono"/>
+                <a:ea typeface="JetBrains Mono"/>
+                <a:cs typeface="JetBrains Mono"/>
+              </a:rPr>
+              <a:t>"two"</a:t>
+            </a:r>
+            <a:r>
+              <a:rPr sz="2400" b="0">
+                <a:solidFill>
+                  <a:srgbClr val="080808"/>
+                </a:solidFill>
+                <a:latin typeface="Calibri"/>
+                <a:ea typeface="Calibri"/>
+                <a:cs typeface="Calibri"/>
+              </a:rPr>
+              <a:t>, </a:t>
+            </a:r>
+            <a:r>
+              <a:rPr sz="2400" b="0">
+                <a:solidFill>
+                  <a:srgbClr val="067D17"/>
+                </a:solidFill>
+                <a:latin typeface="JetBrains Mono"/>
+                <a:ea typeface="JetBrains Mono"/>
+                <a:cs typeface="JetBrains Mono"/>
+              </a:rPr>
+              <a:t>"three"</a:t>
+            </a:r>
+            <a:r>
+              <a:rPr sz="2400" b="0">
+                <a:solidFill>
+                  <a:srgbClr val="080808"/>
+                </a:solidFill>
+                <a:latin typeface="Calibri"/>
+                <a:ea typeface="Calibri"/>
+                <a:cs typeface="Calibri"/>
+              </a:rPr>
+              <a:t>, </a:t>
+            </a:r>
+            <a:r>
+              <a:rPr sz="2400" b="0">
+                <a:solidFill>
+                  <a:srgbClr val="067D17"/>
+                </a:solidFill>
+                <a:latin typeface="JetBrains Mono"/>
+                <a:ea typeface="JetBrains Mono"/>
+                <a:cs typeface="JetBrains Mono"/>
+              </a:rPr>
+              <a:t>"four"</a:t>
+            </a:r>
+            <a:r>
+              <a:rPr sz="2400" b="0">
+                <a:solidFill>
+                  <a:srgbClr val="080808"/>
+                </a:solidFill>
+                <a:latin typeface="Calibri"/>
+                <a:ea typeface="Calibri"/>
+                <a:cs typeface="Calibri"/>
+              </a:rPr>
+              <a:t> and </a:t>
+            </a:r>
+            <a:r>
+              <a:rPr sz="2400" b="0">
+                <a:solidFill>
+                  <a:srgbClr val="067D17"/>
+                </a:solidFill>
+                <a:latin typeface="JetBrains Mono"/>
+                <a:ea typeface="JetBrains Mono"/>
+                <a:cs typeface="JetBrains Mono"/>
+              </a:rPr>
+              <a:t>"five"</a:t>
+            </a:r>
+            <a:r>
+              <a:rPr sz="2400" b="0">
+                <a:solidFill>
+                  <a:srgbClr val="080808"/>
+                </a:solidFill>
+                <a:latin typeface="Calibri"/>
+                <a:ea typeface="Calibri"/>
+                <a:cs typeface="Calibri"/>
+              </a:rPr>
+              <a:t>; display the five notes in that order beneath </a:t>
+            </a:r>
+            <a:r>
+              <a:rPr sz="2400" b="0">
+                <a:solidFill>
+                  <a:srgbClr val="067D17"/>
+                </a:solidFill>
+                <a:latin typeface="JetBrains Mono"/>
+                <a:ea typeface="JetBrains Mono"/>
+                <a:cs typeface="JetBrains Mono"/>
+              </a:rPr>
+              <a:t>"Saved notes:"</a:t>
+            </a:r>
+            <a:r>
+              <a:rPr sz="2400" b="0">
+                <a:solidFill>
+                  <a:srgbClr val="080808"/>
+                </a:solidFill>
+                <a:latin typeface="Calibri"/>
+                <a:ea typeface="Calibri"/>
+                <a:cs typeface="Calibri"/>
+              </a:rPr>
+              <a:t>.</a:t>
             </a:r>
           </a:p>
         </p:txBody>
@@ -8153,7 +8329,7 @@
         </p:spPr>
         <p:txBody>
           <a:bodyPr xmlns:a="http://schemas.openxmlformats.org/drawingml/2006/main">
-            <a:normAutofit fontScale="100000"/>
+            <a:normAutofit fontScale="95014"/>
           </a:bodyPr>
           <a:lstStyle xmlns:a="http://schemas.openxmlformats.org/drawingml/2006/main"/>
           <a:p xmlns:a="http://schemas.openxmlformats.org/drawingml/2006/main">
@@ -8172,7 +8348,227 @@
                 <a:ea typeface="Calibri"/>
                 <a:cs typeface="Calibri"/>
               </a:rPr>
-              <a:t>Replace the fixed input loop with a condition-controlled loop. Keep asking for a note until stop is entered; do not append or display the sentinel stop.</a:t>
+              <a:t>Using the example code, replace the </a:t>
+            </a:r>
+            <a:r>
+              <a:rPr sz="2400" b="0">
+                <a:solidFill>
+                  <a:srgbClr val="1750EB"/>
+                </a:solidFill>
+                <a:latin typeface="JetBrains Mono"/>
+                <a:ea typeface="JetBrains Mono"/>
+                <a:cs typeface="JetBrains Mono"/>
+              </a:rPr>
+              <a:t>for</a:t>
+            </a:r>
+            <a:r>
+              <a:rPr sz="2400" b="0">
+                <a:solidFill>
+                  <a:srgbClr val="080808"/>
+                </a:solidFill>
+                <a:latin typeface="Calibri"/>
+                <a:ea typeface="Calibri"/>
+                <a:cs typeface="Calibri"/>
+              </a:rPr>
+              <a:t> loop that asks for notes with a </a:t>
+            </a:r>
+            <a:r>
+              <a:rPr sz="2400" b="0">
+                <a:solidFill>
+                  <a:srgbClr val="1750EB"/>
+                </a:solidFill>
+                <a:latin typeface="JetBrains Mono"/>
+                <a:ea typeface="JetBrains Mono"/>
+                <a:cs typeface="JetBrains Mono"/>
+              </a:rPr>
+              <a:t>while</a:t>
+            </a:r>
+            <a:r>
+              <a:rPr sz="2400" b="0">
+                <a:solidFill>
+                  <a:srgbClr val="080808"/>
+                </a:solidFill>
+                <a:latin typeface="Calibri"/>
+                <a:ea typeface="Calibri"/>
+                <a:cs typeface="Calibri"/>
+              </a:rPr>
+              <a:t> loop. Keep asking for a note until the user enters </a:t>
+            </a:r>
+            <a:r>
+              <a:rPr sz="2400" b="0">
+                <a:solidFill>
+                  <a:srgbClr val="067D17"/>
+                </a:solidFill>
+                <a:latin typeface="JetBrains Mono"/>
+                <a:ea typeface="JetBrains Mono"/>
+                <a:cs typeface="JetBrains Mono"/>
+              </a:rPr>
+              <a:t>"stop"</a:t>
+            </a:r>
+            <a:r>
+              <a:rPr sz="2400" b="0">
+                <a:solidFill>
+                  <a:srgbClr val="080808"/>
+                </a:solidFill>
+                <a:latin typeface="Calibri"/>
+                <a:ea typeface="Calibri"/>
+                <a:cs typeface="Calibri"/>
+              </a:rPr>
+              <a:t>. Append each earlier answer to [notes], but do not append or display </a:t>
+            </a:r>
+            <a:r>
+              <a:rPr sz="2400" b="0">
+                <a:solidFill>
+                  <a:srgbClr val="067D17"/>
+                </a:solidFill>
+                <a:latin typeface="JetBrains Mono"/>
+                <a:ea typeface="JetBrains Mono"/>
+                <a:cs typeface="JetBrains Mono"/>
+              </a:rPr>
+              <a:t>"stop"</a:t>
+            </a:r>
+            <a:r>
+              <a:rPr sz="2400" b="0">
+                <a:solidFill>
+                  <a:srgbClr val="080808"/>
+                </a:solidFill>
+                <a:latin typeface="Calibri"/>
+                <a:ea typeface="Calibri"/>
+                <a:cs typeface="Calibri"/>
+              </a:rPr>
+              <a:t>. Test </a:t>
+            </a:r>
+            <a:r>
+              <a:rPr sz="2400" b="0">
+                <a:solidFill>
+                  <a:srgbClr val="067D17"/>
+                </a:solidFill>
+                <a:latin typeface="JetBrains Mono"/>
+                <a:ea typeface="JetBrains Mono"/>
+                <a:cs typeface="JetBrains Mono"/>
+              </a:rPr>
+              <a:t>"alpha"</a:t>
+            </a:r>
+            <a:r>
+              <a:rPr sz="2400" b="0">
+                <a:solidFill>
+                  <a:srgbClr val="080808"/>
+                </a:solidFill>
+                <a:latin typeface="Calibri"/>
+                <a:ea typeface="Calibri"/>
+                <a:cs typeface="Calibri"/>
+              </a:rPr>
+              <a:t>, </a:t>
+            </a:r>
+            <a:r>
+              <a:rPr sz="2400" b="0">
+                <a:solidFill>
+                  <a:srgbClr val="067D17"/>
+                </a:solidFill>
+                <a:latin typeface="JetBrains Mono"/>
+                <a:ea typeface="JetBrains Mono"/>
+                <a:cs typeface="JetBrains Mono"/>
+              </a:rPr>
+              <a:t>"beta"</a:t>
+            </a:r>
+            <a:r>
+              <a:rPr sz="2400" b="0">
+                <a:solidFill>
+                  <a:srgbClr val="080808"/>
+                </a:solidFill>
+                <a:latin typeface="Calibri"/>
+                <a:ea typeface="Calibri"/>
+                <a:cs typeface="Calibri"/>
+              </a:rPr>
+              <a:t> and </a:t>
+            </a:r>
+            <a:r>
+              <a:rPr sz="2400" b="0">
+                <a:solidFill>
+                  <a:srgbClr val="067D17"/>
+                </a:solidFill>
+                <a:latin typeface="JetBrains Mono"/>
+                <a:ea typeface="JetBrains Mono"/>
+                <a:cs typeface="JetBrains Mono"/>
+              </a:rPr>
+              <a:t>"stop"</a:t>
+            </a:r>
+            <a:r>
+              <a:rPr sz="2400" b="0">
+                <a:solidFill>
+                  <a:srgbClr val="080808"/>
+                </a:solidFill>
+                <a:latin typeface="Calibri"/>
+                <a:ea typeface="Calibri"/>
+                <a:cs typeface="Calibri"/>
+              </a:rPr>
+              <a:t>; display only </a:t>
+            </a:r>
+            <a:r>
+              <a:rPr sz="2400" b="0">
+                <a:solidFill>
+                  <a:srgbClr val="067D17"/>
+                </a:solidFill>
+                <a:latin typeface="JetBrains Mono"/>
+                <a:ea typeface="JetBrains Mono"/>
+                <a:cs typeface="JetBrains Mono"/>
+              </a:rPr>
+              <a:t>"alpha"</a:t>
+            </a:r>
+            <a:r>
+              <a:rPr sz="2400" b="0">
+                <a:solidFill>
+                  <a:srgbClr val="080808"/>
+                </a:solidFill>
+                <a:latin typeface="Calibri"/>
+                <a:ea typeface="Calibri"/>
+                <a:cs typeface="Calibri"/>
+              </a:rPr>
+              <a:t> and </a:t>
+            </a:r>
+            <a:r>
+              <a:rPr sz="2400" b="0">
+                <a:solidFill>
+                  <a:srgbClr val="067D17"/>
+                </a:solidFill>
+                <a:latin typeface="JetBrains Mono"/>
+                <a:ea typeface="JetBrains Mono"/>
+                <a:cs typeface="JetBrains Mono"/>
+              </a:rPr>
+              <a:t>"beta"</a:t>
+            </a:r>
+            <a:r>
+              <a:rPr sz="2400" b="0">
+                <a:solidFill>
+                  <a:srgbClr val="080808"/>
+                </a:solidFill>
+                <a:latin typeface="Calibri"/>
+                <a:ea typeface="Calibri"/>
+                <a:cs typeface="Calibri"/>
+              </a:rPr>
+              <a:t> beneath </a:t>
+            </a:r>
+            <a:r>
+              <a:rPr sz="2400" b="0">
+                <a:solidFill>
+                  <a:srgbClr val="067D17"/>
+                </a:solidFill>
+                <a:latin typeface="JetBrains Mono"/>
+                <a:ea typeface="JetBrains Mono"/>
+                <a:cs typeface="JetBrains Mono"/>
+              </a:rPr>
+              <a:t>"Saved notes:"</a:t>
+            </a:r>
+            <a:r>
+              <a:rPr sz="2400" b="0">
+                <a:solidFill>
+                  <a:srgbClr val="080808"/>
+                </a:solidFill>
+                <a:latin typeface="Calibri"/>
+                <a:ea typeface="Calibri"/>
+                <a:cs typeface="Calibri"/>
+              </a:rPr>
+              <a:t>.</a:t>
             </a:r>
           </a:p>
         </p:txBody>
@@ -8874,7 +9270,7 @@
         </p:spPr>
         <p:txBody>
           <a:bodyPr xmlns:a="http://schemas.openxmlformats.org/drawingml/2006/main">
-            <a:normAutofit fontScale="100000"/>
+            <a:normAutofit fontScale="76855"/>
           </a:bodyPr>
           <a:lstStyle xmlns:a="http://schemas.openxmlformats.org/drawingml/2006/main"/>
           <a:p xmlns:a="http://schemas.openxmlformats.org/drawingml/2006/main">
@@ -8893,7 +9289,7 @@
                 <a:ea typeface="Calibri"/>
                 <a:cs typeface="Calibri"/>
               </a:rPr>
-              <a:t>Create a team roster builder. Ask how many names will be entered, collect exactly that many names into an empty </a:t>
+              <a:t>Create an empty </a:t>
             </a:r>
             <a:r>
               <a:rPr sz="2400" b="0">
@@ -8915,7 +9311,161 @@
                 <a:ea typeface="Calibri"/>
                 <a:cs typeface="Calibri"/>
               </a:rPr>
-              <a:t>, then ask for one valid replacement position and update that name before displaying the final roster one name per line.</a:t>
+              <a:t> called [roster]. Ask how many names will be entered and store the whole number in [team_size]. Use a </a:t>
+            </a:r>
+            <a:r>
+              <a:rPr sz="2400" b="0">
+                <a:solidFill>
+                  <a:srgbClr val="1750EB"/>
+                </a:solidFill>
+                <a:latin typeface="JetBrains Mono"/>
+                <a:ea typeface="JetBrains Mono"/>
+                <a:cs typeface="JetBrains Mono"/>
+              </a:rPr>
+              <a:t>for</a:t>
+            </a:r>
+            <a:r>
+              <a:rPr sz="2400" b="0">
+                <a:solidFill>
+                  <a:srgbClr val="080808"/>
+                </a:solidFill>
+                <a:latin typeface="Calibri"/>
+                <a:ea typeface="Calibri"/>
+                <a:cs typeface="Calibri"/>
+              </a:rPr>
+              <a:t> loop and </a:t>
+            </a:r>
+            <a:r>
+              <a:rPr sz="2400" b="0">
+                <a:solidFill>
+                  <a:srgbClr val="1750EB"/>
+                </a:solidFill>
+                <a:latin typeface="JetBrains Mono"/>
+                <a:ea typeface="JetBrains Mono"/>
+                <a:cs typeface="JetBrains Mono"/>
+              </a:rPr>
+              <a:t>range</a:t>
+            </a:r>
+            <a:r>
+              <a:rPr sz="2400" b="0">
+                <a:solidFill>
+                  <a:srgbClr val="080808"/>
+                </a:solidFill>
+                <a:latin typeface="Calibri"/>
+                <a:ea typeface="Calibri"/>
+                <a:cs typeface="Calibri"/>
+              </a:rPr>
+              <a:t>(team_size) to ask for each name and append it to [roster]. Ask for a replacement position from 0 to team_size - 1 and store it in [position]. Ask for a replacement name and store it in [replacement], then update [roster][position]. Test 3 names—</a:t>
+            </a:r>
+            <a:r>
+              <a:rPr sz="2400" b="0">
+                <a:solidFill>
+                  <a:srgbClr val="067D17"/>
+                </a:solidFill>
+                <a:latin typeface="JetBrains Mono"/>
+                <a:ea typeface="JetBrains Mono"/>
+                <a:cs typeface="JetBrains Mono"/>
+              </a:rPr>
+              <a:t>"Ari"</a:t>
+            </a:r>
+            <a:r>
+              <a:rPr sz="2400" b="0">
+                <a:solidFill>
+                  <a:srgbClr val="080808"/>
+                </a:solidFill>
+                <a:latin typeface="Calibri"/>
+                <a:ea typeface="Calibri"/>
+                <a:cs typeface="Calibri"/>
+              </a:rPr>
+              <a:t>, </a:t>
+            </a:r>
+            <a:r>
+              <a:rPr sz="2400" b="0">
+                <a:solidFill>
+                  <a:srgbClr val="067D17"/>
+                </a:solidFill>
+                <a:latin typeface="JetBrains Mono"/>
+                <a:ea typeface="JetBrains Mono"/>
+                <a:cs typeface="JetBrains Mono"/>
+              </a:rPr>
+              <a:t>"Bao"</a:t>
+            </a:r>
+            <a:r>
+              <a:rPr sz="2400" b="0">
+                <a:solidFill>
+                  <a:srgbClr val="080808"/>
+                </a:solidFill>
+                <a:latin typeface="Calibri"/>
+                <a:ea typeface="Calibri"/>
+                <a:cs typeface="Calibri"/>
+              </a:rPr>
+              <a:t> and </a:t>
+            </a:r>
+            <a:r>
+              <a:rPr sz="2400" b="0">
+                <a:solidFill>
+                  <a:srgbClr val="067D17"/>
+                </a:solidFill>
+                <a:latin typeface="JetBrains Mono"/>
+                <a:ea typeface="JetBrains Mono"/>
+                <a:cs typeface="JetBrains Mono"/>
+              </a:rPr>
+              <a:t>"Cleo"</a:t>
+            </a:r>
+            <a:r>
+              <a:rPr sz="2400" b="0">
+                <a:solidFill>
+                  <a:srgbClr val="080808"/>
+                </a:solidFill>
+                <a:latin typeface="Calibri"/>
+                <a:ea typeface="Calibri"/>
+                <a:cs typeface="Calibri"/>
+              </a:rPr>
+              <a:t>—then replace position 1 with </a:t>
+            </a:r>
+            <a:r>
+              <a:rPr sz="2400" b="0">
+                <a:solidFill>
+                  <a:srgbClr val="067D17"/>
+                </a:solidFill>
+                <a:latin typeface="JetBrains Mono"/>
+                <a:ea typeface="JetBrains Mono"/>
+                <a:cs typeface="JetBrains Mono"/>
+              </a:rPr>
+              <a:t>"Dara"</a:t>
+            </a:r>
+            <a:r>
+              <a:rPr sz="2400" b="0">
+                <a:solidFill>
+                  <a:srgbClr val="080808"/>
+                </a:solidFill>
+                <a:latin typeface="Calibri"/>
+                <a:ea typeface="Calibri"/>
+                <a:cs typeface="Calibri"/>
+              </a:rPr>
+              <a:t>. Display Ari, Dara and Cleo beneath </a:t>
+            </a:r>
+            <a:r>
+              <a:rPr sz="2400" b="0">
+                <a:solidFill>
+                  <a:srgbClr val="067D17"/>
+                </a:solidFill>
+                <a:latin typeface="JetBrains Mono"/>
+                <a:ea typeface="JetBrains Mono"/>
+                <a:cs typeface="JetBrains Mono"/>
+              </a:rPr>
+              <a:t>"Final roster:"</a:t>
+            </a:r>
+            <a:r>
+              <a:rPr sz="2400" b="0">
+                <a:solidFill>
+                  <a:srgbClr val="080808"/>
+                </a:solidFill>
+                <a:latin typeface="Calibri"/>
+                <a:ea typeface="Calibri"/>
+                <a:cs typeface="Calibri"/>
+              </a:rPr>
+              <a:t>.</a:t>
             </a:r>
           </a:p>
         </p:txBody>

--- a/Mapped Curriculum Lessons/Grade 7/Lesson 26 - Building Lists with Loops/Building Lists with Loops - Slides.pptx
+++ b/Mapped Curriculum Lessons/Grade 7/Lesson 26 - Building Lists with Loops/Building Lists with Loops - Slides.pptx
@@ -2,28 +2,28 @@
 <file path=ppt/presentation.xml><?xml version="1.0" encoding="utf-8"?>
 <p:presentation xmlns:p="http://schemas.openxmlformats.org/presentationml/2006/main" embedTrueTypeFonts="1" saveSubsetFonts="0">
   <p:sldMasterIdLst>
-    <p:sldMasterId xmlns:r="http://schemas.openxmlformats.org/officeDocument/2006/relationships" id="2147483648" r:id="Rad8c0d9f5b514404"/>
+    <p:sldMasterId xmlns:r="http://schemas.openxmlformats.org/officeDocument/2006/relationships" id="2147483648" r:id="R34b4c30199f64396"/>
   </p:sldMasterIdLst>
   <p:notesMasterIdLst>
-    <p:notesMasterId xmlns:r="http://schemas.openxmlformats.org/officeDocument/2006/relationships" r:id="Ra77317ed15644059"/>
+    <p:notesMasterId xmlns:r="http://schemas.openxmlformats.org/officeDocument/2006/relationships" r:id="R41c5f5c7152143bb"/>
   </p:notesMasterIdLst>
   <p:sldIdLst>
-    <p:sldId xmlns:r="http://schemas.openxmlformats.org/officeDocument/2006/relationships" id="256" r:id="R6eb32ea12b144509"/>
-    <p:sldId xmlns:r="http://schemas.openxmlformats.org/officeDocument/2006/relationships" id="257" r:id="R7aec81969c7e4de4"/>
-    <p:sldId xmlns:r="http://schemas.openxmlformats.org/officeDocument/2006/relationships" id="258" r:id="Re8d9482feff8493d"/>
-    <p:sldId xmlns:r="http://schemas.openxmlformats.org/officeDocument/2006/relationships" id="259" r:id="Rd68ef37d56104917"/>
-    <p:sldId xmlns:r="http://schemas.openxmlformats.org/officeDocument/2006/relationships" id="260" r:id="R5271bc56ab2a42fc"/>
-    <p:sldId xmlns:r="http://schemas.openxmlformats.org/officeDocument/2006/relationships" id="261" r:id="R669e79fe77f94f87"/>
-    <p:sldId xmlns:r="http://schemas.openxmlformats.org/officeDocument/2006/relationships" id="262" r:id="R6d4fe9a5c7e54754"/>
-    <p:sldId xmlns:r="http://schemas.openxmlformats.org/officeDocument/2006/relationships" id="263" r:id="R21f9fabb50224807"/>
-    <p:sldId xmlns:r="http://schemas.openxmlformats.org/officeDocument/2006/relationships" id="264" r:id="Radf78fb1bd0e4d4c"/>
+    <p:sldId xmlns:r="http://schemas.openxmlformats.org/officeDocument/2006/relationships" id="256" r:id="R007cfc76d1454547"/>
+    <p:sldId xmlns:r="http://schemas.openxmlformats.org/officeDocument/2006/relationships" id="257" r:id="R28f32066116940f3"/>
+    <p:sldId xmlns:r="http://schemas.openxmlformats.org/officeDocument/2006/relationships" id="258" r:id="R9372de8395714984"/>
+    <p:sldId xmlns:r="http://schemas.openxmlformats.org/officeDocument/2006/relationships" id="259" r:id="Rd7e1d71bf1354cf4"/>
+    <p:sldId xmlns:r="http://schemas.openxmlformats.org/officeDocument/2006/relationships" id="260" r:id="R2aa85a82632a45d4"/>
+    <p:sldId xmlns:r="http://schemas.openxmlformats.org/officeDocument/2006/relationships" id="261" r:id="R53d40c5cbfd74a8b"/>
+    <p:sldId xmlns:r="http://schemas.openxmlformats.org/officeDocument/2006/relationships" id="262" r:id="Ra7a55d86259a40fb"/>
+    <p:sldId xmlns:r="http://schemas.openxmlformats.org/officeDocument/2006/relationships" id="263" r:id="Rfd5aaf21392045ef"/>
+    <p:sldId xmlns:r="http://schemas.openxmlformats.org/officeDocument/2006/relationships" id="264" r:id="R972b016734224219"/>
   </p:sldIdLst>
   <p:sldSz cx="12192000" cy="6858000"/>
   <p:notesSz cx="6858000" cy="9144000"/>
   <p:embeddedFontLst>
     <p:embeddedFont>
       <p:font typeface="JetBrains Mono"/>
-      <p:regular xmlns:r="http://schemas.openxmlformats.org/officeDocument/2006/relationships" r:id="R19e1cb71890545b5"/>
+      <p:regular xmlns:r="http://schemas.openxmlformats.org/officeDocument/2006/relationships" r:id="Rdf9f1e285e344549"/>
     </p:embeddedFont>
   </p:embeddedFontLst>
 </p:presentation>
@@ -1071,7 +1071,7 @@
           <p:nvPr/>
         </p:nvPicPr>
         <p:blipFill rotWithShape="1">
-          <a:blip xmlns:r="http://schemas.openxmlformats.org/officeDocument/2006/relationships" xmlns:a="http://schemas.openxmlformats.org/drawingml/2006/main" r:embed="R3e40943621bc4feb"/>
+          <a:blip xmlns:r="http://schemas.openxmlformats.org/officeDocument/2006/relationships" xmlns:a="http://schemas.openxmlformats.org/drawingml/2006/main" r:embed="R998e0bfa86084ef5"/>
           <a:stretch xmlns:a="http://schemas.openxmlformats.org/drawingml/2006/main"/>
         </p:blipFill>
         <p:spPr>
@@ -1451,7 +1451,7 @@
           <p:nvPr/>
         </p:nvPicPr>
         <p:blipFill rotWithShape="1">
-          <a:blip xmlns:r="http://schemas.openxmlformats.org/officeDocument/2006/relationships" xmlns:a="http://schemas.openxmlformats.org/drawingml/2006/main" r:embed="R868f31dabcd14f03">
+          <a:blip xmlns:r="http://schemas.openxmlformats.org/officeDocument/2006/relationships" xmlns:a="http://schemas.openxmlformats.org/drawingml/2006/main" r:embed="R658cb2b4fc574a8b">
             <a:alphaModFix amt="28000"/>
           </a:blip>
           <a:stretch xmlns:a="http://schemas.openxmlformats.org/drawingml/2006/main"/>
@@ -1664,7 +1664,7 @@
           <p:nvPr/>
         </p:nvPicPr>
         <p:blipFill rotWithShape="1">
-          <a:blip xmlns:r="http://schemas.openxmlformats.org/officeDocument/2006/relationships" xmlns:a="http://schemas.openxmlformats.org/drawingml/2006/main" r:embed="R5ec8312fb5ae42eb">
+          <a:blip xmlns:r="http://schemas.openxmlformats.org/officeDocument/2006/relationships" xmlns:a="http://schemas.openxmlformats.org/drawingml/2006/main" r:embed="R96cf6959a03b4486">
             <a:alphaModFix amt="28000"/>
           </a:blip>
           <a:stretch xmlns:a="http://schemas.openxmlformats.org/drawingml/2006/main"/>
@@ -1899,7 +1899,7 @@
           <p:nvPr/>
         </p:nvPicPr>
         <p:blipFill rotWithShape="1">
-          <a:blip xmlns:r="http://schemas.openxmlformats.org/officeDocument/2006/relationships" xmlns:a="http://schemas.openxmlformats.org/drawingml/2006/main" r:embed="R4cdab3ad9f0248e1">
+          <a:blip xmlns:r="http://schemas.openxmlformats.org/officeDocument/2006/relationships" xmlns:a="http://schemas.openxmlformats.org/drawingml/2006/main" r:embed="R0625a122d6f44970">
             <a:alphaModFix amt="28000"/>
           </a:blip>
           <a:stretch xmlns:a="http://schemas.openxmlformats.org/drawingml/2006/main"/>
@@ -2176,7 +2176,7 @@
           <p:nvPr/>
         </p:nvPicPr>
         <p:blipFill rotWithShape="1">
-          <a:blip xmlns:r="http://schemas.openxmlformats.org/officeDocument/2006/relationships" xmlns:a="http://schemas.openxmlformats.org/drawingml/2006/main" r:embed="R9dc658308f8d44fd">
+          <a:blip xmlns:r="http://schemas.openxmlformats.org/officeDocument/2006/relationships" xmlns:a="http://schemas.openxmlformats.org/drawingml/2006/main" r:embed="R40bf49968bbb400a">
             <a:alphaModFix amt="28000"/>
           </a:blip>
           <a:stretch xmlns:a="http://schemas.openxmlformats.org/drawingml/2006/main"/>
@@ -2451,7 +2451,7 @@
           <p:nvPr/>
         </p:nvPicPr>
         <p:blipFill rotWithShape="1">
-          <a:blip xmlns:r="http://schemas.openxmlformats.org/officeDocument/2006/relationships" xmlns:a="http://schemas.openxmlformats.org/drawingml/2006/main" r:embed="Rf678aa4135c94a56">
+          <a:blip xmlns:r="http://schemas.openxmlformats.org/officeDocument/2006/relationships" xmlns:a="http://schemas.openxmlformats.org/drawingml/2006/main" r:embed="Rd3491a08e0da4f87">
             <a:alphaModFix amt="28000"/>
           </a:blip>
           <a:stretch xmlns:a="http://schemas.openxmlformats.org/drawingml/2006/main"/>
@@ -2875,7 +2875,7 @@
           <p:nvPr/>
         </p:nvPicPr>
         <p:blipFill rotWithShape="1">
-          <a:blip xmlns:r="http://schemas.openxmlformats.org/officeDocument/2006/relationships" xmlns:a="http://schemas.openxmlformats.org/drawingml/2006/main" r:embed="R3e8fcd224af74a7d">
+          <a:blip xmlns:r="http://schemas.openxmlformats.org/officeDocument/2006/relationships" xmlns:a="http://schemas.openxmlformats.org/drawingml/2006/main" r:embed="R4a6f254c86a2402e">
             <a:alphaModFix amt="28000"/>
           </a:blip>
           <a:stretch xmlns:a="http://schemas.openxmlformats.org/drawingml/2006/main"/>
@@ -3016,7 +3016,7 @@
           <p:nvPr/>
         </p:nvPicPr>
         <p:blipFill rotWithShape="1">
-          <a:blip xmlns:r="http://schemas.openxmlformats.org/officeDocument/2006/relationships" xmlns:a="http://schemas.openxmlformats.org/drawingml/2006/main" r:embed="Re21b70abc3694663">
+          <a:blip xmlns:r="http://schemas.openxmlformats.org/officeDocument/2006/relationships" xmlns:a="http://schemas.openxmlformats.org/drawingml/2006/main" r:embed="R6e6355c81b6e4136">
             <a:alphaModFix amt="28000"/>
           </a:blip>
           <a:stretch xmlns:a="http://schemas.openxmlformats.org/drawingml/2006/main"/>
@@ -3130,7 +3130,7 @@
           <p:nvPr/>
         </p:nvPicPr>
         <p:blipFill rotWithShape="1">
-          <a:blip xmlns:r="http://schemas.openxmlformats.org/officeDocument/2006/relationships" xmlns:a="http://schemas.openxmlformats.org/drawingml/2006/main" r:embed="R03c6a61b31094d94">
+          <a:blip xmlns:r="http://schemas.openxmlformats.org/officeDocument/2006/relationships" xmlns:a="http://schemas.openxmlformats.org/drawingml/2006/main" r:embed="R101bb04a22e84d61">
             <a:alphaModFix amt="28000"/>
           </a:blip>
           <a:stretch xmlns:a="http://schemas.openxmlformats.org/drawingml/2006/main"/>
@@ -3457,7 +3457,7 @@
           <p:nvPr/>
         </p:nvPicPr>
         <p:blipFill rotWithShape="1">
-          <a:blip xmlns:r="http://schemas.openxmlformats.org/officeDocument/2006/relationships" xmlns:a="http://schemas.openxmlformats.org/drawingml/2006/main" r:embed="R6e4966d228634bdb">
+          <a:blip xmlns:r="http://schemas.openxmlformats.org/officeDocument/2006/relationships" xmlns:a="http://schemas.openxmlformats.org/drawingml/2006/main" r:embed="R2594074ba74646e2">
             <a:alphaModFix amt="28000"/>
           </a:blip>
           <a:stretch xmlns:a="http://schemas.openxmlformats.org/drawingml/2006/main"/>
@@ -3745,7 +3745,7 @@
           <p:nvPr/>
         </p:nvPicPr>
         <p:blipFill rotWithShape="1">
-          <a:blip xmlns:r="http://schemas.openxmlformats.org/officeDocument/2006/relationships" xmlns:a="http://schemas.openxmlformats.org/drawingml/2006/main" r:embed="R8c9120e99d914dd7">
+          <a:blip xmlns:r="http://schemas.openxmlformats.org/officeDocument/2006/relationships" xmlns:a="http://schemas.openxmlformats.org/drawingml/2006/main" r:embed="Rb0a6d5f4fe974fa9">
             <a:alphaModFix amt="28000"/>
           </a:blip>
           <a:stretch xmlns:a="http://schemas.openxmlformats.org/drawingml/2006/main"/>
@@ -3982,17 +3982,17 @@
   </p:cSld>
   <p:clrMap bg1="lt1" tx1="dk1" bg2="lt2" tx2="dk2" accent1="accent1" accent2="accent2" accent3="accent3" accent4="accent4" accent5="accent5" accent6="accent6" hlink="hlink" folHlink="folHlink"/>
   <p:sldLayoutIdLst>
-    <p:sldLayoutId xmlns:r="http://schemas.openxmlformats.org/officeDocument/2006/relationships" id="2147483649" r:id="R6e9bbc7580f84735"/>
-    <p:sldLayoutId xmlns:r="http://schemas.openxmlformats.org/officeDocument/2006/relationships" id="2147483650" r:id="Ra6a7eeaa0aff4586"/>
-    <p:sldLayoutId xmlns:r="http://schemas.openxmlformats.org/officeDocument/2006/relationships" id="2147483651" r:id="R3c958d15b6a2458e"/>
-    <p:sldLayoutId xmlns:r="http://schemas.openxmlformats.org/officeDocument/2006/relationships" id="2147483652" r:id="R8f38e41a0a3e4cd8"/>
-    <p:sldLayoutId xmlns:r="http://schemas.openxmlformats.org/officeDocument/2006/relationships" id="2147483653" r:id="R03a02dfbc2a84b58"/>
-    <p:sldLayoutId xmlns:r="http://schemas.openxmlformats.org/officeDocument/2006/relationships" id="2147483654" r:id="Rb1463443b5664739"/>
-    <p:sldLayoutId xmlns:r="http://schemas.openxmlformats.org/officeDocument/2006/relationships" id="2147483655" r:id="Ra89e202e08754d1c"/>
-    <p:sldLayoutId xmlns:r="http://schemas.openxmlformats.org/officeDocument/2006/relationships" id="2147483656" r:id="R96a490fe76874575"/>
-    <p:sldLayoutId xmlns:r="http://schemas.openxmlformats.org/officeDocument/2006/relationships" id="2147483657" r:id="R7e586544e1714b70"/>
-    <p:sldLayoutId xmlns:r="http://schemas.openxmlformats.org/officeDocument/2006/relationships" id="2147483658" r:id="R1bed54f956f64a9b"/>
-    <p:sldLayoutId xmlns:r="http://schemas.openxmlformats.org/officeDocument/2006/relationships" id="2147483659" r:id="R7faf09bf67e04ae6"/>
+    <p:sldLayoutId xmlns:r="http://schemas.openxmlformats.org/officeDocument/2006/relationships" id="2147483649" r:id="Rf7be22df1dd34df8"/>
+    <p:sldLayoutId xmlns:r="http://schemas.openxmlformats.org/officeDocument/2006/relationships" id="2147483650" r:id="R7bda02ae757d4259"/>
+    <p:sldLayoutId xmlns:r="http://schemas.openxmlformats.org/officeDocument/2006/relationships" id="2147483651" r:id="Rf22e87656c424704"/>
+    <p:sldLayoutId xmlns:r="http://schemas.openxmlformats.org/officeDocument/2006/relationships" id="2147483652" r:id="R0bad9d31678b4647"/>
+    <p:sldLayoutId xmlns:r="http://schemas.openxmlformats.org/officeDocument/2006/relationships" id="2147483653" r:id="R04ea555021414d36"/>
+    <p:sldLayoutId xmlns:r="http://schemas.openxmlformats.org/officeDocument/2006/relationships" id="2147483654" r:id="R2b83ce50d9a247c1"/>
+    <p:sldLayoutId xmlns:r="http://schemas.openxmlformats.org/officeDocument/2006/relationships" id="2147483655" r:id="R24a64fa7f88e4200"/>
+    <p:sldLayoutId xmlns:r="http://schemas.openxmlformats.org/officeDocument/2006/relationships" id="2147483656" r:id="R52068ba1388c4c87"/>
+    <p:sldLayoutId xmlns:r="http://schemas.openxmlformats.org/officeDocument/2006/relationships" id="2147483657" r:id="Rab14fb851a344b2d"/>
+    <p:sldLayoutId xmlns:r="http://schemas.openxmlformats.org/officeDocument/2006/relationships" id="2147483658" r:id="Ra3c0ef30f1d844ff"/>
+    <p:sldLayoutId xmlns:r="http://schemas.openxmlformats.org/officeDocument/2006/relationships" id="2147483659" r:id="R44ef70f3ee98489e"/>
   </p:sldLayoutIdLst>
   <p:hf hdr="0" ftr="0" dt="0"/>
   <p:txStyles>
@@ -7451,18 +7451,21 @@
                 <a:ea typeface="Calibri"/>
                 <a:cs typeface="Calibri"/>
               </a:rPr>
-              <a:t>Change </a:t>
-            </a:r>
-            <a:r>
-              <a:rPr sz="2400" b="0">
-                <a:solidFill>
-                  <a:srgbClr val="1750EB"/>
-                </a:solidFill>
-                <a:latin typeface="JetBrains Mono"/>
-                <a:ea typeface="JetBrains Mono"/>
-                <a:cs typeface="JetBrains Mono"/>
-              </a:rPr>
-              <a:t>range</a:t>
+              <a:t>Change the example's output so each saved note is numbered from 1. Store 1 in </a:t>
+            </a:r>
+            <a:r>
+              <a:rPr sz="2050" b="0">
+                <a:solidFill>
+                  <a:srgbClr val="6A1B9A"/>
+                </a:solidFill>
+                <a:highlight>
+                  <a:srgbClr val="ECEAF4"/>
+                </a:highlight>
+                <a:latin typeface="JetBrains Mono"/>
+                <a:ea typeface="JetBrains Mono"/>
+                <a:cs typeface="JetBrains Mono"/>
+              </a:rPr>
+              <a:t> number </a:t>
             </a:r>
             <a:r>
               <a:rPr sz="2400" b="0">
@@ -7473,10 +7476,10 @@
                 <a:ea typeface="Calibri"/>
                 <a:cs typeface="Calibri"/>
               </a:rPr>
-              <a:t>(3) to </a:t>
-            </a:r>
-            <a:r>
-              <a:rPr sz="2400" b="0">
+              <a:t> before the second </a:t>
+            </a:r>
+            <a:r>
+              <a:rPr sz="2050" b="0">
                 <a:solidFill>
                   <a:srgbClr val="1750EB"/>
                 </a:solidFill>
@@ -7484,7 +7487,7 @@
                 <a:ea typeface="JetBrains Mono"/>
                 <a:cs typeface="JetBrains Mono"/>
               </a:rPr>
-              <a:t>range</a:t>
+              <a:t>for</a:t>
             </a:r>
             <a:r>
               <a:rPr sz="2400" b="0">
@@ -7495,18 +7498,21 @@
                 <a:ea typeface="Calibri"/>
                 <a:cs typeface="Calibri"/>
               </a:rPr>
-              <a:t>(5) so the program asks for five notes. Append each answer to [notes]. Test </a:t>
-            </a:r>
-            <a:r>
-              <a:rPr sz="2400" b="0">
-                <a:solidFill>
-                  <a:srgbClr val="067D17"/>
-                </a:solidFill>
-                <a:latin typeface="JetBrains Mono"/>
-                <a:ea typeface="JetBrains Mono"/>
-                <a:cs typeface="JetBrains Mono"/>
-              </a:rPr>
-              <a:t>"one"</a:t>
+              <a:t> loop, display </a:t>
+            </a:r>
+            <a:r>
+              <a:rPr sz="2050" b="0">
+                <a:solidFill>
+                  <a:srgbClr val="6A1B9A"/>
+                </a:solidFill>
+                <a:highlight>
+                  <a:srgbClr val="ECEAF4"/>
+                </a:highlight>
+                <a:latin typeface="JetBrains Mono"/>
+                <a:ea typeface="JetBrains Mono"/>
+                <a:cs typeface="JetBrains Mono"/>
+              </a:rPr>
+              <a:t> number </a:t>
             </a:r>
             <a:r>
               <a:rPr sz="2400" b="0">
@@ -7517,10 +7523,10 @@
                 <a:ea typeface="Calibri"/>
                 <a:cs typeface="Calibri"/>
               </a:rPr>
-              <a:t>, </a:t>
-            </a:r>
-            <a:r>
-              <a:rPr sz="2400" b="0">
+              <a:t> and the note, then add 1. For example, if the first note is </a:t>
+            </a:r>
+            <a:r>
+              <a:rPr sz="2050" b="0">
                 <a:solidFill>
                   <a:srgbClr val="067D17"/>
                 </a:solidFill>
@@ -7528,7 +7534,7 @@
                 <a:ea typeface="JetBrains Mono"/>
                 <a:cs typeface="JetBrains Mono"/>
               </a:rPr>
-              <a:t>"two"</a:t>
+              <a:t>"milk"</a:t>
             </a:r>
             <a:r>
               <a:rPr sz="2400" b="0">
@@ -7539,10 +7545,10 @@
                 <a:ea typeface="Calibri"/>
                 <a:cs typeface="Calibri"/>
               </a:rPr>
-              <a:t>, </a:t>
-            </a:r>
-            <a:r>
-              <a:rPr sz="2400" b="0">
+              <a:t>, display </a:t>
+            </a:r>
+            <a:r>
+              <a:rPr sz="2050" b="0">
                 <a:solidFill>
                   <a:srgbClr val="067D17"/>
                 </a:solidFill>
@@ -7550,73 +7556,7 @@
                 <a:ea typeface="JetBrains Mono"/>
                 <a:cs typeface="JetBrains Mono"/>
               </a:rPr>
-              <a:t>"three"</a:t>
-            </a:r>
-            <a:r>
-              <a:rPr sz="2400" b="0">
-                <a:solidFill>
-                  <a:srgbClr val="080808"/>
-                </a:solidFill>
-                <a:latin typeface="Calibri"/>
-                <a:ea typeface="Calibri"/>
-                <a:cs typeface="Calibri"/>
-              </a:rPr>
-              <a:t>, </a:t>
-            </a:r>
-            <a:r>
-              <a:rPr sz="2400" b="0">
-                <a:solidFill>
-                  <a:srgbClr val="067D17"/>
-                </a:solidFill>
-                <a:latin typeface="JetBrains Mono"/>
-                <a:ea typeface="JetBrains Mono"/>
-                <a:cs typeface="JetBrains Mono"/>
-              </a:rPr>
-              <a:t>"four"</a:t>
-            </a:r>
-            <a:r>
-              <a:rPr sz="2400" b="0">
-                <a:solidFill>
-                  <a:srgbClr val="080808"/>
-                </a:solidFill>
-                <a:latin typeface="Calibri"/>
-                <a:ea typeface="Calibri"/>
-                <a:cs typeface="Calibri"/>
-              </a:rPr>
-              <a:t> and </a:t>
-            </a:r>
-            <a:r>
-              <a:rPr sz="2400" b="0">
-                <a:solidFill>
-                  <a:srgbClr val="067D17"/>
-                </a:solidFill>
-                <a:latin typeface="JetBrains Mono"/>
-                <a:ea typeface="JetBrains Mono"/>
-                <a:cs typeface="JetBrains Mono"/>
-              </a:rPr>
-              <a:t>"five"</a:t>
-            </a:r>
-            <a:r>
-              <a:rPr sz="2400" b="0">
-                <a:solidFill>
-                  <a:srgbClr val="080808"/>
-                </a:solidFill>
-                <a:latin typeface="Calibri"/>
-                <a:ea typeface="Calibri"/>
-                <a:cs typeface="Calibri"/>
-              </a:rPr>
-              <a:t>; display the five notes in that order beneath </a:t>
-            </a:r>
-            <a:r>
-              <a:rPr sz="2400" b="0">
-                <a:solidFill>
-                  <a:srgbClr val="067D17"/>
-                </a:solidFill>
-                <a:latin typeface="JetBrains Mono"/>
-                <a:ea typeface="JetBrains Mono"/>
-                <a:cs typeface="JetBrains Mono"/>
-              </a:rPr>
-              <a:t>"Saved notes:"</a:t>
+              <a:t>"1 milk"</a:t>
             </a:r>
             <a:r>
               <a:rPr sz="2400" b="0">
@@ -8329,7 +8269,7 @@
         </p:spPr>
         <p:txBody>
           <a:bodyPr xmlns:a="http://schemas.openxmlformats.org/drawingml/2006/main">
-            <a:normAutofit fontScale="95014"/>
+            <a:normAutofit fontScale="100000"/>
           </a:bodyPr>
           <a:lstStyle xmlns:a="http://schemas.openxmlformats.org/drawingml/2006/main"/>
           <a:p xmlns:a="http://schemas.openxmlformats.org/drawingml/2006/main">
@@ -8348,10 +8288,10 @@
                 <a:ea typeface="Calibri"/>
                 <a:cs typeface="Calibri"/>
               </a:rPr>
-              <a:t>Using the example code, replace the </a:t>
-            </a:r>
-            <a:r>
-              <a:rPr sz="2400" b="0">
+              <a:t>Change the example so a </a:t>
+            </a:r>
+            <a:r>
+              <a:rPr sz="2050" b="0">
                 <a:solidFill>
                   <a:srgbClr val="1750EB"/>
                 </a:solidFill>
@@ -8359,7 +8299,7 @@
                 <a:ea typeface="JetBrains Mono"/>
                 <a:cs typeface="JetBrains Mono"/>
               </a:rPr>
-              <a:t>for</a:t>
+              <a:t>while</a:t>
             </a:r>
             <a:r>
               <a:rPr sz="2400" b="0">
@@ -8370,10 +8310,10 @@
                 <a:ea typeface="Calibri"/>
                 <a:cs typeface="Calibri"/>
               </a:rPr>
-              <a:t> loop that asks for notes with a </a:t>
-            </a:r>
-            <a:r>
-              <a:rPr sz="2400" b="0">
+              <a:t> loop replaces the first </a:t>
+            </a:r>
+            <a:r>
+              <a:rPr sz="2050" b="0">
                 <a:solidFill>
                   <a:srgbClr val="1750EB"/>
                 </a:solidFill>
@@ -8381,7 +8321,7 @@
                 <a:ea typeface="JetBrains Mono"/>
                 <a:cs typeface="JetBrains Mono"/>
               </a:rPr>
-              <a:t>while</a:t>
+              <a:t>for</a:t>
             </a:r>
             <a:r>
               <a:rPr sz="2400" b="0">
@@ -8392,10 +8332,10 @@
                 <a:ea typeface="Calibri"/>
                 <a:cs typeface="Calibri"/>
               </a:rPr>
-              <a:t> loop. Keep asking for a note until the user enters </a:t>
-            </a:r>
-            <a:r>
-              <a:rPr sz="2400" b="0">
+              <a:t> loop and collects notes until the user enters </a:t>
+            </a:r>
+            <a:r>
+              <a:rPr sz="2050" b="0">
                 <a:solidFill>
                   <a:srgbClr val="067D17"/>
                 </a:solidFill>
@@ -8414,18 +8354,21 @@
                 <a:ea typeface="Calibri"/>
                 <a:cs typeface="Calibri"/>
               </a:rPr>
-              <a:t>. Append each earlier answer to [notes], but do not append or display </a:t>
-            </a:r>
-            <a:r>
-              <a:rPr sz="2400" b="0">
-                <a:solidFill>
-                  <a:srgbClr val="067D17"/>
-                </a:solidFill>
-                <a:latin typeface="JetBrains Mono"/>
-                <a:ea typeface="JetBrains Mono"/>
-                <a:cs typeface="JetBrains Mono"/>
-              </a:rPr>
-              <a:t>"stop"</a:t>
+              <a:t>. Append every other answer to </a:t>
+            </a:r>
+            <a:r>
+              <a:rPr sz="2050" b="0">
+                <a:solidFill>
+                  <a:srgbClr val="6A1B9A"/>
+                </a:solidFill>
+                <a:highlight>
+                  <a:srgbClr val="ECEAF4"/>
+                </a:highlight>
+                <a:latin typeface="JetBrains Mono"/>
+                <a:ea typeface="JetBrains Mono"/>
+                <a:cs typeface="JetBrains Mono"/>
+              </a:rPr>
+              <a:t> notes </a:t>
             </a:r>
             <a:r>
               <a:rPr sz="2400" b="0">
@@ -8436,10 +8379,10 @@
                 <a:ea typeface="Calibri"/>
                 <a:cs typeface="Calibri"/>
               </a:rPr>
-              <a:t>. Test </a:t>
-            </a:r>
-            <a:r>
-              <a:rPr sz="2400" b="0">
+              <a:t>, then display the saved notes as before. For example, </a:t>
+            </a:r>
+            <a:r>
+              <a:rPr sz="2050" b="0">
                 <a:solidFill>
                   <a:srgbClr val="067D17"/>
                 </a:solidFill>
@@ -8461,7 +8404,7 @@
               <a:t>, </a:t>
             </a:r>
             <a:r>
-              <a:rPr sz="2400" b="0">
+              <a:rPr sz="2050" b="0">
                 <a:solidFill>
                   <a:srgbClr val="067D17"/>
                 </a:solidFill>
@@ -8483,7 +8426,7 @@
               <a:t> and </a:t>
             </a:r>
             <a:r>
-              <a:rPr sz="2400" b="0">
+              <a:rPr sz="2050" b="0">
                 <a:solidFill>
                   <a:srgbClr val="067D17"/>
                 </a:solidFill>
@@ -8502,10 +8445,10 @@
                 <a:ea typeface="Calibri"/>
                 <a:cs typeface="Calibri"/>
               </a:rPr>
-              <a:t>; display only </a:t>
-            </a:r>
-            <a:r>
-              <a:rPr sz="2400" b="0">
+              <a:t> display only </a:t>
+            </a:r>
+            <a:r>
+              <a:rPr sz="2050" b="0">
                 <a:solidFill>
                   <a:srgbClr val="067D17"/>
                 </a:solidFill>
@@ -8527,7 +8470,7 @@
               <a:t> and </a:t>
             </a:r>
             <a:r>
-              <a:rPr sz="2400" b="0">
+              <a:rPr sz="2050" b="0">
                 <a:solidFill>
                   <a:srgbClr val="067D17"/>
                 </a:solidFill>
@@ -8536,28 +8479,6 @@
                 <a:cs typeface="JetBrains Mono"/>
               </a:rPr>
               <a:t>"beta"</a:t>
-            </a:r>
-            <a:r>
-              <a:rPr sz="2400" b="0">
-                <a:solidFill>
-                  <a:srgbClr val="080808"/>
-                </a:solidFill>
-                <a:latin typeface="Calibri"/>
-                <a:ea typeface="Calibri"/>
-                <a:cs typeface="Calibri"/>
-              </a:rPr>
-              <a:t> beneath </a:t>
-            </a:r>
-            <a:r>
-              <a:rPr sz="2400" b="0">
-                <a:solidFill>
-                  <a:srgbClr val="067D17"/>
-                </a:solidFill>
-                <a:latin typeface="JetBrains Mono"/>
-                <a:ea typeface="JetBrains Mono"/>
-                <a:cs typeface="JetBrains Mono"/>
-              </a:rPr>
-              <a:t>"Saved notes:"</a:t>
             </a:r>
             <a:r>
               <a:rPr sz="2400" b="0">
@@ -9270,7 +9191,7 @@
         </p:spPr>
         <p:txBody>
           <a:bodyPr xmlns:a="http://schemas.openxmlformats.org/drawingml/2006/main">
-            <a:normAutofit fontScale="76855"/>
+            <a:normAutofit fontScale="100000"/>
           </a:bodyPr>
           <a:lstStyle xmlns:a="http://schemas.openxmlformats.org/drawingml/2006/main"/>
           <a:p xmlns:a="http://schemas.openxmlformats.org/drawingml/2006/main">
@@ -9289,10 +9210,10 @@
                 <a:ea typeface="Calibri"/>
                 <a:cs typeface="Calibri"/>
               </a:rPr>
-              <a:t>Create an empty </a:t>
-            </a:r>
-            <a:r>
-              <a:rPr sz="2400" b="0">
+              <a:t>Create a team roster. Start with an empty </a:t>
+            </a:r>
+            <a:r>
+              <a:rPr sz="2050" b="0">
                 <a:solidFill>
                   <a:srgbClr val="1750EB"/>
                 </a:solidFill>
@@ -9311,18 +9232,21 @@
                 <a:ea typeface="Calibri"/>
                 <a:cs typeface="Calibri"/>
               </a:rPr>
-              <a:t> called [roster]. Ask how many names will be entered and store the whole number in [team_size]. Use a </a:t>
-            </a:r>
-            <a:r>
-              <a:rPr sz="2400" b="0">
-                <a:solidFill>
-                  <a:srgbClr val="1750EB"/>
-                </a:solidFill>
-                <a:latin typeface="JetBrains Mono"/>
-                <a:ea typeface="JetBrains Mono"/>
-                <a:cs typeface="JetBrains Mono"/>
-              </a:rPr>
-              <a:t>for</a:t>
+              <a:t> called </a:t>
+            </a:r>
+            <a:r>
+              <a:rPr sz="2050" b="0">
+                <a:solidFill>
+                  <a:srgbClr val="6A1B9A"/>
+                </a:solidFill>
+                <a:highlight>
+                  <a:srgbClr val="ECEAF4"/>
+                </a:highlight>
+                <a:latin typeface="JetBrains Mono"/>
+                <a:ea typeface="JetBrains Mono"/>
+                <a:cs typeface="JetBrains Mono"/>
+              </a:rPr>
+              <a:t> roster </a:t>
             </a:r>
             <a:r>
               <a:rPr sz="2400" b="0">
@@ -9333,10 +9257,10 @@
                 <a:ea typeface="Calibri"/>
                 <a:cs typeface="Calibri"/>
               </a:rPr>
-              <a:t> loop and </a:t>
-            </a:r>
-            <a:r>
-              <a:rPr sz="2400" b="0">
+              <a:t>, ask how many names to enter, and use a </a:t>
+            </a:r>
+            <a:r>
+              <a:rPr sz="2050" b="0">
                 <a:solidFill>
                   <a:srgbClr val="1750EB"/>
                 </a:solidFill>
@@ -9344,7 +9268,7 @@
                 <a:ea typeface="JetBrains Mono"/>
                 <a:cs typeface="JetBrains Mono"/>
               </a:rPr>
-              <a:t>range</a:t>
+              <a:t>for</a:t>
             </a:r>
             <a:r>
               <a:rPr sz="2400" b="0">
@@ -9355,18 +9279,18 @@
                 <a:ea typeface="Calibri"/>
                 <a:cs typeface="Calibri"/>
               </a:rPr>
-              <a:t>(team_size) to ask for each name and append it to [roster]. Ask for a replacement position from 0 to team_size - 1 and store it in [position]. Ask for a replacement name and store it in [replacement], then update [roster][position]. Test 3 names—</a:t>
-            </a:r>
-            <a:r>
-              <a:rPr sz="2400" b="0">
-                <a:solidFill>
-                  <a:srgbClr val="067D17"/>
-                </a:solidFill>
-                <a:latin typeface="JetBrains Mono"/>
-                <a:ea typeface="JetBrains Mono"/>
-                <a:cs typeface="JetBrains Mono"/>
-              </a:rPr>
-              <a:t>"Ari"</a:t>
+              <a:t> loop and </a:t>
+            </a:r>
+            <a:r>
+              <a:rPr sz="2050" b="0">
+                <a:solidFill>
+                  <a:srgbClr val="1750EB"/>
+                </a:solidFill>
+                <a:latin typeface="JetBrains Mono"/>
+                <a:ea typeface="JetBrains Mono"/>
+                <a:cs typeface="JetBrains Mono"/>
+              </a:rPr>
+              <a:t>range()</a:t>
             </a:r>
             <a:r>
               <a:rPr sz="2400" b="0">
@@ -9377,76 +9301,10 @@
                 <a:ea typeface="Calibri"/>
                 <a:cs typeface="Calibri"/>
               </a:rPr>
-              <a:t>, </a:t>
-            </a:r>
-            <a:r>
-              <a:rPr sz="2400" b="0">
-                <a:solidFill>
-                  <a:srgbClr val="067D17"/>
-                </a:solidFill>
-                <a:latin typeface="JetBrains Mono"/>
-                <a:ea typeface="JetBrains Mono"/>
-                <a:cs typeface="JetBrains Mono"/>
-              </a:rPr>
-              <a:t>"Bao"</a:t>
-            </a:r>
-            <a:r>
-              <a:rPr sz="2400" b="0">
-                <a:solidFill>
-                  <a:srgbClr val="080808"/>
-                </a:solidFill>
-                <a:latin typeface="Calibri"/>
-                <a:ea typeface="Calibri"/>
-                <a:cs typeface="Calibri"/>
-              </a:rPr>
-              <a:t> and </a:t>
-            </a:r>
-            <a:r>
-              <a:rPr sz="2400" b="0">
-                <a:solidFill>
-                  <a:srgbClr val="067D17"/>
-                </a:solidFill>
-                <a:latin typeface="JetBrains Mono"/>
-                <a:ea typeface="JetBrains Mono"/>
-                <a:cs typeface="JetBrains Mono"/>
-              </a:rPr>
-              <a:t>"Cleo"</a:t>
-            </a:r>
-            <a:r>
-              <a:rPr sz="2400" b="0">
-                <a:solidFill>
-                  <a:srgbClr val="080808"/>
-                </a:solidFill>
-                <a:latin typeface="Calibri"/>
-                <a:ea typeface="Calibri"/>
-                <a:cs typeface="Calibri"/>
-              </a:rPr>
-              <a:t>—then replace position 1 with </a:t>
-            </a:r>
-            <a:r>
-              <a:rPr sz="2400" b="0">
-                <a:solidFill>
-                  <a:srgbClr val="067D17"/>
-                </a:solidFill>
-                <a:latin typeface="JetBrains Mono"/>
-                <a:ea typeface="JetBrains Mono"/>
-                <a:cs typeface="JetBrains Mono"/>
-              </a:rPr>
-              <a:t>"Dara"</a:t>
-            </a:r>
-            <a:r>
-              <a:rPr sz="2400" b="0">
-                <a:solidFill>
-                  <a:srgbClr val="080808"/>
-                </a:solidFill>
-                <a:latin typeface="Calibri"/>
-                <a:ea typeface="Calibri"/>
-                <a:cs typeface="Calibri"/>
-              </a:rPr>
-              <a:t>. Display Ari, Dara and Cleo beneath </a:t>
-            </a:r>
-            <a:r>
-              <a:rPr sz="2400" b="0">
+              <a:t> to append that many names. Ask for a position and a replacement name, update that item, then display each name on its own line after </a:t>
+            </a:r>
+            <a:r>
+              <a:rPr sz="2050" b="0">
                 <a:solidFill>
                   <a:srgbClr val="067D17"/>
                 </a:solidFill>

--- a/Mapped Curriculum Lessons/Grade 7/Lesson 26 - Building Lists with Loops/Building Lists with Loops - Slides.pptx
+++ b/Mapped Curriculum Lessons/Grade 7/Lesson 26 - Building Lists with Loops/Building Lists with Loops - Slides.pptx
@@ -2,28 +2,28 @@
 <file path=ppt/presentation.xml><?xml version="1.0" encoding="utf-8"?>
 <p:presentation xmlns:p="http://schemas.openxmlformats.org/presentationml/2006/main" embedTrueTypeFonts="1" saveSubsetFonts="0">
   <p:sldMasterIdLst>
-    <p:sldMasterId xmlns:r="http://schemas.openxmlformats.org/officeDocument/2006/relationships" id="2147483648" r:id="R34b4c30199f64396"/>
+    <p:sldMasterId xmlns:r="http://schemas.openxmlformats.org/officeDocument/2006/relationships" id="2147483648" r:id="Rd68fab6babb442a2"/>
   </p:sldMasterIdLst>
   <p:notesMasterIdLst>
-    <p:notesMasterId xmlns:r="http://schemas.openxmlformats.org/officeDocument/2006/relationships" r:id="R41c5f5c7152143bb"/>
+    <p:notesMasterId xmlns:r="http://schemas.openxmlformats.org/officeDocument/2006/relationships" r:id="Re675da8a9d814e58"/>
   </p:notesMasterIdLst>
   <p:sldIdLst>
-    <p:sldId xmlns:r="http://schemas.openxmlformats.org/officeDocument/2006/relationships" id="256" r:id="R007cfc76d1454547"/>
-    <p:sldId xmlns:r="http://schemas.openxmlformats.org/officeDocument/2006/relationships" id="257" r:id="R28f32066116940f3"/>
-    <p:sldId xmlns:r="http://schemas.openxmlformats.org/officeDocument/2006/relationships" id="258" r:id="R9372de8395714984"/>
-    <p:sldId xmlns:r="http://schemas.openxmlformats.org/officeDocument/2006/relationships" id="259" r:id="Rd7e1d71bf1354cf4"/>
-    <p:sldId xmlns:r="http://schemas.openxmlformats.org/officeDocument/2006/relationships" id="260" r:id="R2aa85a82632a45d4"/>
-    <p:sldId xmlns:r="http://schemas.openxmlformats.org/officeDocument/2006/relationships" id="261" r:id="R53d40c5cbfd74a8b"/>
-    <p:sldId xmlns:r="http://schemas.openxmlformats.org/officeDocument/2006/relationships" id="262" r:id="Ra7a55d86259a40fb"/>
-    <p:sldId xmlns:r="http://schemas.openxmlformats.org/officeDocument/2006/relationships" id="263" r:id="Rfd5aaf21392045ef"/>
-    <p:sldId xmlns:r="http://schemas.openxmlformats.org/officeDocument/2006/relationships" id="264" r:id="R972b016734224219"/>
+    <p:sldId xmlns:r="http://schemas.openxmlformats.org/officeDocument/2006/relationships" id="256" r:id="R5d169b4deb044a33"/>
+    <p:sldId xmlns:r="http://schemas.openxmlformats.org/officeDocument/2006/relationships" id="257" r:id="R0f7c509d59e84e09"/>
+    <p:sldId xmlns:r="http://schemas.openxmlformats.org/officeDocument/2006/relationships" id="258" r:id="R26d9446a9e9f4582"/>
+    <p:sldId xmlns:r="http://schemas.openxmlformats.org/officeDocument/2006/relationships" id="259" r:id="Rb560835a2be04ab9"/>
+    <p:sldId xmlns:r="http://schemas.openxmlformats.org/officeDocument/2006/relationships" id="260" r:id="R889895c2aecc47cd"/>
+    <p:sldId xmlns:r="http://schemas.openxmlformats.org/officeDocument/2006/relationships" id="261" r:id="R7aee2985e0ef4f9b"/>
+    <p:sldId xmlns:r="http://schemas.openxmlformats.org/officeDocument/2006/relationships" id="262" r:id="R656abb854e7a4d8a"/>
+    <p:sldId xmlns:r="http://schemas.openxmlformats.org/officeDocument/2006/relationships" id="263" r:id="Rd3388744823645dc"/>
+    <p:sldId xmlns:r="http://schemas.openxmlformats.org/officeDocument/2006/relationships" id="264" r:id="R0e274dcdaa554672"/>
   </p:sldIdLst>
   <p:sldSz cx="12192000" cy="6858000"/>
   <p:notesSz cx="6858000" cy="9144000"/>
   <p:embeddedFontLst>
     <p:embeddedFont>
       <p:font typeface="JetBrains Mono"/>
-      <p:regular xmlns:r="http://schemas.openxmlformats.org/officeDocument/2006/relationships" r:id="Rdf9f1e285e344549"/>
+      <p:regular xmlns:r="http://schemas.openxmlformats.org/officeDocument/2006/relationships" r:id="R07b392ab75724bc2"/>
     </p:embeddedFont>
   </p:embeddedFontLst>
 </p:presentation>
@@ -1071,7 +1071,7 @@
           <p:nvPr/>
         </p:nvPicPr>
         <p:blipFill rotWithShape="1">
-          <a:blip xmlns:r="http://schemas.openxmlformats.org/officeDocument/2006/relationships" xmlns:a="http://schemas.openxmlformats.org/drawingml/2006/main" r:embed="R998e0bfa86084ef5"/>
+          <a:blip xmlns:r="http://schemas.openxmlformats.org/officeDocument/2006/relationships" xmlns:a="http://schemas.openxmlformats.org/drawingml/2006/main" r:embed="R0446e9bb9f954832"/>
           <a:stretch xmlns:a="http://schemas.openxmlformats.org/drawingml/2006/main"/>
         </p:blipFill>
         <p:spPr>
@@ -1451,7 +1451,7 @@
           <p:nvPr/>
         </p:nvPicPr>
         <p:blipFill rotWithShape="1">
-          <a:blip xmlns:r="http://schemas.openxmlformats.org/officeDocument/2006/relationships" xmlns:a="http://schemas.openxmlformats.org/drawingml/2006/main" r:embed="R658cb2b4fc574a8b">
+          <a:blip xmlns:r="http://schemas.openxmlformats.org/officeDocument/2006/relationships" xmlns:a="http://schemas.openxmlformats.org/drawingml/2006/main" r:embed="R859facc399f04ee7">
             <a:alphaModFix amt="28000"/>
           </a:blip>
           <a:stretch xmlns:a="http://schemas.openxmlformats.org/drawingml/2006/main"/>
@@ -1664,7 +1664,7 @@
           <p:nvPr/>
         </p:nvPicPr>
         <p:blipFill rotWithShape="1">
-          <a:blip xmlns:r="http://schemas.openxmlformats.org/officeDocument/2006/relationships" xmlns:a="http://schemas.openxmlformats.org/drawingml/2006/main" r:embed="R96cf6959a03b4486">
+          <a:blip xmlns:r="http://schemas.openxmlformats.org/officeDocument/2006/relationships" xmlns:a="http://schemas.openxmlformats.org/drawingml/2006/main" r:embed="Rd7f71c121ca74ab3">
             <a:alphaModFix amt="28000"/>
           </a:blip>
           <a:stretch xmlns:a="http://schemas.openxmlformats.org/drawingml/2006/main"/>
@@ -1899,7 +1899,7 @@
           <p:nvPr/>
         </p:nvPicPr>
         <p:blipFill rotWithShape="1">
-          <a:blip xmlns:r="http://schemas.openxmlformats.org/officeDocument/2006/relationships" xmlns:a="http://schemas.openxmlformats.org/drawingml/2006/main" r:embed="R0625a122d6f44970">
+          <a:blip xmlns:r="http://schemas.openxmlformats.org/officeDocument/2006/relationships" xmlns:a="http://schemas.openxmlformats.org/drawingml/2006/main" r:embed="R0081db27c28246ad">
             <a:alphaModFix amt="28000"/>
           </a:blip>
           <a:stretch xmlns:a="http://schemas.openxmlformats.org/drawingml/2006/main"/>
@@ -2176,7 +2176,7 @@
           <p:nvPr/>
         </p:nvPicPr>
         <p:blipFill rotWithShape="1">
-          <a:blip xmlns:r="http://schemas.openxmlformats.org/officeDocument/2006/relationships" xmlns:a="http://schemas.openxmlformats.org/drawingml/2006/main" r:embed="R40bf49968bbb400a">
+          <a:blip xmlns:r="http://schemas.openxmlformats.org/officeDocument/2006/relationships" xmlns:a="http://schemas.openxmlformats.org/drawingml/2006/main" r:embed="Ra440bfc05c99402a">
             <a:alphaModFix amt="28000"/>
           </a:blip>
           <a:stretch xmlns:a="http://schemas.openxmlformats.org/drawingml/2006/main"/>
@@ -2451,7 +2451,7 @@
           <p:nvPr/>
         </p:nvPicPr>
         <p:blipFill rotWithShape="1">
-          <a:blip xmlns:r="http://schemas.openxmlformats.org/officeDocument/2006/relationships" xmlns:a="http://schemas.openxmlformats.org/drawingml/2006/main" r:embed="Rd3491a08e0da4f87">
+          <a:blip xmlns:r="http://schemas.openxmlformats.org/officeDocument/2006/relationships" xmlns:a="http://schemas.openxmlformats.org/drawingml/2006/main" r:embed="Ra8bfc0b24533471f">
             <a:alphaModFix amt="28000"/>
           </a:blip>
           <a:stretch xmlns:a="http://schemas.openxmlformats.org/drawingml/2006/main"/>
@@ -2875,7 +2875,7 @@
           <p:nvPr/>
         </p:nvPicPr>
         <p:blipFill rotWithShape="1">
-          <a:blip xmlns:r="http://schemas.openxmlformats.org/officeDocument/2006/relationships" xmlns:a="http://schemas.openxmlformats.org/drawingml/2006/main" r:embed="R4a6f254c86a2402e">
+          <a:blip xmlns:r="http://schemas.openxmlformats.org/officeDocument/2006/relationships" xmlns:a="http://schemas.openxmlformats.org/drawingml/2006/main" r:embed="R5a116d13d1a84825">
             <a:alphaModFix amt="28000"/>
           </a:blip>
           <a:stretch xmlns:a="http://schemas.openxmlformats.org/drawingml/2006/main"/>
@@ -3016,7 +3016,7 @@
           <p:nvPr/>
         </p:nvPicPr>
         <p:blipFill rotWithShape="1">
-          <a:blip xmlns:r="http://schemas.openxmlformats.org/officeDocument/2006/relationships" xmlns:a="http://schemas.openxmlformats.org/drawingml/2006/main" r:embed="R6e6355c81b6e4136">
+          <a:blip xmlns:r="http://schemas.openxmlformats.org/officeDocument/2006/relationships" xmlns:a="http://schemas.openxmlformats.org/drawingml/2006/main" r:embed="Rf7095cc915f14f70">
             <a:alphaModFix amt="28000"/>
           </a:blip>
           <a:stretch xmlns:a="http://schemas.openxmlformats.org/drawingml/2006/main"/>
@@ -3130,7 +3130,7 @@
           <p:nvPr/>
         </p:nvPicPr>
         <p:blipFill rotWithShape="1">
-          <a:blip xmlns:r="http://schemas.openxmlformats.org/officeDocument/2006/relationships" xmlns:a="http://schemas.openxmlformats.org/drawingml/2006/main" r:embed="R101bb04a22e84d61">
+          <a:blip xmlns:r="http://schemas.openxmlformats.org/officeDocument/2006/relationships" xmlns:a="http://schemas.openxmlformats.org/drawingml/2006/main" r:embed="R140ebbf0b7534365">
             <a:alphaModFix amt="28000"/>
           </a:blip>
           <a:stretch xmlns:a="http://schemas.openxmlformats.org/drawingml/2006/main"/>
@@ -3457,7 +3457,7 @@
           <p:nvPr/>
         </p:nvPicPr>
         <p:blipFill rotWithShape="1">
-          <a:blip xmlns:r="http://schemas.openxmlformats.org/officeDocument/2006/relationships" xmlns:a="http://schemas.openxmlformats.org/drawingml/2006/main" r:embed="R2594074ba74646e2">
+          <a:blip xmlns:r="http://schemas.openxmlformats.org/officeDocument/2006/relationships" xmlns:a="http://schemas.openxmlformats.org/drawingml/2006/main" r:embed="R2fd1daa3037e4d2f">
             <a:alphaModFix amt="28000"/>
           </a:blip>
           <a:stretch xmlns:a="http://schemas.openxmlformats.org/drawingml/2006/main"/>
@@ -3745,7 +3745,7 @@
           <p:nvPr/>
         </p:nvPicPr>
         <p:blipFill rotWithShape="1">
-          <a:blip xmlns:r="http://schemas.openxmlformats.org/officeDocument/2006/relationships" xmlns:a="http://schemas.openxmlformats.org/drawingml/2006/main" r:embed="Rb0a6d5f4fe974fa9">
+          <a:blip xmlns:r="http://schemas.openxmlformats.org/officeDocument/2006/relationships" xmlns:a="http://schemas.openxmlformats.org/drawingml/2006/main" r:embed="Re4bc6ecda87f4802">
             <a:alphaModFix amt="28000"/>
           </a:blip>
           <a:stretch xmlns:a="http://schemas.openxmlformats.org/drawingml/2006/main"/>
@@ -3982,17 +3982,17 @@
   </p:cSld>
   <p:clrMap bg1="lt1" tx1="dk1" bg2="lt2" tx2="dk2" accent1="accent1" accent2="accent2" accent3="accent3" accent4="accent4" accent5="accent5" accent6="accent6" hlink="hlink" folHlink="folHlink"/>
   <p:sldLayoutIdLst>
-    <p:sldLayoutId xmlns:r="http://schemas.openxmlformats.org/officeDocument/2006/relationships" id="2147483649" r:id="Rf7be22df1dd34df8"/>
-    <p:sldLayoutId xmlns:r="http://schemas.openxmlformats.org/officeDocument/2006/relationships" id="2147483650" r:id="R7bda02ae757d4259"/>
-    <p:sldLayoutId xmlns:r="http://schemas.openxmlformats.org/officeDocument/2006/relationships" id="2147483651" r:id="Rf22e87656c424704"/>
-    <p:sldLayoutId xmlns:r="http://schemas.openxmlformats.org/officeDocument/2006/relationships" id="2147483652" r:id="R0bad9d31678b4647"/>
-    <p:sldLayoutId xmlns:r="http://schemas.openxmlformats.org/officeDocument/2006/relationships" id="2147483653" r:id="R04ea555021414d36"/>
-    <p:sldLayoutId xmlns:r="http://schemas.openxmlformats.org/officeDocument/2006/relationships" id="2147483654" r:id="R2b83ce50d9a247c1"/>
-    <p:sldLayoutId xmlns:r="http://schemas.openxmlformats.org/officeDocument/2006/relationships" id="2147483655" r:id="R24a64fa7f88e4200"/>
-    <p:sldLayoutId xmlns:r="http://schemas.openxmlformats.org/officeDocument/2006/relationships" id="2147483656" r:id="R52068ba1388c4c87"/>
-    <p:sldLayoutId xmlns:r="http://schemas.openxmlformats.org/officeDocument/2006/relationships" id="2147483657" r:id="Rab14fb851a344b2d"/>
-    <p:sldLayoutId xmlns:r="http://schemas.openxmlformats.org/officeDocument/2006/relationships" id="2147483658" r:id="Ra3c0ef30f1d844ff"/>
-    <p:sldLayoutId xmlns:r="http://schemas.openxmlformats.org/officeDocument/2006/relationships" id="2147483659" r:id="R44ef70f3ee98489e"/>
+    <p:sldLayoutId xmlns:r="http://schemas.openxmlformats.org/officeDocument/2006/relationships" id="2147483649" r:id="R72791fa7873a4666"/>
+    <p:sldLayoutId xmlns:r="http://schemas.openxmlformats.org/officeDocument/2006/relationships" id="2147483650" r:id="R3f8b915068bb46a7"/>
+    <p:sldLayoutId xmlns:r="http://schemas.openxmlformats.org/officeDocument/2006/relationships" id="2147483651" r:id="R38fd7170eb754b5e"/>
+    <p:sldLayoutId xmlns:r="http://schemas.openxmlformats.org/officeDocument/2006/relationships" id="2147483652" r:id="R9a8b28ca8016424b"/>
+    <p:sldLayoutId xmlns:r="http://schemas.openxmlformats.org/officeDocument/2006/relationships" id="2147483653" r:id="Rba1b1ecf765347b0"/>
+    <p:sldLayoutId xmlns:r="http://schemas.openxmlformats.org/officeDocument/2006/relationships" id="2147483654" r:id="Re2570246ffbf4f01"/>
+    <p:sldLayoutId xmlns:r="http://schemas.openxmlformats.org/officeDocument/2006/relationships" id="2147483655" r:id="R37425971c36340be"/>
+    <p:sldLayoutId xmlns:r="http://schemas.openxmlformats.org/officeDocument/2006/relationships" id="2147483656" r:id="R3681a55330e14c8e"/>
+    <p:sldLayoutId xmlns:r="http://schemas.openxmlformats.org/officeDocument/2006/relationships" id="2147483657" r:id="R65a50542599c4594"/>
+    <p:sldLayoutId xmlns:r="http://schemas.openxmlformats.org/officeDocument/2006/relationships" id="2147483658" r:id="Rfb76fa35aeb94c66"/>
+    <p:sldLayoutId xmlns:r="http://schemas.openxmlformats.org/officeDocument/2006/relationships" id="2147483659" r:id="R43adf42d18154257"/>
   </p:sldLayoutIdLst>
   <p:hf hdr="0" ftr="0" dt="0"/>
   <p:txStyles>
@@ -4917,7 +4917,7 @@
             <a:r>
               <a:rPr sz="2400">
                 <a:solidFill>
-                  <a:srgbClr val="1750EB"/>
+                  <a:srgbClr val="C45E00"/>
                 </a:solidFill>
                 <a:latin typeface="JetBrains Mono"/>
                 <a:ea typeface="JetBrains Mono"/>
@@ -4939,7 +4939,7 @@
             <a:r>
               <a:rPr sz="2400">
                 <a:solidFill>
-                  <a:srgbClr val="1750EB"/>
+                  <a:srgbClr val="C45E00"/>
                 </a:solidFill>
                 <a:latin typeface="JetBrains Mono"/>
                 <a:ea typeface="JetBrains Mono"/>
@@ -5147,7 +5147,7 @@
             <a:r>
               <a:rPr sz="2400">
                 <a:solidFill>
-                  <a:srgbClr val="1750EB"/>
+                  <a:srgbClr val="C45E00"/>
                 </a:solidFill>
                 <a:latin typeface="JetBrains Mono"/>
                 <a:ea typeface="JetBrains Mono"/>
@@ -5169,7 +5169,7 @@
             <a:r>
               <a:rPr sz="2400">
                 <a:solidFill>
-                  <a:srgbClr val="1750EB"/>
+                  <a:srgbClr val="C45E00"/>
                 </a:solidFill>
                 <a:latin typeface="JetBrains Mono"/>
                 <a:ea typeface="JetBrains Mono"/>
@@ -5536,7 +5536,7 @@
             <a:r>
               <a:rPr sz="2400">
                 <a:solidFill>
-                  <a:srgbClr val="1750EB"/>
+                  <a:srgbClr val="C45E00"/>
                 </a:solidFill>
                 <a:latin typeface="JetBrains Mono"/>
                 <a:ea typeface="JetBrains Mono"/>
@@ -5558,7 +5558,7 @@
             <a:r>
               <a:rPr sz="2400">
                 <a:solidFill>
-                  <a:srgbClr val="1750EB"/>
+                  <a:srgbClr val="C45E00"/>
                 </a:solidFill>
                 <a:latin typeface="JetBrains Mono"/>
                 <a:ea typeface="JetBrains Mono"/>
@@ -5766,7 +5766,7 @@
             <a:r>
               <a:rPr sz="2400">
                 <a:solidFill>
-                  <a:srgbClr val="1750EB"/>
+                  <a:srgbClr val="C45E00"/>
                 </a:solidFill>
                 <a:latin typeface="JetBrains Mono"/>
                 <a:ea typeface="JetBrains Mono"/>
@@ -5788,7 +5788,7 @@
             <a:r>
               <a:rPr sz="2400">
                 <a:solidFill>
-                  <a:srgbClr val="1750EB"/>
+                  <a:srgbClr val="C45E00"/>
                 </a:solidFill>
                 <a:latin typeface="JetBrains Mono"/>
                 <a:ea typeface="JetBrains Mono"/>
@@ -6155,7 +6155,7 @@
             <a:r>
               <a:rPr sz="2400">
                 <a:solidFill>
-                  <a:srgbClr val="1750EB"/>
+                  <a:srgbClr val="C45E00"/>
                 </a:solidFill>
                 <a:latin typeface="JetBrains Mono"/>
                 <a:ea typeface="JetBrains Mono"/>
@@ -6177,7 +6177,7 @@
             <a:r>
               <a:rPr sz="2400">
                 <a:solidFill>
-                  <a:srgbClr val="1750EB"/>
+                  <a:srgbClr val="C45E00"/>
                 </a:solidFill>
                 <a:latin typeface="JetBrains Mono"/>
                 <a:ea typeface="JetBrains Mono"/>
@@ -6385,7 +6385,7 @@
             <a:r>
               <a:rPr sz="2400">
                 <a:solidFill>
-                  <a:srgbClr val="1750EB"/>
+                  <a:srgbClr val="C45E00"/>
                 </a:solidFill>
                 <a:latin typeface="JetBrains Mono"/>
                 <a:ea typeface="JetBrains Mono"/>
@@ -6407,7 +6407,7 @@
             <a:r>
               <a:rPr sz="2400">
                 <a:solidFill>
-                  <a:srgbClr val="1750EB"/>
+                  <a:srgbClr val="C45E00"/>
                 </a:solidFill>
                 <a:latin typeface="JetBrains Mono"/>
                 <a:ea typeface="JetBrains Mono"/>
@@ -7027,12 +7027,250 @@
             <a:r>
               <a:rPr sz="1400">
                 <a:solidFill>
+                  <a:srgbClr val="C45E00"/>
+                </a:solidFill>
+                <a:latin typeface="JetBrains Mono"/>
+                <a:ea typeface="JetBrains Mono"/>
+                <a:cs typeface="JetBrains Mono"/>
+              </a:rPr>
+              <a:t>for</a:t>
+            </a:r>
+            <a:r>
+              <a:rPr sz="1400">
+                <a:solidFill>
+                  <a:srgbClr val="080808"/>
+                </a:solidFill>
+                <a:latin typeface="JetBrains Mono"/>
+                <a:ea typeface="JetBrains Mono"/>
+                <a:cs typeface="JetBrains Mono"/>
+              </a:rPr>
+              <a:t> count </a:t>
+            </a:r>
+            <a:r>
+              <a:rPr sz="1400">
+                <a:solidFill>
+                  <a:srgbClr val="C45E00"/>
+                </a:solidFill>
+                <a:latin typeface="JetBrains Mono"/>
+                <a:ea typeface="JetBrains Mono"/>
+                <a:cs typeface="JetBrains Mono"/>
+              </a:rPr>
+              <a:t>in</a:t>
+            </a:r>
+            <a:r>
+              <a:rPr sz="1400">
+                <a:solidFill>
+                  <a:srgbClr val="080808"/>
+                </a:solidFill>
+                <a:latin typeface="JetBrains Mono"/>
+                <a:ea typeface="JetBrains Mono"/>
+                <a:cs typeface="JetBrains Mono"/>
+              </a:rPr>
+              <a:t> </a:t>
+            </a:r>
+            <a:r>
+              <a:rPr sz="1400">
+                <a:solidFill>
                   <a:srgbClr val="1750EB"/>
                 </a:solidFill>
                 <a:latin typeface="JetBrains Mono"/>
                 <a:ea typeface="JetBrains Mono"/>
                 <a:cs typeface="JetBrains Mono"/>
               </a:rPr>
+              <a:t>range</a:t>
+            </a:r>
+            <a:r>
+              <a:rPr sz="1400">
+                <a:solidFill>
+                  <a:srgbClr val="080808"/>
+                </a:solidFill>
+                <a:latin typeface="JetBrains Mono"/>
+                <a:ea typeface="JetBrains Mono"/>
+                <a:cs typeface="JetBrains Mono"/>
+              </a:rPr>
+              <a:t>(3):</a:t>
+            </a:r>
+            <a:br>
+              <a:rPr sz="1400">
+                <a:solidFill>
+                  <a:srgbClr val="080808"/>
+                </a:solidFill>
+                <a:latin typeface="JetBrains Mono"/>
+                <a:ea typeface="JetBrains Mono"/>
+                <a:cs typeface="JetBrains Mono"/>
+              </a:rPr>
+            </a:br>
+            <a:r>
+              <a:rPr sz="1400">
+                <a:solidFill>
+                  <a:srgbClr val="080808"/>
+                </a:solidFill>
+                <a:latin typeface="JetBrains Mono"/>
+                <a:ea typeface="JetBrains Mono"/>
+                <a:cs typeface="JetBrains Mono"/>
+              </a:rPr>
+              <a:t>    note = </a:t>
+            </a:r>
+            <a:r>
+              <a:rPr sz="1400">
+                <a:solidFill>
+                  <a:srgbClr val="1750EB"/>
+                </a:solidFill>
+                <a:latin typeface="JetBrains Mono"/>
+                <a:ea typeface="JetBrains Mono"/>
+                <a:cs typeface="JetBrains Mono"/>
+              </a:rPr>
+              <a:t>input</a:t>
+            </a:r>
+            <a:r>
+              <a:rPr sz="1400">
+                <a:solidFill>
+                  <a:srgbClr val="080808"/>
+                </a:solidFill>
+                <a:latin typeface="JetBrains Mono"/>
+                <a:ea typeface="JetBrains Mono"/>
+                <a:cs typeface="JetBrains Mono"/>
+              </a:rPr>
+              <a:t>(</a:t>
+            </a:r>
+            <a:r>
+              <a:rPr sz="1400">
+                <a:solidFill>
+                  <a:srgbClr val="067D17"/>
+                </a:solidFill>
+                <a:latin typeface="JetBrains Mono"/>
+                <a:ea typeface="JetBrains Mono"/>
+                <a:cs typeface="JetBrains Mono"/>
+              </a:rPr>
+              <a:t>"Enter a note: "</a:t>
+            </a:r>
+            <a:r>
+              <a:rPr sz="1400">
+                <a:solidFill>
+                  <a:srgbClr val="080808"/>
+                </a:solidFill>
+                <a:latin typeface="JetBrains Mono"/>
+                <a:ea typeface="JetBrains Mono"/>
+                <a:cs typeface="JetBrains Mono"/>
+              </a:rPr>
+              <a:t>)</a:t>
+            </a:r>
+            <a:br>
+              <a:rPr sz="1400">
+                <a:solidFill>
+                  <a:srgbClr val="080808"/>
+                </a:solidFill>
+                <a:latin typeface="JetBrains Mono"/>
+                <a:ea typeface="JetBrains Mono"/>
+                <a:cs typeface="JetBrains Mono"/>
+              </a:rPr>
+            </a:br>
+            <a:r>
+              <a:rPr sz="1400">
+                <a:solidFill>
+                  <a:srgbClr val="080808"/>
+                </a:solidFill>
+                <a:latin typeface="JetBrains Mono"/>
+                <a:ea typeface="JetBrains Mono"/>
+                <a:cs typeface="JetBrains Mono"/>
+              </a:rPr>
+              <a:t>    notes</a:t>
+            </a:r>
+            <a:r>
+              <a:rPr sz="1400">
+                <a:solidFill>
+                  <a:srgbClr val="1750EB"/>
+                </a:solidFill>
+                <a:latin typeface="JetBrains Mono"/>
+                <a:ea typeface="JetBrains Mono"/>
+                <a:cs typeface="JetBrains Mono"/>
+              </a:rPr>
+              <a:t>.append</a:t>
+            </a:r>
+            <a:r>
+              <a:rPr sz="1400">
+                <a:solidFill>
+                  <a:srgbClr val="080808"/>
+                </a:solidFill>
+                <a:latin typeface="JetBrains Mono"/>
+                <a:ea typeface="JetBrains Mono"/>
+                <a:cs typeface="JetBrains Mono"/>
+              </a:rPr>
+              <a:t>(note)</a:t>
+            </a:r>
+            <a:br>
+              <a:rPr sz="1400">
+                <a:solidFill>
+                  <a:srgbClr val="080808"/>
+                </a:solidFill>
+                <a:latin typeface="JetBrains Mono"/>
+                <a:ea typeface="JetBrains Mono"/>
+                <a:cs typeface="JetBrains Mono"/>
+              </a:rPr>
+            </a:br>
+            <a:r>
+              <a:rPr sz="1400">
+                <a:solidFill>
+                  <a:srgbClr val="1750EB"/>
+                </a:solidFill>
+                <a:latin typeface="JetBrains Mono"/>
+                <a:ea typeface="JetBrains Mono"/>
+                <a:cs typeface="JetBrains Mono"/>
+              </a:rPr>
+              <a:t>print</a:t>
+            </a:r>
+            <a:r>
+              <a:rPr sz="1400">
+                <a:solidFill>
+                  <a:srgbClr val="080808"/>
+                </a:solidFill>
+                <a:latin typeface="JetBrains Mono"/>
+                <a:ea typeface="JetBrains Mono"/>
+                <a:cs typeface="JetBrains Mono"/>
+              </a:rPr>
+              <a:t>(</a:t>
+            </a:r>
+            <a:r>
+              <a:rPr sz="1400">
+                <a:solidFill>
+                  <a:srgbClr val="067D17"/>
+                </a:solidFill>
+                <a:latin typeface="JetBrains Mono"/>
+                <a:ea typeface="JetBrains Mono"/>
+                <a:cs typeface="JetBrains Mono"/>
+              </a:rPr>
+              <a:t>"Saved notes:"</a:t>
+            </a:r>
+            <a:r>
+              <a:rPr sz="1400">
+                <a:solidFill>
+                  <a:srgbClr val="080808"/>
+                </a:solidFill>
+                <a:latin typeface="JetBrains Mono"/>
+                <a:ea typeface="JetBrains Mono"/>
+                <a:cs typeface="JetBrains Mono"/>
+              </a:rPr>
+              <a:t>)</a:t>
+            </a:r>
+            <a:br>
+              <a:rPr sz="1400">
+                <a:solidFill>
+                  <a:srgbClr val="080808"/>
+                </a:solidFill>
+                <a:latin typeface="JetBrains Mono"/>
+                <a:ea typeface="JetBrains Mono"/>
+                <a:cs typeface="JetBrains Mono"/>
+              </a:rPr>
+            </a:br>
+            <a:r>
+              <a:rPr sz="1400">
+                <a:solidFill>
+                  <a:srgbClr val="C45E00"/>
+                </a:solidFill>
+                <a:latin typeface="JetBrains Mono"/>
+                <a:ea typeface="JetBrains Mono"/>
+                <a:cs typeface="JetBrains Mono"/>
+              </a:rPr>
               <a:t>for</a:t>
             </a:r>
             <a:r>
@@ -7044,250 +7282,12 @@
                 <a:ea typeface="JetBrains Mono"/>
                 <a:cs typeface="JetBrains Mono"/>
               </a:rPr>
-              <a:t> count </a:t>
-            </a:r>
-            <a:r>
-              <a:rPr sz="1400">
-                <a:solidFill>
-                  <a:srgbClr val="1750EB"/>
-                </a:solidFill>
-                <a:latin typeface="JetBrains Mono"/>
-                <a:ea typeface="JetBrains Mono"/>
-                <a:cs typeface="JetBrains Mono"/>
-              </a:rPr>
-              <a:t>in</a:t>
-            </a:r>
-            <a:r>
-              <a:rPr sz="1400">
-                <a:solidFill>
-                  <a:srgbClr val="080808"/>
-                </a:solidFill>
-                <a:latin typeface="JetBrains Mono"/>
-                <a:ea typeface="JetBrains Mono"/>
-                <a:cs typeface="JetBrains Mono"/>
-              </a:rPr>
-              <a:t> </a:t>
-            </a:r>
-            <a:r>
-              <a:rPr sz="1400">
-                <a:solidFill>
-                  <a:srgbClr val="1750EB"/>
-                </a:solidFill>
-                <a:latin typeface="JetBrains Mono"/>
-                <a:ea typeface="JetBrains Mono"/>
-                <a:cs typeface="JetBrains Mono"/>
-              </a:rPr>
-              <a:t>range</a:t>
-            </a:r>
-            <a:r>
-              <a:rPr sz="1400">
-                <a:solidFill>
-                  <a:srgbClr val="080808"/>
-                </a:solidFill>
-                <a:latin typeface="JetBrains Mono"/>
-                <a:ea typeface="JetBrains Mono"/>
-                <a:cs typeface="JetBrains Mono"/>
-              </a:rPr>
-              <a:t>(3):</a:t>
-            </a:r>
-            <a:br>
-              <a:rPr sz="1400">
-                <a:solidFill>
-                  <a:srgbClr val="080808"/>
-                </a:solidFill>
-                <a:latin typeface="JetBrains Mono"/>
-                <a:ea typeface="JetBrains Mono"/>
-                <a:cs typeface="JetBrains Mono"/>
-              </a:rPr>
-            </a:br>
-            <a:r>
-              <a:rPr sz="1400">
-                <a:solidFill>
-                  <a:srgbClr val="080808"/>
-                </a:solidFill>
-                <a:latin typeface="JetBrains Mono"/>
-                <a:ea typeface="JetBrains Mono"/>
-                <a:cs typeface="JetBrains Mono"/>
-              </a:rPr>
-              <a:t>    note = </a:t>
-            </a:r>
-            <a:r>
-              <a:rPr sz="1400">
-                <a:solidFill>
-                  <a:srgbClr val="1750EB"/>
-                </a:solidFill>
-                <a:latin typeface="JetBrains Mono"/>
-                <a:ea typeface="JetBrains Mono"/>
-                <a:cs typeface="JetBrains Mono"/>
-              </a:rPr>
-              <a:t>input</a:t>
-            </a:r>
-            <a:r>
-              <a:rPr sz="1400">
-                <a:solidFill>
-                  <a:srgbClr val="080808"/>
-                </a:solidFill>
-                <a:latin typeface="JetBrains Mono"/>
-                <a:ea typeface="JetBrains Mono"/>
-                <a:cs typeface="JetBrains Mono"/>
-              </a:rPr>
-              <a:t>(</a:t>
-            </a:r>
-            <a:r>
-              <a:rPr sz="1400">
-                <a:solidFill>
-                  <a:srgbClr val="067D17"/>
-                </a:solidFill>
-                <a:latin typeface="JetBrains Mono"/>
-                <a:ea typeface="JetBrains Mono"/>
-                <a:cs typeface="JetBrains Mono"/>
-              </a:rPr>
-              <a:t>"Enter a note: "</a:t>
-            </a:r>
-            <a:r>
-              <a:rPr sz="1400">
-                <a:solidFill>
-                  <a:srgbClr val="080808"/>
-                </a:solidFill>
-                <a:latin typeface="JetBrains Mono"/>
-                <a:ea typeface="JetBrains Mono"/>
-                <a:cs typeface="JetBrains Mono"/>
-              </a:rPr>
-              <a:t>)</a:t>
-            </a:r>
-            <a:br>
-              <a:rPr sz="1400">
-                <a:solidFill>
-                  <a:srgbClr val="080808"/>
-                </a:solidFill>
-                <a:latin typeface="JetBrains Mono"/>
-                <a:ea typeface="JetBrains Mono"/>
-                <a:cs typeface="JetBrains Mono"/>
-              </a:rPr>
-            </a:br>
-            <a:r>
-              <a:rPr sz="1400">
-                <a:solidFill>
-                  <a:srgbClr val="080808"/>
-                </a:solidFill>
-                <a:latin typeface="JetBrains Mono"/>
-                <a:ea typeface="JetBrains Mono"/>
-                <a:cs typeface="JetBrains Mono"/>
-              </a:rPr>
-              <a:t>    notes</a:t>
-            </a:r>
-            <a:r>
-              <a:rPr sz="1400">
-                <a:solidFill>
-                  <a:srgbClr val="1750EB"/>
-                </a:solidFill>
-                <a:latin typeface="JetBrains Mono"/>
-                <a:ea typeface="JetBrains Mono"/>
-                <a:cs typeface="JetBrains Mono"/>
-              </a:rPr>
-              <a:t>.append</a:t>
-            </a:r>
-            <a:r>
-              <a:rPr sz="1400">
-                <a:solidFill>
-                  <a:srgbClr val="080808"/>
-                </a:solidFill>
-                <a:latin typeface="JetBrains Mono"/>
-                <a:ea typeface="JetBrains Mono"/>
-                <a:cs typeface="JetBrains Mono"/>
-              </a:rPr>
-              <a:t>(note)</a:t>
-            </a:r>
-            <a:br>
-              <a:rPr sz="1400">
-                <a:solidFill>
-                  <a:srgbClr val="080808"/>
-                </a:solidFill>
-                <a:latin typeface="JetBrains Mono"/>
-                <a:ea typeface="JetBrains Mono"/>
-                <a:cs typeface="JetBrains Mono"/>
-              </a:rPr>
-            </a:br>
-            <a:r>
-              <a:rPr sz="1400">
-                <a:solidFill>
-                  <a:srgbClr val="1750EB"/>
-                </a:solidFill>
-                <a:latin typeface="JetBrains Mono"/>
-                <a:ea typeface="JetBrains Mono"/>
-                <a:cs typeface="JetBrains Mono"/>
-              </a:rPr>
-              <a:t>print</a:t>
-            </a:r>
-            <a:r>
-              <a:rPr sz="1400">
-                <a:solidFill>
-                  <a:srgbClr val="080808"/>
-                </a:solidFill>
-                <a:latin typeface="JetBrains Mono"/>
-                <a:ea typeface="JetBrains Mono"/>
-                <a:cs typeface="JetBrains Mono"/>
-              </a:rPr>
-              <a:t>(</a:t>
-            </a:r>
-            <a:r>
-              <a:rPr sz="1400">
-                <a:solidFill>
-                  <a:srgbClr val="067D17"/>
-                </a:solidFill>
-                <a:latin typeface="JetBrains Mono"/>
-                <a:ea typeface="JetBrains Mono"/>
-                <a:cs typeface="JetBrains Mono"/>
-              </a:rPr>
-              <a:t>"Saved notes:"</a:t>
-            </a:r>
-            <a:r>
-              <a:rPr sz="1400">
-                <a:solidFill>
-                  <a:srgbClr val="080808"/>
-                </a:solidFill>
-                <a:latin typeface="JetBrains Mono"/>
-                <a:ea typeface="JetBrains Mono"/>
-                <a:cs typeface="JetBrains Mono"/>
-              </a:rPr>
-              <a:t>)</a:t>
-            </a:r>
-            <a:br>
-              <a:rPr sz="1400">
-                <a:solidFill>
-                  <a:srgbClr val="080808"/>
-                </a:solidFill>
-                <a:latin typeface="JetBrains Mono"/>
-                <a:ea typeface="JetBrains Mono"/>
-                <a:cs typeface="JetBrains Mono"/>
-              </a:rPr>
-            </a:br>
-            <a:r>
-              <a:rPr sz="1400">
-                <a:solidFill>
-                  <a:srgbClr val="1750EB"/>
-                </a:solidFill>
-                <a:latin typeface="JetBrains Mono"/>
-                <a:ea typeface="JetBrains Mono"/>
-                <a:cs typeface="JetBrains Mono"/>
-              </a:rPr>
-              <a:t>for</a:t>
-            </a:r>
-            <a:r>
-              <a:rPr sz="1400">
-                <a:solidFill>
-                  <a:srgbClr val="080808"/>
-                </a:solidFill>
-                <a:latin typeface="JetBrains Mono"/>
-                <a:ea typeface="JetBrains Mono"/>
-                <a:cs typeface="JetBrains Mono"/>
-              </a:rPr>
               <a:t> note </a:t>
             </a:r>
             <a:r>
               <a:rPr sz="1400">
                 <a:solidFill>
-                  <a:srgbClr val="1750EB"/>
+                  <a:srgbClr val="C45E00"/>
                 </a:solidFill>
                 <a:latin typeface="JetBrains Mono"/>
                 <a:ea typeface="JetBrains Mono"/>
@@ -7481,7 +7481,7 @@
             <a:r>
               <a:rPr sz="2050" b="0">
                 <a:solidFill>
-                  <a:srgbClr val="1750EB"/>
+                  <a:srgbClr val="C45E00"/>
                 </a:solidFill>
                 <a:latin typeface="JetBrains Mono"/>
                 <a:ea typeface="JetBrains Mono"/>
@@ -7864,12 +7864,250 @@
             <a:r>
               <a:rPr sz="1400">
                 <a:solidFill>
+                  <a:srgbClr val="C45E00"/>
+                </a:solidFill>
+                <a:latin typeface="JetBrains Mono"/>
+                <a:ea typeface="JetBrains Mono"/>
+                <a:cs typeface="JetBrains Mono"/>
+              </a:rPr>
+              <a:t>for</a:t>
+            </a:r>
+            <a:r>
+              <a:rPr sz="1400">
+                <a:solidFill>
+                  <a:srgbClr val="080808"/>
+                </a:solidFill>
+                <a:latin typeface="JetBrains Mono"/>
+                <a:ea typeface="JetBrains Mono"/>
+                <a:cs typeface="JetBrains Mono"/>
+              </a:rPr>
+              <a:t> count </a:t>
+            </a:r>
+            <a:r>
+              <a:rPr sz="1400">
+                <a:solidFill>
+                  <a:srgbClr val="C45E00"/>
+                </a:solidFill>
+                <a:latin typeface="JetBrains Mono"/>
+                <a:ea typeface="JetBrains Mono"/>
+                <a:cs typeface="JetBrains Mono"/>
+              </a:rPr>
+              <a:t>in</a:t>
+            </a:r>
+            <a:r>
+              <a:rPr sz="1400">
+                <a:solidFill>
+                  <a:srgbClr val="080808"/>
+                </a:solidFill>
+                <a:latin typeface="JetBrains Mono"/>
+                <a:ea typeface="JetBrains Mono"/>
+                <a:cs typeface="JetBrains Mono"/>
+              </a:rPr>
+              <a:t> </a:t>
+            </a:r>
+            <a:r>
+              <a:rPr sz="1400">
+                <a:solidFill>
                   <a:srgbClr val="1750EB"/>
                 </a:solidFill>
                 <a:latin typeface="JetBrains Mono"/>
                 <a:ea typeface="JetBrains Mono"/>
                 <a:cs typeface="JetBrains Mono"/>
               </a:rPr>
+              <a:t>range</a:t>
+            </a:r>
+            <a:r>
+              <a:rPr sz="1400">
+                <a:solidFill>
+                  <a:srgbClr val="080808"/>
+                </a:solidFill>
+                <a:latin typeface="JetBrains Mono"/>
+                <a:ea typeface="JetBrains Mono"/>
+                <a:cs typeface="JetBrains Mono"/>
+              </a:rPr>
+              <a:t>(3):</a:t>
+            </a:r>
+            <a:br>
+              <a:rPr sz="1400">
+                <a:solidFill>
+                  <a:srgbClr val="080808"/>
+                </a:solidFill>
+                <a:latin typeface="JetBrains Mono"/>
+                <a:ea typeface="JetBrains Mono"/>
+                <a:cs typeface="JetBrains Mono"/>
+              </a:rPr>
+            </a:br>
+            <a:r>
+              <a:rPr sz="1400">
+                <a:solidFill>
+                  <a:srgbClr val="080808"/>
+                </a:solidFill>
+                <a:latin typeface="JetBrains Mono"/>
+                <a:ea typeface="JetBrains Mono"/>
+                <a:cs typeface="JetBrains Mono"/>
+              </a:rPr>
+              <a:t>    note = </a:t>
+            </a:r>
+            <a:r>
+              <a:rPr sz="1400">
+                <a:solidFill>
+                  <a:srgbClr val="1750EB"/>
+                </a:solidFill>
+                <a:latin typeface="JetBrains Mono"/>
+                <a:ea typeface="JetBrains Mono"/>
+                <a:cs typeface="JetBrains Mono"/>
+              </a:rPr>
+              <a:t>input</a:t>
+            </a:r>
+            <a:r>
+              <a:rPr sz="1400">
+                <a:solidFill>
+                  <a:srgbClr val="080808"/>
+                </a:solidFill>
+                <a:latin typeface="JetBrains Mono"/>
+                <a:ea typeface="JetBrains Mono"/>
+                <a:cs typeface="JetBrains Mono"/>
+              </a:rPr>
+              <a:t>(</a:t>
+            </a:r>
+            <a:r>
+              <a:rPr sz="1400">
+                <a:solidFill>
+                  <a:srgbClr val="067D17"/>
+                </a:solidFill>
+                <a:latin typeface="JetBrains Mono"/>
+                <a:ea typeface="JetBrains Mono"/>
+                <a:cs typeface="JetBrains Mono"/>
+              </a:rPr>
+              <a:t>"Enter a note: "</a:t>
+            </a:r>
+            <a:r>
+              <a:rPr sz="1400">
+                <a:solidFill>
+                  <a:srgbClr val="080808"/>
+                </a:solidFill>
+                <a:latin typeface="JetBrains Mono"/>
+                <a:ea typeface="JetBrains Mono"/>
+                <a:cs typeface="JetBrains Mono"/>
+              </a:rPr>
+              <a:t>)</a:t>
+            </a:r>
+            <a:br>
+              <a:rPr sz="1400">
+                <a:solidFill>
+                  <a:srgbClr val="080808"/>
+                </a:solidFill>
+                <a:latin typeface="JetBrains Mono"/>
+                <a:ea typeface="JetBrains Mono"/>
+                <a:cs typeface="JetBrains Mono"/>
+              </a:rPr>
+            </a:br>
+            <a:r>
+              <a:rPr sz="1400">
+                <a:solidFill>
+                  <a:srgbClr val="080808"/>
+                </a:solidFill>
+                <a:latin typeface="JetBrains Mono"/>
+                <a:ea typeface="JetBrains Mono"/>
+                <a:cs typeface="JetBrains Mono"/>
+              </a:rPr>
+              <a:t>    notes</a:t>
+            </a:r>
+            <a:r>
+              <a:rPr sz="1400">
+                <a:solidFill>
+                  <a:srgbClr val="1750EB"/>
+                </a:solidFill>
+                <a:latin typeface="JetBrains Mono"/>
+                <a:ea typeface="JetBrains Mono"/>
+                <a:cs typeface="JetBrains Mono"/>
+              </a:rPr>
+              <a:t>.append</a:t>
+            </a:r>
+            <a:r>
+              <a:rPr sz="1400">
+                <a:solidFill>
+                  <a:srgbClr val="080808"/>
+                </a:solidFill>
+                <a:latin typeface="JetBrains Mono"/>
+                <a:ea typeface="JetBrains Mono"/>
+                <a:cs typeface="JetBrains Mono"/>
+              </a:rPr>
+              <a:t>(note)</a:t>
+            </a:r>
+            <a:br>
+              <a:rPr sz="1400">
+                <a:solidFill>
+                  <a:srgbClr val="080808"/>
+                </a:solidFill>
+                <a:latin typeface="JetBrains Mono"/>
+                <a:ea typeface="JetBrains Mono"/>
+                <a:cs typeface="JetBrains Mono"/>
+              </a:rPr>
+            </a:br>
+            <a:r>
+              <a:rPr sz="1400">
+                <a:solidFill>
+                  <a:srgbClr val="1750EB"/>
+                </a:solidFill>
+                <a:latin typeface="JetBrains Mono"/>
+                <a:ea typeface="JetBrains Mono"/>
+                <a:cs typeface="JetBrains Mono"/>
+              </a:rPr>
+              <a:t>print</a:t>
+            </a:r>
+            <a:r>
+              <a:rPr sz="1400">
+                <a:solidFill>
+                  <a:srgbClr val="080808"/>
+                </a:solidFill>
+                <a:latin typeface="JetBrains Mono"/>
+                <a:ea typeface="JetBrains Mono"/>
+                <a:cs typeface="JetBrains Mono"/>
+              </a:rPr>
+              <a:t>(</a:t>
+            </a:r>
+            <a:r>
+              <a:rPr sz="1400">
+                <a:solidFill>
+                  <a:srgbClr val="067D17"/>
+                </a:solidFill>
+                <a:latin typeface="JetBrains Mono"/>
+                <a:ea typeface="JetBrains Mono"/>
+                <a:cs typeface="JetBrains Mono"/>
+              </a:rPr>
+              <a:t>"Saved notes:"</a:t>
+            </a:r>
+            <a:r>
+              <a:rPr sz="1400">
+                <a:solidFill>
+                  <a:srgbClr val="080808"/>
+                </a:solidFill>
+                <a:latin typeface="JetBrains Mono"/>
+                <a:ea typeface="JetBrains Mono"/>
+                <a:cs typeface="JetBrains Mono"/>
+              </a:rPr>
+              <a:t>)</a:t>
+            </a:r>
+            <a:br>
+              <a:rPr sz="1400">
+                <a:solidFill>
+                  <a:srgbClr val="080808"/>
+                </a:solidFill>
+                <a:latin typeface="JetBrains Mono"/>
+                <a:ea typeface="JetBrains Mono"/>
+                <a:cs typeface="JetBrains Mono"/>
+              </a:rPr>
+            </a:br>
+            <a:r>
+              <a:rPr sz="1400">
+                <a:solidFill>
+                  <a:srgbClr val="C45E00"/>
+                </a:solidFill>
+                <a:latin typeface="JetBrains Mono"/>
+                <a:ea typeface="JetBrains Mono"/>
+                <a:cs typeface="JetBrains Mono"/>
+              </a:rPr>
               <a:t>for</a:t>
             </a:r>
             <a:r>
@@ -7881,250 +8119,12 @@
                 <a:ea typeface="JetBrains Mono"/>
                 <a:cs typeface="JetBrains Mono"/>
               </a:rPr>
-              <a:t> count </a:t>
-            </a:r>
-            <a:r>
-              <a:rPr sz="1400">
-                <a:solidFill>
-                  <a:srgbClr val="1750EB"/>
-                </a:solidFill>
-                <a:latin typeface="JetBrains Mono"/>
-                <a:ea typeface="JetBrains Mono"/>
-                <a:cs typeface="JetBrains Mono"/>
-              </a:rPr>
-              <a:t>in</a:t>
-            </a:r>
-            <a:r>
-              <a:rPr sz="1400">
-                <a:solidFill>
-                  <a:srgbClr val="080808"/>
-                </a:solidFill>
-                <a:latin typeface="JetBrains Mono"/>
-                <a:ea typeface="JetBrains Mono"/>
-                <a:cs typeface="JetBrains Mono"/>
-              </a:rPr>
-              <a:t> </a:t>
-            </a:r>
-            <a:r>
-              <a:rPr sz="1400">
-                <a:solidFill>
-                  <a:srgbClr val="1750EB"/>
-                </a:solidFill>
-                <a:latin typeface="JetBrains Mono"/>
-                <a:ea typeface="JetBrains Mono"/>
-                <a:cs typeface="JetBrains Mono"/>
-              </a:rPr>
-              <a:t>range</a:t>
-            </a:r>
-            <a:r>
-              <a:rPr sz="1400">
-                <a:solidFill>
-                  <a:srgbClr val="080808"/>
-                </a:solidFill>
-                <a:latin typeface="JetBrains Mono"/>
-                <a:ea typeface="JetBrains Mono"/>
-                <a:cs typeface="JetBrains Mono"/>
-              </a:rPr>
-              <a:t>(3):</a:t>
-            </a:r>
-            <a:br>
-              <a:rPr sz="1400">
-                <a:solidFill>
-                  <a:srgbClr val="080808"/>
-                </a:solidFill>
-                <a:latin typeface="JetBrains Mono"/>
-                <a:ea typeface="JetBrains Mono"/>
-                <a:cs typeface="JetBrains Mono"/>
-              </a:rPr>
-            </a:br>
-            <a:r>
-              <a:rPr sz="1400">
-                <a:solidFill>
-                  <a:srgbClr val="080808"/>
-                </a:solidFill>
-                <a:latin typeface="JetBrains Mono"/>
-                <a:ea typeface="JetBrains Mono"/>
-                <a:cs typeface="JetBrains Mono"/>
-              </a:rPr>
-              <a:t>    note = </a:t>
-            </a:r>
-            <a:r>
-              <a:rPr sz="1400">
-                <a:solidFill>
-                  <a:srgbClr val="1750EB"/>
-                </a:solidFill>
-                <a:latin typeface="JetBrains Mono"/>
-                <a:ea typeface="JetBrains Mono"/>
-                <a:cs typeface="JetBrains Mono"/>
-              </a:rPr>
-              <a:t>input</a:t>
-            </a:r>
-            <a:r>
-              <a:rPr sz="1400">
-                <a:solidFill>
-                  <a:srgbClr val="080808"/>
-                </a:solidFill>
-                <a:latin typeface="JetBrains Mono"/>
-                <a:ea typeface="JetBrains Mono"/>
-                <a:cs typeface="JetBrains Mono"/>
-              </a:rPr>
-              <a:t>(</a:t>
-            </a:r>
-            <a:r>
-              <a:rPr sz="1400">
-                <a:solidFill>
-                  <a:srgbClr val="067D17"/>
-                </a:solidFill>
-                <a:latin typeface="JetBrains Mono"/>
-                <a:ea typeface="JetBrains Mono"/>
-                <a:cs typeface="JetBrains Mono"/>
-              </a:rPr>
-              <a:t>"Enter a note: "</a:t>
-            </a:r>
-            <a:r>
-              <a:rPr sz="1400">
-                <a:solidFill>
-                  <a:srgbClr val="080808"/>
-                </a:solidFill>
-                <a:latin typeface="JetBrains Mono"/>
-                <a:ea typeface="JetBrains Mono"/>
-                <a:cs typeface="JetBrains Mono"/>
-              </a:rPr>
-              <a:t>)</a:t>
-            </a:r>
-            <a:br>
-              <a:rPr sz="1400">
-                <a:solidFill>
-                  <a:srgbClr val="080808"/>
-                </a:solidFill>
-                <a:latin typeface="JetBrains Mono"/>
-                <a:ea typeface="JetBrains Mono"/>
-                <a:cs typeface="JetBrains Mono"/>
-              </a:rPr>
-            </a:br>
-            <a:r>
-              <a:rPr sz="1400">
-                <a:solidFill>
-                  <a:srgbClr val="080808"/>
-                </a:solidFill>
-                <a:latin typeface="JetBrains Mono"/>
-                <a:ea typeface="JetBrains Mono"/>
-                <a:cs typeface="JetBrains Mono"/>
-              </a:rPr>
-              <a:t>    notes</a:t>
-            </a:r>
-            <a:r>
-              <a:rPr sz="1400">
-                <a:solidFill>
-                  <a:srgbClr val="1750EB"/>
-                </a:solidFill>
-                <a:latin typeface="JetBrains Mono"/>
-                <a:ea typeface="JetBrains Mono"/>
-                <a:cs typeface="JetBrains Mono"/>
-              </a:rPr>
-              <a:t>.append</a:t>
-            </a:r>
-            <a:r>
-              <a:rPr sz="1400">
-                <a:solidFill>
-                  <a:srgbClr val="080808"/>
-                </a:solidFill>
-                <a:latin typeface="JetBrains Mono"/>
-                <a:ea typeface="JetBrains Mono"/>
-                <a:cs typeface="JetBrains Mono"/>
-              </a:rPr>
-              <a:t>(note)</a:t>
-            </a:r>
-            <a:br>
-              <a:rPr sz="1400">
-                <a:solidFill>
-                  <a:srgbClr val="080808"/>
-                </a:solidFill>
-                <a:latin typeface="JetBrains Mono"/>
-                <a:ea typeface="JetBrains Mono"/>
-                <a:cs typeface="JetBrains Mono"/>
-              </a:rPr>
-            </a:br>
-            <a:r>
-              <a:rPr sz="1400">
-                <a:solidFill>
-                  <a:srgbClr val="1750EB"/>
-                </a:solidFill>
-                <a:latin typeface="JetBrains Mono"/>
-                <a:ea typeface="JetBrains Mono"/>
-                <a:cs typeface="JetBrains Mono"/>
-              </a:rPr>
-              <a:t>print</a:t>
-            </a:r>
-            <a:r>
-              <a:rPr sz="1400">
-                <a:solidFill>
-                  <a:srgbClr val="080808"/>
-                </a:solidFill>
-                <a:latin typeface="JetBrains Mono"/>
-                <a:ea typeface="JetBrains Mono"/>
-                <a:cs typeface="JetBrains Mono"/>
-              </a:rPr>
-              <a:t>(</a:t>
-            </a:r>
-            <a:r>
-              <a:rPr sz="1400">
-                <a:solidFill>
-                  <a:srgbClr val="067D17"/>
-                </a:solidFill>
-                <a:latin typeface="JetBrains Mono"/>
-                <a:ea typeface="JetBrains Mono"/>
-                <a:cs typeface="JetBrains Mono"/>
-              </a:rPr>
-              <a:t>"Saved notes:"</a:t>
-            </a:r>
-            <a:r>
-              <a:rPr sz="1400">
-                <a:solidFill>
-                  <a:srgbClr val="080808"/>
-                </a:solidFill>
-                <a:latin typeface="JetBrains Mono"/>
-                <a:ea typeface="JetBrains Mono"/>
-                <a:cs typeface="JetBrains Mono"/>
-              </a:rPr>
-              <a:t>)</a:t>
-            </a:r>
-            <a:br>
-              <a:rPr sz="1400">
-                <a:solidFill>
-                  <a:srgbClr val="080808"/>
-                </a:solidFill>
-                <a:latin typeface="JetBrains Mono"/>
-                <a:ea typeface="JetBrains Mono"/>
-                <a:cs typeface="JetBrains Mono"/>
-              </a:rPr>
-            </a:br>
-            <a:r>
-              <a:rPr sz="1400">
-                <a:solidFill>
-                  <a:srgbClr val="1750EB"/>
-                </a:solidFill>
-                <a:latin typeface="JetBrains Mono"/>
-                <a:ea typeface="JetBrains Mono"/>
-                <a:cs typeface="JetBrains Mono"/>
-              </a:rPr>
-              <a:t>for</a:t>
-            </a:r>
-            <a:r>
-              <a:rPr sz="1400">
-                <a:solidFill>
-                  <a:srgbClr val="080808"/>
-                </a:solidFill>
-                <a:latin typeface="JetBrains Mono"/>
-                <a:ea typeface="JetBrains Mono"/>
-                <a:cs typeface="JetBrains Mono"/>
-              </a:rPr>
               <a:t> note </a:t>
             </a:r>
             <a:r>
               <a:rPr sz="1400">
                 <a:solidFill>
-                  <a:srgbClr val="1750EB"/>
+                  <a:srgbClr val="C45E00"/>
                 </a:solidFill>
                 <a:latin typeface="JetBrains Mono"/>
                 <a:ea typeface="JetBrains Mono"/>
@@ -8293,7 +8293,7 @@
             <a:r>
               <a:rPr sz="2050" b="0">
                 <a:solidFill>
-                  <a:srgbClr val="1750EB"/>
+                  <a:srgbClr val="C45E00"/>
                 </a:solidFill>
                 <a:latin typeface="JetBrains Mono"/>
                 <a:ea typeface="JetBrains Mono"/>
@@ -8315,7 +8315,7 @@
             <a:r>
               <a:rPr sz="2050" b="0">
                 <a:solidFill>
-                  <a:srgbClr val="1750EB"/>
+                  <a:srgbClr val="C45E00"/>
                 </a:solidFill>
                 <a:latin typeface="JetBrains Mono"/>
                 <a:ea typeface="JetBrains Mono"/>
@@ -8786,12 +8786,250 @@
             <a:r>
               <a:rPr sz="1400">
                 <a:solidFill>
+                  <a:srgbClr val="C45E00"/>
+                </a:solidFill>
+                <a:latin typeface="JetBrains Mono"/>
+                <a:ea typeface="JetBrains Mono"/>
+                <a:cs typeface="JetBrains Mono"/>
+              </a:rPr>
+              <a:t>for</a:t>
+            </a:r>
+            <a:r>
+              <a:rPr sz="1400">
+                <a:solidFill>
+                  <a:srgbClr val="080808"/>
+                </a:solidFill>
+                <a:latin typeface="JetBrains Mono"/>
+                <a:ea typeface="JetBrains Mono"/>
+                <a:cs typeface="JetBrains Mono"/>
+              </a:rPr>
+              <a:t> count </a:t>
+            </a:r>
+            <a:r>
+              <a:rPr sz="1400">
+                <a:solidFill>
+                  <a:srgbClr val="C45E00"/>
+                </a:solidFill>
+                <a:latin typeface="JetBrains Mono"/>
+                <a:ea typeface="JetBrains Mono"/>
+                <a:cs typeface="JetBrains Mono"/>
+              </a:rPr>
+              <a:t>in</a:t>
+            </a:r>
+            <a:r>
+              <a:rPr sz="1400">
+                <a:solidFill>
+                  <a:srgbClr val="080808"/>
+                </a:solidFill>
+                <a:latin typeface="JetBrains Mono"/>
+                <a:ea typeface="JetBrains Mono"/>
+                <a:cs typeface="JetBrains Mono"/>
+              </a:rPr>
+              <a:t> </a:t>
+            </a:r>
+            <a:r>
+              <a:rPr sz="1400">
+                <a:solidFill>
                   <a:srgbClr val="1750EB"/>
                 </a:solidFill>
                 <a:latin typeface="JetBrains Mono"/>
                 <a:ea typeface="JetBrains Mono"/>
                 <a:cs typeface="JetBrains Mono"/>
               </a:rPr>
+              <a:t>range</a:t>
+            </a:r>
+            <a:r>
+              <a:rPr sz="1400">
+                <a:solidFill>
+                  <a:srgbClr val="080808"/>
+                </a:solidFill>
+                <a:latin typeface="JetBrains Mono"/>
+                <a:ea typeface="JetBrains Mono"/>
+                <a:cs typeface="JetBrains Mono"/>
+              </a:rPr>
+              <a:t>(3):</a:t>
+            </a:r>
+            <a:br>
+              <a:rPr sz="1400">
+                <a:solidFill>
+                  <a:srgbClr val="080808"/>
+                </a:solidFill>
+                <a:latin typeface="JetBrains Mono"/>
+                <a:ea typeface="JetBrains Mono"/>
+                <a:cs typeface="JetBrains Mono"/>
+              </a:rPr>
+            </a:br>
+            <a:r>
+              <a:rPr sz="1400">
+                <a:solidFill>
+                  <a:srgbClr val="080808"/>
+                </a:solidFill>
+                <a:latin typeface="JetBrains Mono"/>
+                <a:ea typeface="JetBrains Mono"/>
+                <a:cs typeface="JetBrains Mono"/>
+              </a:rPr>
+              <a:t>    note = </a:t>
+            </a:r>
+            <a:r>
+              <a:rPr sz="1400">
+                <a:solidFill>
+                  <a:srgbClr val="1750EB"/>
+                </a:solidFill>
+                <a:latin typeface="JetBrains Mono"/>
+                <a:ea typeface="JetBrains Mono"/>
+                <a:cs typeface="JetBrains Mono"/>
+              </a:rPr>
+              <a:t>input</a:t>
+            </a:r>
+            <a:r>
+              <a:rPr sz="1400">
+                <a:solidFill>
+                  <a:srgbClr val="080808"/>
+                </a:solidFill>
+                <a:latin typeface="JetBrains Mono"/>
+                <a:ea typeface="JetBrains Mono"/>
+                <a:cs typeface="JetBrains Mono"/>
+              </a:rPr>
+              <a:t>(</a:t>
+            </a:r>
+            <a:r>
+              <a:rPr sz="1400">
+                <a:solidFill>
+                  <a:srgbClr val="067D17"/>
+                </a:solidFill>
+                <a:latin typeface="JetBrains Mono"/>
+                <a:ea typeface="JetBrains Mono"/>
+                <a:cs typeface="JetBrains Mono"/>
+              </a:rPr>
+              <a:t>"Enter a note: "</a:t>
+            </a:r>
+            <a:r>
+              <a:rPr sz="1400">
+                <a:solidFill>
+                  <a:srgbClr val="080808"/>
+                </a:solidFill>
+                <a:latin typeface="JetBrains Mono"/>
+                <a:ea typeface="JetBrains Mono"/>
+                <a:cs typeface="JetBrains Mono"/>
+              </a:rPr>
+              <a:t>)</a:t>
+            </a:r>
+            <a:br>
+              <a:rPr sz="1400">
+                <a:solidFill>
+                  <a:srgbClr val="080808"/>
+                </a:solidFill>
+                <a:latin typeface="JetBrains Mono"/>
+                <a:ea typeface="JetBrains Mono"/>
+                <a:cs typeface="JetBrains Mono"/>
+              </a:rPr>
+            </a:br>
+            <a:r>
+              <a:rPr sz="1400">
+                <a:solidFill>
+                  <a:srgbClr val="080808"/>
+                </a:solidFill>
+                <a:latin typeface="JetBrains Mono"/>
+                <a:ea typeface="JetBrains Mono"/>
+                <a:cs typeface="JetBrains Mono"/>
+              </a:rPr>
+              <a:t>    notes</a:t>
+            </a:r>
+            <a:r>
+              <a:rPr sz="1400">
+                <a:solidFill>
+                  <a:srgbClr val="1750EB"/>
+                </a:solidFill>
+                <a:latin typeface="JetBrains Mono"/>
+                <a:ea typeface="JetBrains Mono"/>
+                <a:cs typeface="JetBrains Mono"/>
+              </a:rPr>
+              <a:t>.append</a:t>
+            </a:r>
+            <a:r>
+              <a:rPr sz="1400">
+                <a:solidFill>
+                  <a:srgbClr val="080808"/>
+                </a:solidFill>
+                <a:latin typeface="JetBrains Mono"/>
+                <a:ea typeface="JetBrains Mono"/>
+                <a:cs typeface="JetBrains Mono"/>
+              </a:rPr>
+              <a:t>(note)</a:t>
+            </a:r>
+            <a:br>
+              <a:rPr sz="1400">
+                <a:solidFill>
+                  <a:srgbClr val="080808"/>
+                </a:solidFill>
+                <a:latin typeface="JetBrains Mono"/>
+                <a:ea typeface="JetBrains Mono"/>
+                <a:cs typeface="JetBrains Mono"/>
+              </a:rPr>
+            </a:br>
+            <a:r>
+              <a:rPr sz="1400">
+                <a:solidFill>
+                  <a:srgbClr val="1750EB"/>
+                </a:solidFill>
+                <a:latin typeface="JetBrains Mono"/>
+                <a:ea typeface="JetBrains Mono"/>
+                <a:cs typeface="JetBrains Mono"/>
+              </a:rPr>
+              <a:t>print</a:t>
+            </a:r>
+            <a:r>
+              <a:rPr sz="1400">
+                <a:solidFill>
+                  <a:srgbClr val="080808"/>
+                </a:solidFill>
+                <a:latin typeface="JetBrains Mono"/>
+                <a:ea typeface="JetBrains Mono"/>
+                <a:cs typeface="JetBrains Mono"/>
+              </a:rPr>
+              <a:t>(</a:t>
+            </a:r>
+            <a:r>
+              <a:rPr sz="1400">
+                <a:solidFill>
+                  <a:srgbClr val="067D17"/>
+                </a:solidFill>
+                <a:latin typeface="JetBrains Mono"/>
+                <a:ea typeface="JetBrains Mono"/>
+                <a:cs typeface="JetBrains Mono"/>
+              </a:rPr>
+              <a:t>"Saved notes:"</a:t>
+            </a:r>
+            <a:r>
+              <a:rPr sz="1400">
+                <a:solidFill>
+                  <a:srgbClr val="080808"/>
+                </a:solidFill>
+                <a:latin typeface="JetBrains Mono"/>
+                <a:ea typeface="JetBrains Mono"/>
+                <a:cs typeface="JetBrains Mono"/>
+              </a:rPr>
+              <a:t>)</a:t>
+            </a:r>
+            <a:br>
+              <a:rPr sz="1400">
+                <a:solidFill>
+                  <a:srgbClr val="080808"/>
+                </a:solidFill>
+                <a:latin typeface="JetBrains Mono"/>
+                <a:ea typeface="JetBrains Mono"/>
+                <a:cs typeface="JetBrains Mono"/>
+              </a:rPr>
+            </a:br>
+            <a:r>
+              <a:rPr sz="1400">
+                <a:solidFill>
+                  <a:srgbClr val="C45E00"/>
+                </a:solidFill>
+                <a:latin typeface="JetBrains Mono"/>
+                <a:ea typeface="JetBrains Mono"/>
+                <a:cs typeface="JetBrains Mono"/>
+              </a:rPr>
               <a:t>for</a:t>
             </a:r>
             <a:r>
@@ -8803,250 +9041,12 @@
                 <a:ea typeface="JetBrains Mono"/>
                 <a:cs typeface="JetBrains Mono"/>
               </a:rPr>
-              <a:t> count </a:t>
-            </a:r>
-            <a:r>
-              <a:rPr sz="1400">
-                <a:solidFill>
-                  <a:srgbClr val="1750EB"/>
-                </a:solidFill>
-                <a:latin typeface="JetBrains Mono"/>
-                <a:ea typeface="JetBrains Mono"/>
-                <a:cs typeface="JetBrains Mono"/>
-              </a:rPr>
-              <a:t>in</a:t>
-            </a:r>
-            <a:r>
-              <a:rPr sz="1400">
-                <a:solidFill>
-                  <a:srgbClr val="080808"/>
-                </a:solidFill>
-                <a:latin typeface="JetBrains Mono"/>
-                <a:ea typeface="JetBrains Mono"/>
-                <a:cs typeface="JetBrains Mono"/>
-              </a:rPr>
-              <a:t> </a:t>
-            </a:r>
-            <a:r>
-              <a:rPr sz="1400">
-                <a:solidFill>
-                  <a:srgbClr val="1750EB"/>
-                </a:solidFill>
-                <a:latin typeface="JetBrains Mono"/>
-                <a:ea typeface="JetBrains Mono"/>
-                <a:cs typeface="JetBrains Mono"/>
-              </a:rPr>
-              <a:t>range</a:t>
-            </a:r>
-            <a:r>
-              <a:rPr sz="1400">
-                <a:solidFill>
-                  <a:srgbClr val="080808"/>
-                </a:solidFill>
-                <a:latin typeface="JetBrains Mono"/>
-                <a:ea typeface="JetBrains Mono"/>
-                <a:cs typeface="JetBrains Mono"/>
-              </a:rPr>
-              <a:t>(3):</a:t>
-            </a:r>
-            <a:br>
-              <a:rPr sz="1400">
-                <a:solidFill>
-                  <a:srgbClr val="080808"/>
-                </a:solidFill>
-                <a:latin typeface="JetBrains Mono"/>
-                <a:ea typeface="JetBrains Mono"/>
-                <a:cs typeface="JetBrains Mono"/>
-              </a:rPr>
-            </a:br>
-            <a:r>
-              <a:rPr sz="1400">
-                <a:solidFill>
-                  <a:srgbClr val="080808"/>
-                </a:solidFill>
-                <a:latin typeface="JetBrains Mono"/>
-                <a:ea typeface="JetBrains Mono"/>
-                <a:cs typeface="JetBrains Mono"/>
-              </a:rPr>
-              <a:t>    note = </a:t>
-            </a:r>
-            <a:r>
-              <a:rPr sz="1400">
-                <a:solidFill>
-                  <a:srgbClr val="1750EB"/>
-                </a:solidFill>
-                <a:latin typeface="JetBrains Mono"/>
-                <a:ea typeface="JetBrains Mono"/>
-                <a:cs typeface="JetBrains Mono"/>
-              </a:rPr>
-              <a:t>input</a:t>
-            </a:r>
-            <a:r>
-              <a:rPr sz="1400">
-                <a:solidFill>
-                  <a:srgbClr val="080808"/>
-                </a:solidFill>
-                <a:latin typeface="JetBrains Mono"/>
-                <a:ea typeface="JetBrains Mono"/>
-                <a:cs typeface="JetBrains Mono"/>
-              </a:rPr>
-              <a:t>(</a:t>
-            </a:r>
-            <a:r>
-              <a:rPr sz="1400">
-                <a:solidFill>
-                  <a:srgbClr val="067D17"/>
-                </a:solidFill>
-                <a:latin typeface="JetBrains Mono"/>
-                <a:ea typeface="JetBrains Mono"/>
-                <a:cs typeface="JetBrains Mono"/>
-              </a:rPr>
-              <a:t>"Enter a note: "</a:t>
-            </a:r>
-            <a:r>
-              <a:rPr sz="1400">
-                <a:solidFill>
-                  <a:srgbClr val="080808"/>
-                </a:solidFill>
-                <a:latin typeface="JetBrains Mono"/>
-                <a:ea typeface="JetBrains Mono"/>
-                <a:cs typeface="JetBrains Mono"/>
-              </a:rPr>
-              <a:t>)</a:t>
-            </a:r>
-            <a:br>
-              <a:rPr sz="1400">
-                <a:solidFill>
-                  <a:srgbClr val="080808"/>
-                </a:solidFill>
-                <a:latin typeface="JetBrains Mono"/>
-                <a:ea typeface="JetBrains Mono"/>
-                <a:cs typeface="JetBrains Mono"/>
-              </a:rPr>
-            </a:br>
-            <a:r>
-              <a:rPr sz="1400">
-                <a:solidFill>
-                  <a:srgbClr val="080808"/>
-                </a:solidFill>
-                <a:latin typeface="JetBrains Mono"/>
-                <a:ea typeface="JetBrains Mono"/>
-                <a:cs typeface="JetBrains Mono"/>
-              </a:rPr>
-              <a:t>    notes</a:t>
-            </a:r>
-            <a:r>
-              <a:rPr sz="1400">
-                <a:solidFill>
-                  <a:srgbClr val="1750EB"/>
-                </a:solidFill>
-                <a:latin typeface="JetBrains Mono"/>
-                <a:ea typeface="JetBrains Mono"/>
-                <a:cs typeface="JetBrains Mono"/>
-              </a:rPr>
-              <a:t>.append</a:t>
-            </a:r>
-            <a:r>
-              <a:rPr sz="1400">
-                <a:solidFill>
-                  <a:srgbClr val="080808"/>
-                </a:solidFill>
-                <a:latin typeface="JetBrains Mono"/>
-                <a:ea typeface="JetBrains Mono"/>
-                <a:cs typeface="JetBrains Mono"/>
-              </a:rPr>
-              <a:t>(note)</a:t>
-            </a:r>
-            <a:br>
-              <a:rPr sz="1400">
-                <a:solidFill>
-                  <a:srgbClr val="080808"/>
-                </a:solidFill>
-                <a:latin typeface="JetBrains Mono"/>
-                <a:ea typeface="JetBrains Mono"/>
-                <a:cs typeface="JetBrains Mono"/>
-              </a:rPr>
-            </a:br>
-            <a:r>
-              <a:rPr sz="1400">
-                <a:solidFill>
-                  <a:srgbClr val="1750EB"/>
-                </a:solidFill>
-                <a:latin typeface="JetBrains Mono"/>
-                <a:ea typeface="JetBrains Mono"/>
-                <a:cs typeface="JetBrains Mono"/>
-              </a:rPr>
-              <a:t>print</a:t>
-            </a:r>
-            <a:r>
-              <a:rPr sz="1400">
-                <a:solidFill>
-                  <a:srgbClr val="080808"/>
-                </a:solidFill>
-                <a:latin typeface="JetBrains Mono"/>
-                <a:ea typeface="JetBrains Mono"/>
-                <a:cs typeface="JetBrains Mono"/>
-              </a:rPr>
-              <a:t>(</a:t>
-            </a:r>
-            <a:r>
-              <a:rPr sz="1400">
-                <a:solidFill>
-                  <a:srgbClr val="067D17"/>
-                </a:solidFill>
-                <a:latin typeface="JetBrains Mono"/>
-                <a:ea typeface="JetBrains Mono"/>
-                <a:cs typeface="JetBrains Mono"/>
-              </a:rPr>
-              <a:t>"Saved notes:"</a:t>
-            </a:r>
-            <a:r>
-              <a:rPr sz="1400">
-                <a:solidFill>
-                  <a:srgbClr val="080808"/>
-                </a:solidFill>
-                <a:latin typeface="JetBrains Mono"/>
-                <a:ea typeface="JetBrains Mono"/>
-                <a:cs typeface="JetBrains Mono"/>
-              </a:rPr>
-              <a:t>)</a:t>
-            </a:r>
-            <a:br>
-              <a:rPr sz="1400">
-                <a:solidFill>
-                  <a:srgbClr val="080808"/>
-                </a:solidFill>
-                <a:latin typeface="JetBrains Mono"/>
-                <a:ea typeface="JetBrains Mono"/>
-                <a:cs typeface="JetBrains Mono"/>
-              </a:rPr>
-            </a:br>
-            <a:r>
-              <a:rPr sz="1400">
-                <a:solidFill>
-                  <a:srgbClr val="1750EB"/>
-                </a:solidFill>
-                <a:latin typeface="JetBrains Mono"/>
-                <a:ea typeface="JetBrains Mono"/>
-                <a:cs typeface="JetBrains Mono"/>
-              </a:rPr>
-              <a:t>for</a:t>
-            </a:r>
-            <a:r>
-              <a:rPr sz="1400">
-                <a:solidFill>
-                  <a:srgbClr val="080808"/>
-                </a:solidFill>
-                <a:latin typeface="JetBrains Mono"/>
-                <a:ea typeface="JetBrains Mono"/>
-                <a:cs typeface="JetBrains Mono"/>
-              </a:rPr>
               <a:t> note </a:t>
             </a:r>
             <a:r>
               <a:rPr sz="1400">
                 <a:solidFill>
-                  <a:srgbClr val="1750EB"/>
+                  <a:srgbClr val="C45E00"/>
                 </a:solidFill>
                 <a:latin typeface="JetBrains Mono"/>
                 <a:ea typeface="JetBrains Mono"/>
@@ -9262,7 +9262,7 @@
             <a:r>
               <a:rPr sz="2050" b="0">
                 <a:solidFill>
-                  <a:srgbClr val="1750EB"/>
+                  <a:srgbClr val="C45E00"/>
                 </a:solidFill>
                 <a:latin typeface="JetBrains Mono"/>
                 <a:ea typeface="JetBrains Mono"/>
@@ -9620,12 +9620,250 @@
             <a:r>
               <a:rPr sz="1400">
                 <a:solidFill>
+                  <a:srgbClr val="C45E00"/>
+                </a:solidFill>
+                <a:latin typeface="JetBrains Mono"/>
+                <a:ea typeface="JetBrains Mono"/>
+                <a:cs typeface="JetBrains Mono"/>
+              </a:rPr>
+              <a:t>for</a:t>
+            </a:r>
+            <a:r>
+              <a:rPr sz="1400">
+                <a:solidFill>
+                  <a:srgbClr val="080808"/>
+                </a:solidFill>
+                <a:latin typeface="JetBrains Mono"/>
+                <a:ea typeface="JetBrains Mono"/>
+                <a:cs typeface="JetBrains Mono"/>
+              </a:rPr>
+              <a:t> count </a:t>
+            </a:r>
+            <a:r>
+              <a:rPr sz="1400">
+                <a:solidFill>
+                  <a:srgbClr val="C45E00"/>
+                </a:solidFill>
+                <a:latin typeface="JetBrains Mono"/>
+                <a:ea typeface="JetBrains Mono"/>
+                <a:cs typeface="JetBrains Mono"/>
+              </a:rPr>
+              <a:t>in</a:t>
+            </a:r>
+            <a:r>
+              <a:rPr sz="1400">
+                <a:solidFill>
+                  <a:srgbClr val="080808"/>
+                </a:solidFill>
+                <a:latin typeface="JetBrains Mono"/>
+                <a:ea typeface="JetBrains Mono"/>
+                <a:cs typeface="JetBrains Mono"/>
+              </a:rPr>
+              <a:t> </a:t>
+            </a:r>
+            <a:r>
+              <a:rPr sz="1400">
+                <a:solidFill>
                   <a:srgbClr val="1750EB"/>
                 </a:solidFill>
                 <a:latin typeface="JetBrains Mono"/>
                 <a:ea typeface="JetBrains Mono"/>
                 <a:cs typeface="JetBrains Mono"/>
               </a:rPr>
+              <a:t>range</a:t>
+            </a:r>
+            <a:r>
+              <a:rPr sz="1400">
+                <a:solidFill>
+                  <a:srgbClr val="080808"/>
+                </a:solidFill>
+                <a:latin typeface="JetBrains Mono"/>
+                <a:ea typeface="JetBrains Mono"/>
+                <a:cs typeface="JetBrains Mono"/>
+              </a:rPr>
+              <a:t>(3):</a:t>
+            </a:r>
+            <a:br>
+              <a:rPr sz="1400">
+                <a:solidFill>
+                  <a:srgbClr val="080808"/>
+                </a:solidFill>
+                <a:latin typeface="JetBrains Mono"/>
+                <a:ea typeface="JetBrains Mono"/>
+                <a:cs typeface="JetBrains Mono"/>
+              </a:rPr>
+            </a:br>
+            <a:r>
+              <a:rPr sz="1400">
+                <a:solidFill>
+                  <a:srgbClr val="080808"/>
+                </a:solidFill>
+                <a:latin typeface="JetBrains Mono"/>
+                <a:ea typeface="JetBrains Mono"/>
+                <a:cs typeface="JetBrains Mono"/>
+              </a:rPr>
+              <a:t>    note = </a:t>
+            </a:r>
+            <a:r>
+              <a:rPr sz="1400">
+                <a:solidFill>
+                  <a:srgbClr val="1750EB"/>
+                </a:solidFill>
+                <a:latin typeface="JetBrains Mono"/>
+                <a:ea typeface="JetBrains Mono"/>
+                <a:cs typeface="JetBrains Mono"/>
+              </a:rPr>
+              <a:t>input</a:t>
+            </a:r>
+            <a:r>
+              <a:rPr sz="1400">
+                <a:solidFill>
+                  <a:srgbClr val="080808"/>
+                </a:solidFill>
+                <a:latin typeface="JetBrains Mono"/>
+                <a:ea typeface="JetBrains Mono"/>
+                <a:cs typeface="JetBrains Mono"/>
+              </a:rPr>
+              <a:t>(</a:t>
+            </a:r>
+            <a:r>
+              <a:rPr sz="1400">
+                <a:solidFill>
+                  <a:srgbClr val="067D17"/>
+                </a:solidFill>
+                <a:latin typeface="JetBrains Mono"/>
+                <a:ea typeface="JetBrains Mono"/>
+                <a:cs typeface="JetBrains Mono"/>
+              </a:rPr>
+              <a:t>"Enter a note: "</a:t>
+            </a:r>
+            <a:r>
+              <a:rPr sz="1400">
+                <a:solidFill>
+                  <a:srgbClr val="080808"/>
+                </a:solidFill>
+                <a:latin typeface="JetBrains Mono"/>
+                <a:ea typeface="JetBrains Mono"/>
+                <a:cs typeface="JetBrains Mono"/>
+              </a:rPr>
+              <a:t>)</a:t>
+            </a:r>
+            <a:br>
+              <a:rPr sz="1400">
+                <a:solidFill>
+                  <a:srgbClr val="080808"/>
+                </a:solidFill>
+                <a:latin typeface="JetBrains Mono"/>
+                <a:ea typeface="JetBrains Mono"/>
+                <a:cs typeface="JetBrains Mono"/>
+              </a:rPr>
+            </a:br>
+            <a:r>
+              <a:rPr sz="1400">
+                <a:solidFill>
+                  <a:srgbClr val="080808"/>
+                </a:solidFill>
+                <a:latin typeface="JetBrains Mono"/>
+                <a:ea typeface="JetBrains Mono"/>
+                <a:cs typeface="JetBrains Mono"/>
+              </a:rPr>
+              <a:t>    notes</a:t>
+            </a:r>
+            <a:r>
+              <a:rPr sz="1400">
+                <a:solidFill>
+                  <a:srgbClr val="1750EB"/>
+                </a:solidFill>
+                <a:latin typeface="JetBrains Mono"/>
+                <a:ea typeface="JetBrains Mono"/>
+                <a:cs typeface="JetBrains Mono"/>
+              </a:rPr>
+              <a:t>.append</a:t>
+            </a:r>
+            <a:r>
+              <a:rPr sz="1400">
+                <a:solidFill>
+                  <a:srgbClr val="080808"/>
+                </a:solidFill>
+                <a:latin typeface="JetBrains Mono"/>
+                <a:ea typeface="JetBrains Mono"/>
+                <a:cs typeface="JetBrains Mono"/>
+              </a:rPr>
+              <a:t>(note)</a:t>
+            </a:r>
+            <a:br>
+              <a:rPr sz="1400">
+                <a:solidFill>
+                  <a:srgbClr val="080808"/>
+                </a:solidFill>
+                <a:latin typeface="JetBrains Mono"/>
+                <a:ea typeface="JetBrains Mono"/>
+                <a:cs typeface="JetBrains Mono"/>
+              </a:rPr>
+            </a:br>
+            <a:r>
+              <a:rPr sz="1400">
+                <a:solidFill>
+                  <a:srgbClr val="1750EB"/>
+                </a:solidFill>
+                <a:latin typeface="JetBrains Mono"/>
+                <a:ea typeface="JetBrains Mono"/>
+                <a:cs typeface="JetBrains Mono"/>
+              </a:rPr>
+              <a:t>print</a:t>
+            </a:r>
+            <a:r>
+              <a:rPr sz="1400">
+                <a:solidFill>
+                  <a:srgbClr val="080808"/>
+                </a:solidFill>
+                <a:latin typeface="JetBrains Mono"/>
+                <a:ea typeface="JetBrains Mono"/>
+                <a:cs typeface="JetBrains Mono"/>
+              </a:rPr>
+              <a:t>(</a:t>
+            </a:r>
+            <a:r>
+              <a:rPr sz="1400">
+                <a:solidFill>
+                  <a:srgbClr val="067D17"/>
+                </a:solidFill>
+                <a:latin typeface="JetBrains Mono"/>
+                <a:ea typeface="JetBrains Mono"/>
+                <a:cs typeface="JetBrains Mono"/>
+              </a:rPr>
+              <a:t>"Saved notes:"</a:t>
+            </a:r>
+            <a:r>
+              <a:rPr sz="1400">
+                <a:solidFill>
+                  <a:srgbClr val="080808"/>
+                </a:solidFill>
+                <a:latin typeface="JetBrains Mono"/>
+                <a:ea typeface="JetBrains Mono"/>
+                <a:cs typeface="JetBrains Mono"/>
+              </a:rPr>
+              <a:t>)</a:t>
+            </a:r>
+            <a:br>
+              <a:rPr sz="1400">
+                <a:solidFill>
+                  <a:srgbClr val="080808"/>
+                </a:solidFill>
+                <a:latin typeface="JetBrains Mono"/>
+                <a:ea typeface="JetBrains Mono"/>
+                <a:cs typeface="JetBrains Mono"/>
+              </a:rPr>
+            </a:br>
+            <a:r>
+              <a:rPr sz="1400">
+                <a:solidFill>
+                  <a:srgbClr val="C45E00"/>
+                </a:solidFill>
+                <a:latin typeface="JetBrains Mono"/>
+                <a:ea typeface="JetBrains Mono"/>
+                <a:cs typeface="JetBrains Mono"/>
+              </a:rPr>
               <a:t>for</a:t>
             </a:r>
             <a:r>
@@ -9637,250 +9875,12 @@
                 <a:ea typeface="JetBrains Mono"/>
                 <a:cs typeface="JetBrains Mono"/>
               </a:rPr>
-              <a:t> count </a:t>
-            </a:r>
-            <a:r>
-              <a:rPr sz="1400">
-                <a:solidFill>
-                  <a:srgbClr val="1750EB"/>
-                </a:solidFill>
-                <a:latin typeface="JetBrains Mono"/>
-                <a:ea typeface="JetBrains Mono"/>
-                <a:cs typeface="JetBrains Mono"/>
-              </a:rPr>
-              <a:t>in</a:t>
-            </a:r>
-            <a:r>
-              <a:rPr sz="1400">
-                <a:solidFill>
-                  <a:srgbClr val="080808"/>
-                </a:solidFill>
-                <a:latin typeface="JetBrains Mono"/>
-                <a:ea typeface="JetBrains Mono"/>
-                <a:cs typeface="JetBrains Mono"/>
-              </a:rPr>
-              <a:t> </a:t>
-            </a:r>
-            <a:r>
-              <a:rPr sz="1400">
-                <a:solidFill>
-                  <a:srgbClr val="1750EB"/>
-                </a:solidFill>
-                <a:latin typeface="JetBrains Mono"/>
-                <a:ea typeface="JetBrains Mono"/>
-                <a:cs typeface="JetBrains Mono"/>
-              </a:rPr>
-              <a:t>range</a:t>
-            </a:r>
-            <a:r>
-              <a:rPr sz="1400">
-                <a:solidFill>
-                  <a:srgbClr val="080808"/>
-                </a:solidFill>
-                <a:latin typeface="JetBrains Mono"/>
-                <a:ea typeface="JetBrains Mono"/>
-                <a:cs typeface="JetBrains Mono"/>
-              </a:rPr>
-              <a:t>(3):</a:t>
-            </a:r>
-            <a:br>
-              <a:rPr sz="1400">
-                <a:solidFill>
-                  <a:srgbClr val="080808"/>
-                </a:solidFill>
-                <a:latin typeface="JetBrains Mono"/>
-                <a:ea typeface="JetBrains Mono"/>
-                <a:cs typeface="JetBrains Mono"/>
-              </a:rPr>
-            </a:br>
-            <a:r>
-              <a:rPr sz="1400">
-                <a:solidFill>
-                  <a:srgbClr val="080808"/>
-                </a:solidFill>
-                <a:latin typeface="JetBrains Mono"/>
-                <a:ea typeface="JetBrains Mono"/>
-                <a:cs typeface="JetBrains Mono"/>
-              </a:rPr>
-              <a:t>    note = </a:t>
-            </a:r>
-            <a:r>
-              <a:rPr sz="1400">
-                <a:solidFill>
-                  <a:srgbClr val="1750EB"/>
-                </a:solidFill>
-                <a:latin typeface="JetBrains Mono"/>
-                <a:ea typeface="JetBrains Mono"/>
-                <a:cs typeface="JetBrains Mono"/>
-              </a:rPr>
-              <a:t>input</a:t>
-            </a:r>
-            <a:r>
-              <a:rPr sz="1400">
-                <a:solidFill>
-                  <a:srgbClr val="080808"/>
-                </a:solidFill>
-                <a:latin typeface="JetBrains Mono"/>
-                <a:ea typeface="JetBrains Mono"/>
-                <a:cs typeface="JetBrains Mono"/>
-              </a:rPr>
-              <a:t>(</a:t>
-            </a:r>
-            <a:r>
-              <a:rPr sz="1400">
-                <a:solidFill>
-                  <a:srgbClr val="067D17"/>
-                </a:solidFill>
-                <a:latin typeface="JetBrains Mono"/>
-                <a:ea typeface="JetBrains Mono"/>
-                <a:cs typeface="JetBrains Mono"/>
-              </a:rPr>
-              <a:t>"Enter a note: "</a:t>
-            </a:r>
-            <a:r>
-              <a:rPr sz="1400">
-                <a:solidFill>
-                  <a:srgbClr val="080808"/>
-                </a:solidFill>
-                <a:latin typeface="JetBrains Mono"/>
-                <a:ea typeface="JetBrains Mono"/>
-                <a:cs typeface="JetBrains Mono"/>
-              </a:rPr>
-              <a:t>)</a:t>
-            </a:r>
-            <a:br>
-              <a:rPr sz="1400">
-                <a:solidFill>
-                  <a:srgbClr val="080808"/>
-                </a:solidFill>
-                <a:latin typeface="JetBrains Mono"/>
-                <a:ea typeface="JetBrains Mono"/>
-                <a:cs typeface="JetBrains Mono"/>
-              </a:rPr>
-            </a:br>
-            <a:r>
-              <a:rPr sz="1400">
-                <a:solidFill>
-                  <a:srgbClr val="080808"/>
-                </a:solidFill>
-                <a:latin typeface="JetBrains Mono"/>
-                <a:ea typeface="JetBrains Mono"/>
-                <a:cs typeface="JetBrains Mono"/>
-              </a:rPr>
-              <a:t>    notes</a:t>
-            </a:r>
-            <a:r>
-              <a:rPr sz="1400">
-                <a:solidFill>
-                  <a:srgbClr val="1750EB"/>
-                </a:solidFill>
-                <a:latin typeface="JetBrains Mono"/>
-                <a:ea typeface="JetBrains Mono"/>
-                <a:cs typeface="JetBrains Mono"/>
-              </a:rPr>
-              <a:t>.append</a:t>
-            </a:r>
-            <a:r>
-              <a:rPr sz="1400">
-                <a:solidFill>
-                  <a:srgbClr val="080808"/>
-                </a:solidFill>
-                <a:latin typeface="JetBrains Mono"/>
-                <a:ea typeface="JetBrains Mono"/>
-                <a:cs typeface="JetBrains Mono"/>
-              </a:rPr>
-              <a:t>(note)</a:t>
-            </a:r>
-            <a:br>
-              <a:rPr sz="1400">
-                <a:solidFill>
-                  <a:srgbClr val="080808"/>
-                </a:solidFill>
-                <a:latin typeface="JetBrains Mono"/>
-                <a:ea typeface="JetBrains Mono"/>
-                <a:cs typeface="JetBrains Mono"/>
-              </a:rPr>
-            </a:br>
-            <a:r>
-              <a:rPr sz="1400">
-                <a:solidFill>
-                  <a:srgbClr val="1750EB"/>
-                </a:solidFill>
-                <a:latin typeface="JetBrains Mono"/>
-                <a:ea typeface="JetBrains Mono"/>
-                <a:cs typeface="JetBrains Mono"/>
-              </a:rPr>
-              <a:t>print</a:t>
-            </a:r>
-            <a:r>
-              <a:rPr sz="1400">
-                <a:solidFill>
-                  <a:srgbClr val="080808"/>
-                </a:solidFill>
-                <a:latin typeface="JetBrains Mono"/>
-                <a:ea typeface="JetBrains Mono"/>
-                <a:cs typeface="JetBrains Mono"/>
-              </a:rPr>
-              <a:t>(</a:t>
-            </a:r>
-            <a:r>
-              <a:rPr sz="1400">
-                <a:solidFill>
-                  <a:srgbClr val="067D17"/>
-                </a:solidFill>
-                <a:latin typeface="JetBrains Mono"/>
-                <a:ea typeface="JetBrains Mono"/>
-                <a:cs typeface="JetBrains Mono"/>
-              </a:rPr>
-              <a:t>"Saved notes:"</a:t>
-            </a:r>
-            <a:r>
-              <a:rPr sz="1400">
-                <a:solidFill>
-                  <a:srgbClr val="080808"/>
-                </a:solidFill>
-                <a:latin typeface="JetBrains Mono"/>
-                <a:ea typeface="JetBrains Mono"/>
-                <a:cs typeface="JetBrains Mono"/>
-              </a:rPr>
-              <a:t>)</a:t>
-            </a:r>
-            <a:br>
-              <a:rPr sz="1400">
-                <a:solidFill>
-                  <a:srgbClr val="080808"/>
-                </a:solidFill>
-                <a:latin typeface="JetBrains Mono"/>
-                <a:ea typeface="JetBrains Mono"/>
-                <a:cs typeface="JetBrains Mono"/>
-              </a:rPr>
-            </a:br>
-            <a:r>
-              <a:rPr sz="1400">
-                <a:solidFill>
-                  <a:srgbClr val="1750EB"/>
-                </a:solidFill>
-                <a:latin typeface="JetBrains Mono"/>
-                <a:ea typeface="JetBrains Mono"/>
-                <a:cs typeface="JetBrains Mono"/>
-              </a:rPr>
-              <a:t>for</a:t>
-            </a:r>
-            <a:r>
-              <a:rPr sz="1400">
-                <a:solidFill>
-                  <a:srgbClr val="080808"/>
-                </a:solidFill>
-                <a:latin typeface="JetBrains Mono"/>
-                <a:ea typeface="JetBrains Mono"/>
-                <a:cs typeface="JetBrains Mono"/>
-              </a:rPr>
               <a:t> note </a:t>
             </a:r>
             <a:r>
               <a:rPr sz="1400">
                 <a:solidFill>
-                  <a:srgbClr val="1750EB"/>
+                  <a:srgbClr val="C45E00"/>
                 </a:solidFill>
                 <a:latin typeface="JetBrains Mono"/>
                 <a:ea typeface="JetBrains Mono"/>
@@ -10097,7 +10097,7 @@
             <a:r>
               <a:rPr sz="1800">
                 <a:solidFill>
-                  <a:srgbClr val="1750EB"/>
+                  <a:srgbClr val="C45E00"/>
                 </a:solidFill>
                 <a:latin typeface="JetBrains Mono"/>
                 <a:ea typeface="JetBrains Mono"/>
@@ -10119,7 +10119,7 @@
             <a:r>
               <a:rPr sz="1800">
                 <a:solidFill>
-                  <a:srgbClr val="1750EB"/>
+                  <a:srgbClr val="C45E00"/>
                 </a:solidFill>
                 <a:latin typeface="JetBrains Mono"/>
                 <a:ea typeface="JetBrains Mono"/>
@@ -10275,7 +10275,7 @@
             <a:r>
               <a:rPr sz="1800">
                 <a:solidFill>
-                  <a:srgbClr val="1750EB"/>
+                  <a:srgbClr val="C45E00"/>
                 </a:solidFill>
                 <a:latin typeface="JetBrains Mono"/>
                 <a:ea typeface="JetBrains Mono"/>
@@ -10297,7 +10297,7 @@
             <a:r>
               <a:rPr sz="1800">
                 <a:solidFill>
-                  <a:srgbClr val="1750EB"/>
+                  <a:srgbClr val="C45E00"/>
                 </a:solidFill>
                 <a:latin typeface="JetBrains Mono"/>
                 <a:ea typeface="JetBrains Mono"/>

--- a/Mapped Curriculum Lessons/Grade 7/Lesson 26 - Building Lists with Loops/Building Lists with Loops - Slides.pptx
+++ b/Mapped Curriculum Lessons/Grade 7/Lesson 26 - Building Lists with Loops/Building Lists with Loops - Slides.pptx
@@ -2,28 +2,28 @@
 <file path=ppt/presentation.xml><?xml version="1.0" encoding="utf-8"?>
 <p:presentation xmlns:p="http://schemas.openxmlformats.org/presentationml/2006/main" embedTrueTypeFonts="1" saveSubsetFonts="0">
   <p:sldMasterIdLst>
-    <p:sldMasterId xmlns:r="http://schemas.openxmlformats.org/officeDocument/2006/relationships" id="2147483648" r:id="Rd68fab6babb442a2"/>
+    <p:sldMasterId xmlns:r="http://schemas.openxmlformats.org/officeDocument/2006/relationships" id="2147483648" r:id="Rc65c4b850285492e"/>
   </p:sldMasterIdLst>
   <p:notesMasterIdLst>
-    <p:notesMasterId xmlns:r="http://schemas.openxmlformats.org/officeDocument/2006/relationships" r:id="Re675da8a9d814e58"/>
+    <p:notesMasterId xmlns:r="http://schemas.openxmlformats.org/officeDocument/2006/relationships" r:id="R196dd5faf3844528"/>
   </p:notesMasterIdLst>
   <p:sldIdLst>
-    <p:sldId xmlns:r="http://schemas.openxmlformats.org/officeDocument/2006/relationships" id="256" r:id="R5d169b4deb044a33"/>
-    <p:sldId xmlns:r="http://schemas.openxmlformats.org/officeDocument/2006/relationships" id="257" r:id="R0f7c509d59e84e09"/>
-    <p:sldId xmlns:r="http://schemas.openxmlformats.org/officeDocument/2006/relationships" id="258" r:id="R26d9446a9e9f4582"/>
-    <p:sldId xmlns:r="http://schemas.openxmlformats.org/officeDocument/2006/relationships" id="259" r:id="Rb560835a2be04ab9"/>
-    <p:sldId xmlns:r="http://schemas.openxmlformats.org/officeDocument/2006/relationships" id="260" r:id="R889895c2aecc47cd"/>
-    <p:sldId xmlns:r="http://schemas.openxmlformats.org/officeDocument/2006/relationships" id="261" r:id="R7aee2985e0ef4f9b"/>
-    <p:sldId xmlns:r="http://schemas.openxmlformats.org/officeDocument/2006/relationships" id="262" r:id="R656abb854e7a4d8a"/>
-    <p:sldId xmlns:r="http://schemas.openxmlformats.org/officeDocument/2006/relationships" id="263" r:id="Rd3388744823645dc"/>
-    <p:sldId xmlns:r="http://schemas.openxmlformats.org/officeDocument/2006/relationships" id="264" r:id="R0e274dcdaa554672"/>
+    <p:sldId xmlns:r="http://schemas.openxmlformats.org/officeDocument/2006/relationships" id="256" r:id="R032c24796d004e41"/>
+    <p:sldId xmlns:r="http://schemas.openxmlformats.org/officeDocument/2006/relationships" id="257" r:id="Ra377760a0f0448f8"/>
+    <p:sldId xmlns:r="http://schemas.openxmlformats.org/officeDocument/2006/relationships" id="258" r:id="R4096d28671af45fa"/>
+    <p:sldId xmlns:r="http://schemas.openxmlformats.org/officeDocument/2006/relationships" id="259" r:id="R867b22a36c2a4363"/>
+    <p:sldId xmlns:r="http://schemas.openxmlformats.org/officeDocument/2006/relationships" id="260" r:id="Rbd9546c600b9471c"/>
+    <p:sldId xmlns:r="http://schemas.openxmlformats.org/officeDocument/2006/relationships" id="261" r:id="R2ab2361ea94f4e45"/>
+    <p:sldId xmlns:r="http://schemas.openxmlformats.org/officeDocument/2006/relationships" id="262" r:id="R681bf994719c47c9"/>
+    <p:sldId xmlns:r="http://schemas.openxmlformats.org/officeDocument/2006/relationships" id="263" r:id="Rb064bdd081b64944"/>
+    <p:sldId xmlns:r="http://schemas.openxmlformats.org/officeDocument/2006/relationships" id="264" r:id="R47134b1adb00409c"/>
   </p:sldIdLst>
   <p:sldSz cx="12192000" cy="6858000"/>
   <p:notesSz cx="6858000" cy="9144000"/>
   <p:embeddedFontLst>
     <p:embeddedFont>
       <p:font typeface="JetBrains Mono"/>
-      <p:regular xmlns:r="http://schemas.openxmlformats.org/officeDocument/2006/relationships" r:id="R07b392ab75724bc2"/>
+      <p:regular xmlns:r="http://schemas.openxmlformats.org/officeDocument/2006/relationships" r:id="Rb56032ed03a44216"/>
     </p:embeddedFont>
   </p:embeddedFontLst>
 </p:presentation>
@@ -1071,7 +1071,7 @@
           <p:nvPr/>
         </p:nvPicPr>
         <p:blipFill rotWithShape="1">
-          <a:blip xmlns:r="http://schemas.openxmlformats.org/officeDocument/2006/relationships" xmlns:a="http://schemas.openxmlformats.org/drawingml/2006/main" r:embed="R0446e9bb9f954832"/>
+          <a:blip xmlns:r="http://schemas.openxmlformats.org/officeDocument/2006/relationships" xmlns:a="http://schemas.openxmlformats.org/drawingml/2006/main" r:embed="R4e8e2dd41ad74525"/>
           <a:stretch xmlns:a="http://schemas.openxmlformats.org/drawingml/2006/main"/>
         </p:blipFill>
         <p:spPr>
@@ -1451,7 +1451,7 @@
           <p:nvPr/>
         </p:nvPicPr>
         <p:blipFill rotWithShape="1">
-          <a:blip xmlns:r="http://schemas.openxmlformats.org/officeDocument/2006/relationships" xmlns:a="http://schemas.openxmlformats.org/drawingml/2006/main" r:embed="R859facc399f04ee7">
+          <a:blip xmlns:r="http://schemas.openxmlformats.org/officeDocument/2006/relationships" xmlns:a="http://schemas.openxmlformats.org/drawingml/2006/main" r:embed="R7e1b04d032a64b1e">
             <a:alphaModFix amt="28000"/>
           </a:blip>
           <a:stretch xmlns:a="http://schemas.openxmlformats.org/drawingml/2006/main"/>
@@ -1664,7 +1664,7 @@
           <p:nvPr/>
         </p:nvPicPr>
         <p:blipFill rotWithShape="1">
-          <a:blip xmlns:r="http://schemas.openxmlformats.org/officeDocument/2006/relationships" xmlns:a="http://schemas.openxmlformats.org/drawingml/2006/main" r:embed="Rd7f71c121ca74ab3">
+          <a:blip xmlns:r="http://schemas.openxmlformats.org/officeDocument/2006/relationships" xmlns:a="http://schemas.openxmlformats.org/drawingml/2006/main" r:embed="R0dad6a5d81954020">
             <a:alphaModFix amt="28000"/>
           </a:blip>
           <a:stretch xmlns:a="http://schemas.openxmlformats.org/drawingml/2006/main"/>
@@ -1899,7 +1899,7 @@
           <p:nvPr/>
         </p:nvPicPr>
         <p:blipFill rotWithShape="1">
-          <a:blip xmlns:r="http://schemas.openxmlformats.org/officeDocument/2006/relationships" xmlns:a="http://schemas.openxmlformats.org/drawingml/2006/main" r:embed="R0081db27c28246ad">
+          <a:blip xmlns:r="http://schemas.openxmlformats.org/officeDocument/2006/relationships" xmlns:a="http://schemas.openxmlformats.org/drawingml/2006/main" r:embed="Rfe2d669ee950472a">
             <a:alphaModFix amt="28000"/>
           </a:blip>
           <a:stretch xmlns:a="http://schemas.openxmlformats.org/drawingml/2006/main"/>
@@ -2176,7 +2176,7 @@
           <p:nvPr/>
         </p:nvPicPr>
         <p:blipFill rotWithShape="1">
-          <a:blip xmlns:r="http://schemas.openxmlformats.org/officeDocument/2006/relationships" xmlns:a="http://schemas.openxmlformats.org/drawingml/2006/main" r:embed="Ra440bfc05c99402a">
+          <a:blip xmlns:r="http://schemas.openxmlformats.org/officeDocument/2006/relationships" xmlns:a="http://schemas.openxmlformats.org/drawingml/2006/main" r:embed="R1430303d7c884b56">
             <a:alphaModFix amt="28000"/>
           </a:blip>
           <a:stretch xmlns:a="http://schemas.openxmlformats.org/drawingml/2006/main"/>
@@ -2451,7 +2451,7 @@
           <p:nvPr/>
         </p:nvPicPr>
         <p:blipFill rotWithShape="1">
-          <a:blip xmlns:r="http://schemas.openxmlformats.org/officeDocument/2006/relationships" xmlns:a="http://schemas.openxmlformats.org/drawingml/2006/main" r:embed="Ra8bfc0b24533471f">
+          <a:blip xmlns:r="http://schemas.openxmlformats.org/officeDocument/2006/relationships" xmlns:a="http://schemas.openxmlformats.org/drawingml/2006/main" r:embed="R5f3dce0ec3184994">
             <a:alphaModFix amt="28000"/>
           </a:blip>
           <a:stretch xmlns:a="http://schemas.openxmlformats.org/drawingml/2006/main"/>
@@ -2875,7 +2875,7 @@
           <p:nvPr/>
         </p:nvPicPr>
         <p:blipFill rotWithShape="1">
-          <a:blip xmlns:r="http://schemas.openxmlformats.org/officeDocument/2006/relationships" xmlns:a="http://schemas.openxmlformats.org/drawingml/2006/main" r:embed="R5a116d13d1a84825">
+          <a:blip xmlns:r="http://schemas.openxmlformats.org/officeDocument/2006/relationships" xmlns:a="http://schemas.openxmlformats.org/drawingml/2006/main" r:embed="R1ce832592b17444f">
             <a:alphaModFix amt="28000"/>
           </a:blip>
           <a:stretch xmlns:a="http://schemas.openxmlformats.org/drawingml/2006/main"/>
@@ -3016,7 +3016,7 @@
           <p:nvPr/>
         </p:nvPicPr>
         <p:blipFill rotWithShape="1">
-          <a:blip xmlns:r="http://schemas.openxmlformats.org/officeDocument/2006/relationships" xmlns:a="http://schemas.openxmlformats.org/drawingml/2006/main" r:embed="Rf7095cc915f14f70">
+          <a:blip xmlns:r="http://schemas.openxmlformats.org/officeDocument/2006/relationships" xmlns:a="http://schemas.openxmlformats.org/drawingml/2006/main" r:embed="Raa569f6b4ccb4241">
             <a:alphaModFix amt="28000"/>
           </a:blip>
           <a:stretch xmlns:a="http://schemas.openxmlformats.org/drawingml/2006/main"/>
@@ -3130,7 +3130,7 @@
           <p:nvPr/>
         </p:nvPicPr>
         <p:blipFill rotWithShape="1">
-          <a:blip xmlns:r="http://schemas.openxmlformats.org/officeDocument/2006/relationships" xmlns:a="http://schemas.openxmlformats.org/drawingml/2006/main" r:embed="R140ebbf0b7534365">
+          <a:blip xmlns:r="http://schemas.openxmlformats.org/officeDocument/2006/relationships" xmlns:a="http://schemas.openxmlformats.org/drawingml/2006/main" r:embed="R3f04acf178144a37">
             <a:alphaModFix amt="28000"/>
           </a:blip>
           <a:stretch xmlns:a="http://schemas.openxmlformats.org/drawingml/2006/main"/>
@@ -3457,7 +3457,7 @@
           <p:nvPr/>
         </p:nvPicPr>
         <p:blipFill rotWithShape="1">
-          <a:blip xmlns:r="http://schemas.openxmlformats.org/officeDocument/2006/relationships" xmlns:a="http://schemas.openxmlformats.org/drawingml/2006/main" r:embed="R2fd1daa3037e4d2f">
+          <a:blip xmlns:r="http://schemas.openxmlformats.org/officeDocument/2006/relationships" xmlns:a="http://schemas.openxmlformats.org/drawingml/2006/main" r:embed="R5aa05ed0aff94668">
             <a:alphaModFix amt="28000"/>
           </a:blip>
           <a:stretch xmlns:a="http://schemas.openxmlformats.org/drawingml/2006/main"/>
@@ -3745,7 +3745,7 @@
           <p:nvPr/>
         </p:nvPicPr>
         <p:blipFill rotWithShape="1">
-          <a:blip xmlns:r="http://schemas.openxmlformats.org/officeDocument/2006/relationships" xmlns:a="http://schemas.openxmlformats.org/drawingml/2006/main" r:embed="Re4bc6ecda87f4802">
+          <a:blip xmlns:r="http://schemas.openxmlformats.org/officeDocument/2006/relationships" xmlns:a="http://schemas.openxmlformats.org/drawingml/2006/main" r:embed="Rf6461779794d44ae">
             <a:alphaModFix amt="28000"/>
           </a:blip>
           <a:stretch xmlns:a="http://schemas.openxmlformats.org/drawingml/2006/main"/>
@@ -3982,17 +3982,17 @@
   </p:cSld>
   <p:clrMap bg1="lt1" tx1="dk1" bg2="lt2" tx2="dk2" accent1="accent1" accent2="accent2" accent3="accent3" accent4="accent4" accent5="accent5" accent6="accent6" hlink="hlink" folHlink="folHlink"/>
   <p:sldLayoutIdLst>
-    <p:sldLayoutId xmlns:r="http://schemas.openxmlformats.org/officeDocument/2006/relationships" id="2147483649" r:id="R72791fa7873a4666"/>
-    <p:sldLayoutId xmlns:r="http://schemas.openxmlformats.org/officeDocument/2006/relationships" id="2147483650" r:id="R3f8b915068bb46a7"/>
-    <p:sldLayoutId xmlns:r="http://schemas.openxmlformats.org/officeDocument/2006/relationships" id="2147483651" r:id="R38fd7170eb754b5e"/>
-    <p:sldLayoutId xmlns:r="http://schemas.openxmlformats.org/officeDocument/2006/relationships" id="2147483652" r:id="R9a8b28ca8016424b"/>
-    <p:sldLayoutId xmlns:r="http://schemas.openxmlformats.org/officeDocument/2006/relationships" id="2147483653" r:id="Rba1b1ecf765347b0"/>
-    <p:sldLayoutId xmlns:r="http://schemas.openxmlformats.org/officeDocument/2006/relationships" id="2147483654" r:id="Re2570246ffbf4f01"/>
-    <p:sldLayoutId xmlns:r="http://schemas.openxmlformats.org/officeDocument/2006/relationships" id="2147483655" r:id="R37425971c36340be"/>
-    <p:sldLayoutId xmlns:r="http://schemas.openxmlformats.org/officeDocument/2006/relationships" id="2147483656" r:id="R3681a55330e14c8e"/>
-    <p:sldLayoutId xmlns:r="http://schemas.openxmlformats.org/officeDocument/2006/relationships" id="2147483657" r:id="R65a50542599c4594"/>
-    <p:sldLayoutId xmlns:r="http://schemas.openxmlformats.org/officeDocument/2006/relationships" id="2147483658" r:id="Rfb76fa35aeb94c66"/>
-    <p:sldLayoutId xmlns:r="http://schemas.openxmlformats.org/officeDocument/2006/relationships" id="2147483659" r:id="R43adf42d18154257"/>
+    <p:sldLayoutId xmlns:r="http://schemas.openxmlformats.org/officeDocument/2006/relationships" id="2147483649" r:id="R8859a6b1d8f84949"/>
+    <p:sldLayoutId xmlns:r="http://schemas.openxmlformats.org/officeDocument/2006/relationships" id="2147483650" r:id="R870e8295a6494d99"/>
+    <p:sldLayoutId xmlns:r="http://schemas.openxmlformats.org/officeDocument/2006/relationships" id="2147483651" r:id="Rfc0afb40f5d046db"/>
+    <p:sldLayoutId xmlns:r="http://schemas.openxmlformats.org/officeDocument/2006/relationships" id="2147483652" r:id="Ra08bc8509cec4a08"/>
+    <p:sldLayoutId xmlns:r="http://schemas.openxmlformats.org/officeDocument/2006/relationships" id="2147483653" r:id="Re0924e8067b345e7"/>
+    <p:sldLayoutId xmlns:r="http://schemas.openxmlformats.org/officeDocument/2006/relationships" id="2147483654" r:id="Rcc115d072b474e2d"/>
+    <p:sldLayoutId xmlns:r="http://schemas.openxmlformats.org/officeDocument/2006/relationships" id="2147483655" r:id="Rf7177e058499472a"/>
+    <p:sldLayoutId xmlns:r="http://schemas.openxmlformats.org/officeDocument/2006/relationships" id="2147483656" r:id="Rc76c0e5b8cfb4aee"/>
+    <p:sldLayoutId xmlns:r="http://schemas.openxmlformats.org/officeDocument/2006/relationships" id="2147483657" r:id="R6676f28d500745e5"/>
+    <p:sldLayoutId xmlns:r="http://schemas.openxmlformats.org/officeDocument/2006/relationships" id="2147483658" r:id="R118af9961363486f"/>
+    <p:sldLayoutId xmlns:r="http://schemas.openxmlformats.org/officeDocument/2006/relationships" id="2147483659" r:id="R32846279cdb44ee6"/>
   </p:sldLayoutIdLst>
   <p:hf hdr="0" ftr="0" dt="0"/>
   <p:txStyles>

--- a/Mapped Curriculum Lessons/Grade 7/Lesson 26 - Building Lists with Loops/Building Lists with Loops - Slides.pptx
+++ b/Mapped Curriculum Lessons/Grade 7/Lesson 26 - Building Lists with Loops/Building Lists with Loops - Slides.pptx
@@ -2,28 +2,28 @@
 <file path=ppt/presentation.xml><?xml version="1.0" encoding="utf-8"?>
 <p:presentation xmlns:p="http://schemas.openxmlformats.org/presentationml/2006/main" embedTrueTypeFonts="1" saveSubsetFonts="0">
   <p:sldMasterIdLst>
-    <p:sldMasterId xmlns:r="http://schemas.openxmlformats.org/officeDocument/2006/relationships" id="2147483648" r:id="Rc65c4b850285492e"/>
+    <p:sldMasterId xmlns:r="http://schemas.openxmlformats.org/officeDocument/2006/relationships" id="2147483648" r:id="R0aaedc0b676f4070"/>
   </p:sldMasterIdLst>
   <p:notesMasterIdLst>
-    <p:notesMasterId xmlns:r="http://schemas.openxmlformats.org/officeDocument/2006/relationships" r:id="R196dd5faf3844528"/>
+    <p:notesMasterId xmlns:r="http://schemas.openxmlformats.org/officeDocument/2006/relationships" r:id="Ra1ada765c03045d9"/>
   </p:notesMasterIdLst>
   <p:sldIdLst>
-    <p:sldId xmlns:r="http://schemas.openxmlformats.org/officeDocument/2006/relationships" id="256" r:id="R032c24796d004e41"/>
-    <p:sldId xmlns:r="http://schemas.openxmlformats.org/officeDocument/2006/relationships" id="257" r:id="Ra377760a0f0448f8"/>
-    <p:sldId xmlns:r="http://schemas.openxmlformats.org/officeDocument/2006/relationships" id="258" r:id="R4096d28671af45fa"/>
-    <p:sldId xmlns:r="http://schemas.openxmlformats.org/officeDocument/2006/relationships" id="259" r:id="R867b22a36c2a4363"/>
-    <p:sldId xmlns:r="http://schemas.openxmlformats.org/officeDocument/2006/relationships" id="260" r:id="Rbd9546c600b9471c"/>
-    <p:sldId xmlns:r="http://schemas.openxmlformats.org/officeDocument/2006/relationships" id="261" r:id="R2ab2361ea94f4e45"/>
-    <p:sldId xmlns:r="http://schemas.openxmlformats.org/officeDocument/2006/relationships" id="262" r:id="R681bf994719c47c9"/>
-    <p:sldId xmlns:r="http://schemas.openxmlformats.org/officeDocument/2006/relationships" id="263" r:id="Rb064bdd081b64944"/>
-    <p:sldId xmlns:r="http://schemas.openxmlformats.org/officeDocument/2006/relationships" id="264" r:id="R47134b1adb00409c"/>
+    <p:sldId xmlns:r="http://schemas.openxmlformats.org/officeDocument/2006/relationships" id="256" r:id="R5c286478bfdf47fa"/>
+    <p:sldId xmlns:r="http://schemas.openxmlformats.org/officeDocument/2006/relationships" id="257" r:id="R6cbaba3f95244616"/>
+    <p:sldId xmlns:r="http://schemas.openxmlformats.org/officeDocument/2006/relationships" id="258" r:id="Rf475b38a20924fc0"/>
+    <p:sldId xmlns:r="http://schemas.openxmlformats.org/officeDocument/2006/relationships" id="259" r:id="R793974f038354b5e"/>
+    <p:sldId xmlns:r="http://schemas.openxmlformats.org/officeDocument/2006/relationships" id="260" r:id="Red73c23d6970435f"/>
+    <p:sldId xmlns:r="http://schemas.openxmlformats.org/officeDocument/2006/relationships" id="261" r:id="R1816339f190c4867"/>
+    <p:sldId xmlns:r="http://schemas.openxmlformats.org/officeDocument/2006/relationships" id="262" r:id="R5c80754860c8468a"/>
+    <p:sldId xmlns:r="http://schemas.openxmlformats.org/officeDocument/2006/relationships" id="263" r:id="R24822840f6834c2e"/>
+    <p:sldId xmlns:r="http://schemas.openxmlformats.org/officeDocument/2006/relationships" id="264" r:id="Rf9bbb45b5eaf4db9"/>
   </p:sldIdLst>
   <p:sldSz cx="12192000" cy="6858000"/>
   <p:notesSz cx="6858000" cy="9144000"/>
   <p:embeddedFontLst>
     <p:embeddedFont>
       <p:font typeface="JetBrains Mono"/>
-      <p:regular xmlns:r="http://schemas.openxmlformats.org/officeDocument/2006/relationships" r:id="Rb56032ed03a44216"/>
+      <p:regular xmlns:r="http://schemas.openxmlformats.org/officeDocument/2006/relationships" r:id="Ra97cc8a1393243ff"/>
     </p:embeddedFont>
   </p:embeddedFontLst>
 </p:presentation>
@@ -1071,7 +1071,7 @@
           <p:nvPr/>
         </p:nvPicPr>
         <p:blipFill rotWithShape="1">
-          <a:blip xmlns:r="http://schemas.openxmlformats.org/officeDocument/2006/relationships" xmlns:a="http://schemas.openxmlformats.org/drawingml/2006/main" r:embed="R4e8e2dd41ad74525"/>
+          <a:blip xmlns:r="http://schemas.openxmlformats.org/officeDocument/2006/relationships" xmlns:a="http://schemas.openxmlformats.org/drawingml/2006/main" r:embed="R25b6458f9569495b"/>
           <a:stretch xmlns:a="http://schemas.openxmlformats.org/drawingml/2006/main"/>
         </p:blipFill>
         <p:spPr>
@@ -1451,7 +1451,7 @@
           <p:nvPr/>
         </p:nvPicPr>
         <p:blipFill rotWithShape="1">
-          <a:blip xmlns:r="http://schemas.openxmlformats.org/officeDocument/2006/relationships" xmlns:a="http://schemas.openxmlformats.org/drawingml/2006/main" r:embed="R7e1b04d032a64b1e">
+          <a:blip xmlns:r="http://schemas.openxmlformats.org/officeDocument/2006/relationships" xmlns:a="http://schemas.openxmlformats.org/drawingml/2006/main" r:embed="R6d26518bb5ec4010">
             <a:alphaModFix amt="28000"/>
           </a:blip>
           <a:stretch xmlns:a="http://schemas.openxmlformats.org/drawingml/2006/main"/>
@@ -1664,7 +1664,7 @@
           <p:nvPr/>
         </p:nvPicPr>
         <p:blipFill rotWithShape="1">
-          <a:blip xmlns:r="http://schemas.openxmlformats.org/officeDocument/2006/relationships" xmlns:a="http://schemas.openxmlformats.org/drawingml/2006/main" r:embed="R0dad6a5d81954020">
+          <a:blip xmlns:r="http://schemas.openxmlformats.org/officeDocument/2006/relationships" xmlns:a="http://schemas.openxmlformats.org/drawingml/2006/main" r:embed="R671ae9f0f8d84f7b">
             <a:alphaModFix amt="28000"/>
           </a:blip>
           <a:stretch xmlns:a="http://schemas.openxmlformats.org/drawingml/2006/main"/>
@@ -1899,7 +1899,7 @@
           <p:nvPr/>
         </p:nvPicPr>
         <p:blipFill rotWithShape="1">
-          <a:blip xmlns:r="http://schemas.openxmlformats.org/officeDocument/2006/relationships" xmlns:a="http://schemas.openxmlformats.org/drawingml/2006/main" r:embed="Rfe2d669ee950472a">
+          <a:blip xmlns:r="http://schemas.openxmlformats.org/officeDocument/2006/relationships" xmlns:a="http://schemas.openxmlformats.org/drawingml/2006/main" r:embed="R5157e848df43492d">
             <a:alphaModFix amt="28000"/>
           </a:blip>
           <a:stretch xmlns:a="http://schemas.openxmlformats.org/drawingml/2006/main"/>
@@ -2176,7 +2176,7 @@
           <p:nvPr/>
         </p:nvPicPr>
         <p:blipFill rotWithShape="1">
-          <a:blip xmlns:r="http://schemas.openxmlformats.org/officeDocument/2006/relationships" xmlns:a="http://schemas.openxmlformats.org/drawingml/2006/main" r:embed="R1430303d7c884b56">
+          <a:blip xmlns:r="http://schemas.openxmlformats.org/officeDocument/2006/relationships" xmlns:a="http://schemas.openxmlformats.org/drawingml/2006/main" r:embed="Rb9c8757f35044138">
             <a:alphaModFix amt="28000"/>
           </a:blip>
           <a:stretch xmlns:a="http://schemas.openxmlformats.org/drawingml/2006/main"/>
@@ -2451,7 +2451,7 @@
           <p:nvPr/>
         </p:nvPicPr>
         <p:blipFill rotWithShape="1">
-          <a:blip xmlns:r="http://schemas.openxmlformats.org/officeDocument/2006/relationships" xmlns:a="http://schemas.openxmlformats.org/drawingml/2006/main" r:embed="R5f3dce0ec3184994">
+          <a:blip xmlns:r="http://schemas.openxmlformats.org/officeDocument/2006/relationships" xmlns:a="http://schemas.openxmlformats.org/drawingml/2006/main" r:embed="R177ccbb602994dbc">
             <a:alphaModFix amt="28000"/>
           </a:blip>
           <a:stretch xmlns:a="http://schemas.openxmlformats.org/drawingml/2006/main"/>
@@ -2875,7 +2875,7 @@
           <p:nvPr/>
         </p:nvPicPr>
         <p:blipFill rotWithShape="1">
-          <a:blip xmlns:r="http://schemas.openxmlformats.org/officeDocument/2006/relationships" xmlns:a="http://schemas.openxmlformats.org/drawingml/2006/main" r:embed="R1ce832592b17444f">
+          <a:blip xmlns:r="http://schemas.openxmlformats.org/officeDocument/2006/relationships" xmlns:a="http://schemas.openxmlformats.org/drawingml/2006/main" r:embed="R9d297fde2cd34957">
             <a:alphaModFix amt="28000"/>
           </a:blip>
           <a:stretch xmlns:a="http://schemas.openxmlformats.org/drawingml/2006/main"/>
@@ -3016,7 +3016,7 @@
           <p:nvPr/>
         </p:nvPicPr>
         <p:blipFill rotWithShape="1">
-          <a:blip xmlns:r="http://schemas.openxmlformats.org/officeDocument/2006/relationships" xmlns:a="http://schemas.openxmlformats.org/drawingml/2006/main" r:embed="Raa569f6b4ccb4241">
+          <a:blip xmlns:r="http://schemas.openxmlformats.org/officeDocument/2006/relationships" xmlns:a="http://schemas.openxmlformats.org/drawingml/2006/main" r:embed="R4e8402ec94e445c6">
             <a:alphaModFix amt="28000"/>
           </a:blip>
           <a:stretch xmlns:a="http://schemas.openxmlformats.org/drawingml/2006/main"/>
@@ -3130,7 +3130,7 @@
           <p:nvPr/>
         </p:nvPicPr>
         <p:blipFill rotWithShape="1">
-          <a:blip xmlns:r="http://schemas.openxmlformats.org/officeDocument/2006/relationships" xmlns:a="http://schemas.openxmlformats.org/drawingml/2006/main" r:embed="R3f04acf178144a37">
+          <a:blip xmlns:r="http://schemas.openxmlformats.org/officeDocument/2006/relationships" xmlns:a="http://schemas.openxmlformats.org/drawingml/2006/main" r:embed="R7243ba04fb314a6a">
             <a:alphaModFix amt="28000"/>
           </a:blip>
           <a:stretch xmlns:a="http://schemas.openxmlformats.org/drawingml/2006/main"/>
@@ -3457,7 +3457,7 @@
           <p:nvPr/>
         </p:nvPicPr>
         <p:blipFill rotWithShape="1">
-          <a:blip xmlns:r="http://schemas.openxmlformats.org/officeDocument/2006/relationships" xmlns:a="http://schemas.openxmlformats.org/drawingml/2006/main" r:embed="R5aa05ed0aff94668">
+          <a:blip xmlns:r="http://schemas.openxmlformats.org/officeDocument/2006/relationships" xmlns:a="http://schemas.openxmlformats.org/drawingml/2006/main" r:embed="R04a24c59ec8045ed">
             <a:alphaModFix amt="28000"/>
           </a:blip>
           <a:stretch xmlns:a="http://schemas.openxmlformats.org/drawingml/2006/main"/>
@@ -3745,7 +3745,7 @@
           <p:nvPr/>
         </p:nvPicPr>
         <p:blipFill rotWithShape="1">
-          <a:blip xmlns:r="http://schemas.openxmlformats.org/officeDocument/2006/relationships" xmlns:a="http://schemas.openxmlformats.org/drawingml/2006/main" r:embed="Rf6461779794d44ae">
+          <a:blip xmlns:r="http://schemas.openxmlformats.org/officeDocument/2006/relationships" xmlns:a="http://schemas.openxmlformats.org/drawingml/2006/main" r:embed="R58251a2bc22b4fc1">
             <a:alphaModFix amt="28000"/>
           </a:blip>
           <a:stretch xmlns:a="http://schemas.openxmlformats.org/drawingml/2006/main"/>
@@ -3982,17 +3982,17 @@
   </p:cSld>
   <p:clrMap bg1="lt1" tx1="dk1" bg2="lt2" tx2="dk2" accent1="accent1" accent2="accent2" accent3="accent3" accent4="accent4" accent5="accent5" accent6="accent6" hlink="hlink" folHlink="folHlink"/>
   <p:sldLayoutIdLst>
-    <p:sldLayoutId xmlns:r="http://schemas.openxmlformats.org/officeDocument/2006/relationships" id="2147483649" r:id="R8859a6b1d8f84949"/>
-    <p:sldLayoutId xmlns:r="http://schemas.openxmlformats.org/officeDocument/2006/relationships" id="2147483650" r:id="R870e8295a6494d99"/>
-    <p:sldLayoutId xmlns:r="http://schemas.openxmlformats.org/officeDocument/2006/relationships" id="2147483651" r:id="Rfc0afb40f5d046db"/>
-    <p:sldLayoutId xmlns:r="http://schemas.openxmlformats.org/officeDocument/2006/relationships" id="2147483652" r:id="Ra08bc8509cec4a08"/>
-    <p:sldLayoutId xmlns:r="http://schemas.openxmlformats.org/officeDocument/2006/relationships" id="2147483653" r:id="Re0924e8067b345e7"/>
-    <p:sldLayoutId xmlns:r="http://schemas.openxmlformats.org/officeDocument/2006/relationships" id="2147483654" r:id="Rcc115d072b474e2d"/>
-    <p:sldLayoutId xmlns:r="http://schemas.openxmlformats.org/officeDocument/2006/relationships" id="2147483655" r:id="Rf7177e058499472a"/>
-    <p:sldLayoutId xmlns:r="http://schemas.openxmlformats.org/officeDocument/2006/relationships" id="2147483656" r:id="Rc76c0e5b8cfb4aee"/>
-    <p:sldLayoutId xmlns:r="http://schemas.openxmlformats.org/officeDocument/2006/relationships" id="2147483657" r:id="R6676f28d500745e5"/>
-    <p:sldLayoutId xmlns:r="http://schemas.openxmlformats.org/officeDocument/2006/relationships" id="2147483658" r:id="R118af9961363486f"/>
-    <p:sldLayoutId xmlns:r="http://schemas.openxmlformats.org/officeDocument/2006/relationships" id="2147483659" r:id="R32846279cdb44ee6"/>
+    <p:sldLayoutId xmlns:r="http://schemas.openxmlformats.org/officeDocument/2006/relationships" id="2147483649" r:id="R5e19973675e845d4"/>
+    <p:sldLayoutId xmlns:r="http://schemas.openxmlformats.org/officeDocument/2006/relationships" id="2147483650" r:id="R5bb0435708444f41"/>
+    <p:sldLayoutId xmlns:r="http://schemas.openxmlformats.org/officeDocument/2006/relationships" id="2147483651" r:id="Ra3d6c12f320844d1"/>
+    <p:sldLayoutId xmlns:r="http://schemas.openxmlformats.org/officeDocument/2006/relationships" id="2147483652" r:id="R859a75650c3648ae"/>
+    <p:sldLayoutId xmlns:r="http://schemas.openxmlformats.org/officeDocument/2006/relationships" id="2147483653" r:id="Rc87b6ebd19b543f1"/>
+    <p:sldLayoutId xmlns:r="http://schemas.openxmlformats.org/officeDocument/2006/relationships" id="2147483654" r:id="R9ee0101d90714106"/>
+    <p:sldLayoutId xmlns:r="http://schemas.openxmlformats.org/officeDocument/2006/relationships" id="2147483655" r:id="Rb8274810bae446c4"/>
+    <p:sldLayoutId xmlns:r="http://schemas.openxmlformats.org/officeDocument/2006/relationships" id="2147483656" r:id="R78e04e99dd5f46bc"/>
+    <p:sldLayoutId xmlns:r="http://schemas.openxmlformats.org/officeDocument/2006/relationships" id="2147483657" r:id="Rade596d3f6b64ff2"/>
+    <p:sldLayoutId xmlns:r="http://schemas.openxmlformats.org/officeDocument/2006/relationships" id="2147483658" r:id="R33c08defc85b45d7"/>
+    <p:sldLayoutId xmlns:r="http://schemas.openxmlformats.org/officeDocument/2006/relationships" id="2147483659" r:id="Rae658ab39f16459f"/>
   </p:sldLayoutIdLst>
   <p:hf hdr="0" ftr="0" dt="0"/>
   <p:txStyles>
@@ -4950,24 +4950,13 @@
             <a:r>
               <a:rPr sz="2400">
                 <a:solidFill>
-                  <a:srgbClr val="080808"/>
-                </a:solidFill>
-                <a:latin typeface="JetBrains Mono"/>
-                <a:ea typeface="JetBrains Mono"/>
-                <a:cs typeface="JetBrains Mono"/>
-              </a:rPr>
-              <a:t> </a:t>
-            </a:r>
-            <a:r>
-              <a:rPr sz="2400">
-                <a:solidFill>
                   <a:srgbClr val="1750EB"/>
                 </a:solidFill>
                 <a:latin typeface="JetBrains Mono"/>
                 <a:ea typeface="JetBrains Mono"/>
                 <a:cs typeface="JetBrains Mono"/>
               </a:rPr>
-              <a:t>range</a:t>
+              <a:t> range</a:t>
             </a:r>
             <a:r>
               <a:rPr sz="2400">
@@ -5199,24 +5188,13 @@
             <a:r>
               <a:rPr sz="2400">
                 <a:solidFill>
-                  <a:srgbClr val="080808"/>
-                </a:solidFill>
-                <a:latin typeface="JetBrains Mono"/>
-                <a:ea typeface="JetBrains Mono"/>
-                <a:cs typeface="JetBrains Mono"/>
-              </a:rPr>
-              <a:t>    </a:t>
-            </a:r>
-            <a:r>
-              <a:rPr sz="2400">
-                <a:solidFill>
                   <a:srgbClr val="1750EB"/>
                 </a:solidFill>
                 <a:latin typeface="JetBrains Mono"/>
                 <a:ea typeface="JetBrains Mono"/>
                 <a:cs typeface="JetBrains Mono"/>
               </a:rPr>
-              <a:t>print</a:t>
+              <a:t>    print</a:t>
             </a:r>
             <a:r>
               <a:rPr sz="2400">
@@ -5569,24 +5547,13 @@
             <a:r>
               <a:rPr sz="2400">
                 <a:solidFill>
-                  <a:srgbClr val="080808"/>
-                </a:solidFill>
-                <a:latin typeface="JetBrains Mono"/>
-                <a:ea typeface="JetBrains Mono"/>
-                <a:cs typeface="JetBrains Mono"/>
-              </a:rPr>
-              <a:t> </a:t>
-            </a:r>
-            <a:r>
-              <a:rPr sz="2400">
-                <a:solidFill>
                   <a:srgbClr val="1750EB"/>
                 </a:solidFill>
                 <a:latin typeface="JetBrains Mono"/>
                 <a:ea typeface="JetBrains Mono"/>
                 <a:cs typeface="JetBrains Mono"/>
               </a:rPr>
-              <a:t>range</a:t>
+              <a:t> range</a:t>
             </a:r>
             <a:r>
               <a:rPr sz="2400">
@@ -5818,24 +5785,13 @@
             <a:r>
               <a:rPr sz="2400">
                 <a:solidFill>
-                  <a:srgbClr val="080808"/>
-                </a:solidFill>
-                <a:latin typeface="JetBrains Mono"/>
-                <a:ea typeface="JetBrains Mono"/>
-                <a:cs typeface="JetBrains Mono"/>
-              </a:rPr>
-              <a:t>    </a:t>
-            </a:r>
-            <a:r>
-              <a:rPr sz="2400">
-                <a:solidFill>
                   <a:srgbClr val="1750EB"/>
                 </a:solidFill>
                 <a:latin typeface="JetBrains Mono"/>
                 <a:ea typeface="JetBrains Mono"/>
                 <a:cs typeface="JetBrains Mono"/>
               </a:rPr>
-              <a:t>print</a:t>
+              <a:t>    print</a:t>
             </a:r>
             <a:r>
               <a:rPr sz="2400">
@@ -6188,24 +6144,13 @@
             <a:r>
               <a:rPr sz="2400">
                 <a:solidFill>
-                  <a:srgbClr val="080808"/>
-                </a:solidFill>
-                <a:latin typeface="JetBrains Mono"/>
-                <a:ea typeface="JetBrains Mono"/>
-                <a:cs typeface="JetBrains Mono"/>
-              </a:rPr>
-              <a:t> </a:t>
-            </a:r>
-            <a:r>
-              <a:rPr sz="2400">
-                <a:solidFill>
                   <a:srgbClr val="1750EB"/>
                 </a:solidFill>
                 <a:latin typeface="JetBrains Mono"/>
                 <a:ea typeface="JetBrains Mono"/>
                 <a:cs typeface="JetBrains Mono"/>
               </a:rPr>
-              <a:t>range</a:t>
+              <a:t> range</a:t>
             </a:r>
             <a:r>
               <a:rPr sz="2400">
@@ -6437,24 +6382,13 @@
             <a:r>
               <a:rPr sz="2400">
                 <a:solidFill>
-                  <a:srgbClr val="080808"/>
-                </a:solidFill>
-                <a:latin typeface="JetBrains Mono"/>
-                <a:ea typeface="JetBrains Mono"/>
-                <a:cs typeface="JetBrains Mono"/>
-              </a:rPr>
-              <a:t>    </a:t>
-            </a:r>
-            <a:r>
-              <a:rPr sz="2400">
-                <a:solidFill>
                   <a:srgbClr val="1750EB"/>
                 </a:solidFill>
                 <a:latin typeface="JetBrains Mono"/>
                 <a:ea typeface="JetBrains Mono"/>
                 <a:cs typeface="JetBrains Mono"/>
               </a:rPr>
-              <a:t>print</a:t>
+              <a:t>    print</a:t>
             </a:r>
             <a:r>
               <a:rPr sz="2400">
@@ -7060,24 +6994,13 @@
             <a:r>
               <a:rPr sz="1400">
                 <a:solidFill>
-                  <a:srgbClr val="080808"/>
-                </a:solidFill>
-                <a:latin typeface="JetBrains Mono"/>
-                <a:ea typeface="JetBrains Mono"/>
-                <a:cs typeface="JetBrains Mono"/>
-              </a:rPr>
-              <a:t> </a:t>
-            </a:r>
-            <a:r>
-              <a:rPr sz="1400">
-                <a:solidFill>
                   <a:srgbClr val="1750EB"/>
                 </a:solidFill>
                 <a:latin typeface="JetBrains Mono"/>
                 <a:ea typeface="JetBrains Mono"/>
                 <a:cs typeface="JetBrains Mono"/>
               </a:rPr>
-              <a:t>range</a:t>
+              <a:t> range</a:t>
             </a:r>
             <a:r>
               <a:rPr sz="1400">
@@ -7319,24 +7242,13 @@
             <a:r>
               <a:rPr sz="1400">
                 <a:solidFill>
-                  <a:srgbClr val="080808"/>
-                </a:solidFill>
-                <a:latin typeface="JetBrains Mono"/>
-                <a:ea typeface="JetBrains Mono"/>
-                <a:cs typeface="JetBrains Mono"/>
-              </a:rPr>
-              <a:t>    </a:t>
-            </a:r>
-            <a:r>
-              <a:rPr sz="1400">
-                <a:solidFill>
                   <a:srgbClr val="1750EB"/>
                 </a:solidFill>
                 <a:latin typeface="JetBrains Mono"/>
                 <a:ea typeface="JetBrains Mono"/>
                 <a:cs typeface="JetBrains Mono"/>
               </a:rPr>
-              <a:t>print</a:t>
+              <a:t>    print</a:t>
             </a:r>
             <a:r>
               <a:rPr sz="1400">
@@ -7897,24 +7809,13 @@
             <a:r>
               <a:rPr sz="1400">
                 <a:solidFill>
-                  <a:srgbClr val="080808"/>
-                </a:solidFill>
-                <a:latin typeface="JetBrains Mono"/>
-                <a:ea typeface="JetBrains Mono"/>
-                <a:cs typeface="JetBrains Mono"/>
-              </a:rPr>
-              <a:t> </a:t>
-            </a:r>
-            <a:r>
-              <a:rPr sz="1400">
-                <a:solidFill>
                   <a:srgbClr val="1750EB"/>
                 </a:solidFill>
                 <a:latin typeface="JetBrains Mono"/>
                 <a:ea typeface="JetBrains Mono"/>
                 <a:cs typeface="JetBrains Mono"/>
               </a:rPr>
-              <a:t>range</a:t>
+              <a:t> range</a:t>
             </a:r>
             <a:r>
               <a:rPr sz="1400">
@@ -8156,24 +8057,13 @@
             <a:r>
               <a:rPr sz="1400">
                 <a:solidFill>
-                  <a:srgbClr val="080808"/>
-                </a:solidFill>
-                <a:latin typeface="JetBrains Mono"/>
-                <a:ea typeface="JetBrains Mono"/>
-                <a:cs typeface="JetBrains Mono"/>
-              </a:rPr>
-              <a:t>    </a:t>
-            </a:r>
-            <a:r>
-              <a:rPr sz="1400">
-                <a:solidFill>
                   <a:srgbClr val="1750EB"/>
                 </a:solidFill>
                 <a:latin typeface="JetBrains Mono"/>
                 <a:ea typeface="JetBrains Mono"/>
                 <a:cs typeface="JetBrains Mono"/>
               </a:rPr>
-              <a:t>print</a:t>
+              <a:t>    print</a:t>
             </a:r>
             <a:r>
               <a:rPr sz="1400">
@@ -8819,24 +8709,13 @@
             <a:r>
               <a:rPr sz="1400">
                 <a:solidFill>
-                  <a:srgbClr val="080808"/>
-                </a:solidFill>
-                <a:latin typeface="JetBrains Mono"/>
-                <a:ea typeface="JetBrains Mono"/>
-                <a:cs typeface="JetBrains Mono"/>
-              </a:rPr>
-              <a:t> </a:t>
-            </a:r>
-            <a:r>
-              <a:rPr sz="1400">
-                <a:solidFill>
                   <a:srgbClr val="1750EB"/>
                 </a:solidFill>
                 <a:latin typeface="JetBrains Mono"/>
                 <a:ea typeface="JetBrains Mono"/>
                 <a:cs typeface="JetBrains Mono"/>
               </a:rPr>
-              <a:t>range</a:t>
+              <a:t> range</a:t>
             </a:r>
             <a:r>
               <a:rPr sz="1400">
@@ -9078,24 +8957,13 @@
             <a:r>
               <a:rPr sz="1400">
                 <a:solidFill>
-                  <a:srgbClr val="080808"/>
-                </a:solidFill>
-                <a:latin typeface="JetBrains Mono"/>
-                <a:ea typeface="JetBrains Mono"/>
-                <a:cs typeface="JetBrains Mono"/>
-              </a:rPr>
-              <a:t>    </a:t>
-            </a:r>
-            <a:r>
-              <a:rPr sz="1400">
-                <a:solidFill>
                   <a:srgbClr val="1750EB"/>
                 </a:solidFill>
                 <a:latin typeface="JetBrains Mono"/>
                 <a:ea typeface="JetBrains Mono"/>
                 <a:cs typeface="JetBrains Mono"/>
               </a:rPr>
-              <a:t>print</a:t>
+              <a:t>    print</a:t>
             </a:r>
             <a:r>
               <a:rPr sz="1400">
@@ -9653,24 +9521,13 @@
             <a:r>
               <a:rPr sz="1400">
                 <a:solidFill>
-                  <a:srgbClr val="080808"/>
-                </a:solidFill>
-                <a:latin typeface="JetBrains Mono"/>
-                <a:ea typeface="JetBrains Mono"/>
-                <a:cs typeface="JetBrains Mono"/>
-              </a:rPr>
-              <a:t> </a:t>
-            </a:r>
-            <a:r>
-              <a:rPr sz="1400">
-                <a:solidFill>
                   <a:srgbClr val="1750EB"/>
                 </a:solidFill>
                 <a:latin typeface="JetBrains Mono"/>
                 <a:ea typeface="JetBrains Mono"/>
                 <a:cs typeface="JetBrains Mono"/>
               </a:rPr>
-              <a:t>range</a:t>
+              <a:t> range</a:t>
             </a:r>
             <a:r>
               <a:rPr sz="1400">
@@ -9912,24 +9769,13 @@
             <a:r>
               <a:rPr sz="1400">
                 <a:solidFill>
-                  <a:srgbClr val="080808"/>
-                </a:solidFill>
-                <a:latin typeface="JetBrains Mono"/>
-                <a:ea typeface="JetBrains Mono"/>
-                <a:cs typeface="JetBrains Mono"/>
-              </a:rPr>
-              <a:t>    </a:t>
-            </a:r>
-            <a:r>
-              <a:rPr sz="1400">
-                <a:solidFill>
                   <a:srgbClr val="1750EB"/>
                 </a:solidFill>
                 <a:latin typeface="JetBrains Mono"/>
                 <a:ea typeface="JetBrains Mono"/>
                 <a:cs typeface="JetBrains Mono"/>
               </a:rPr>
-              <a:t>print</a:t>
+              <a:t>    print</a:t>
             </a:r>
             <a:r>
               <a:rPr sz="1400">
@@ -10130,24 +9976,13 @@
             <a:r>
               <a:rPr sz="1800">
                 <a:solidFill>
-                  <a:srgbClr val="080808"/>
-                </a:solidFill>
-                <a:latin typeface="JetBrains Mono"/>
-                <a:ea typeface="JetBrains Mono"/>
-                <a:cs typeface="JetBrains Mono"/>
-              </a:rPr>
-              <a:t> </a:t>
-            </a:r>
-            <a:r>
-              <a:rPr sz="1800">
-                <a:solidFill>
                   <a:srgbClr val="1750EB"/>
                 </a:solidFill>
                 <a:latin typeface="JetBrains Mono"/>
                 <a:ea typeface="JetBrains Mono"/>
                 <a:cs typeface="JetBrains Mono"/>
               </a:rPr>
-              <a:t>range</a:t>
+              <a:t> range</a:t>
             </a:r>
             <a:r>
               <a:rPr sz="1800">
@@ -10327,24 +10162,13 @@
             <a:r>
               <a:rPr sz="1800">
                 <a:solidFill>
-                  <a:srgbClr val="080808"/>
-                </a:solidFill>
-                <a:latin typeface="JetBrains Mono"/>
-                <a:ea typeface="JetBrains Mono"/>
-                <a:cs typeface="JetBrains Mono"/>
-              </a:rPr>
-              <a:t>    </a:t>
-            </a:r>
-            <a:r>
-              <a:rPr sz="1800">
-                <a:solidFill>
                   <a:srgbClr val="1750EB"/>
                 </a:solidFill>
                 <a:latin typeface="JetBrains Mono"/>
                 <a:ea typeface="JetBrains Mono"/>
                 <a:cs typeface="JetBrains Mono"/>
               </a:rPr>
-              <a:t>print</a:t>
+              <a:t>    print</a:t>
             </a:r>
             <a:r>
               <a:rPr sz="1800">
